--- a/statistics_06_logistic_regression.pptx
+++ b/statistics_06_logistic_regression.pptx
@@ -5,18 +5,19 @@
     <p:sldMasterId id="2147483659" r:id="rId1"/>
   </p:sldMasterIdLst>
   <p:notesMasterIdLst>
-    <p:notesMasterId r:id="rId11"/>
+    <p:notesMasterId r:id="rId12"/>
   </p:notesMasterIdLst>
   <p:sldIdLst>
     <p:sldId id="289" r:id="rId2"/>
-    <p:sldId id="304" r:id="rId3"/>
-    <p:sldId id="302" r:id="rId4"/>
-    <p:sldId id="305" r:id="rId5"/>
-    <p:sldId id="306" r:id="rId6"/>
-    <p:sldId id="307" r:id="rId7"/>
-    <p:sldId id="303" r:id="rId8"/>
-    <p:sldId id="309" r:id="rId9"/>
-    <p:sldId id="313" r:id="rId10"/>
+    <p:sldId id="305" r:id="rId3"/>
+    <p:sldId id="258" r:id="rId4"/>
+    <p:sldId id="313" r:id="rId5"/>
+    <p:sldId id="302" r:id="rId6"/>
+    <p:sldId id="304" r:id="rId7"/>
+    <p:sldId id="306" r:id="rId8"/>
+    <p:sldId id="307" r:id="rId9"/>
+    <p:sldId id="303" r:id="rId10"/>
+    <p:sldId id="309" r:id="rId11"/>
   </p:sldIdLst>
   <p:sldSz cx="12192000" cy="6858000"/>
   <p:notesSz cx="6858000" cy="9144000"/>
@@ -1448,6 +1449,161 @@
     </a:lvl9pPr>
   </p:notesStyle>
 </p:notesMaster>
+</file>
+
+<file path=ppt/notesSlides/notesSlide1.xml><?xml version="1.0" encoding="utf-8"?>
+<p:notes xmlns:a="http://schemas.openxmlformats.org/drawingml/2006/main" xmlns:r="http://schemas.openxmlformats.org/officeDocument/2006/relationships" xmlns:p="http://schemas.openxmlformats.org/presentationml/2006/main" showMasterSp="0" showMasterPhAnim="0">
+  <p:cSld>
+    <p:spTree>
+      <p:nvGrpSpPr>
+        <p:cNvPr id="1" name="Shape 96"/>
+        <p:cNvGrpSpPr/>
+        <p:nvPr/>
+      </p:nvGrpSpPr>
+      <p:grpSpPr>
+        <a:xfrm>
+          <a:off x="0" y="0"/>
+          <a:ext cx="0" cy="0"/>
+          <a:chOff x="0" y="0"/>
+          <a:chExt cx="0" cy="0"/>
+        </a:xfrm>
+      </p:grpSpPr>
+      <p:sp>
+        <p:nvSpPr>
+          <p:cNvPr id="97" name="Google Shape;97;g2f3c5d7ced_0_12:notes"/>
+          <p:cNvSpPr>
+            <a:spLocks noGrp="1" noRot="1" noChangeAspect="1"/>
+          </p:cNvSpPr>
+          <p:nvPr>
+            <p:ph type="sldImg" idx="2"/>
+          </p:nvPr>
+        </p:nvSpPr>
+        <p:spPr>
+          <a:xfrm>
+            <a:off x="685800" y="1143000"/>
+            <a:ext cx="5486400" cy="3086100"/>
+          </a:xfrm>
+          <a:custGeom>
+            <a:avLst/>
+            <a:gdLst/>
+            <a:ahLst/>
+            <a:cxnLst/>
+            <a:rect l="l" t="t" r="r" b="b"/>
+            <a:pathLst>
+              <a:path w="120000" h="120000" extrusionOk="0">
+                <a:moveTo>
+                  <a:pt x="0" y="0"/>
+                </a:moveTo>
+                <a:lnTo>
+                  <a:pt x="120000" y="0"/>
+                </a:lnTo>
+                <a:lnTo>
+                  <a:pt x="120000" y="120000"/>
+                </a:lnTo>
+                <a:lnTo>
+                  <a:pt x="0" y="120000"/>
+                </a:lnTo>
+                <a:close/>
+              </a:path>
+            </a:pathLst>
+          </a:custGeom>
+        </p:spPr>
+      </p:sp>
+      <p:sp>
+        <p:nvSpPr>
+          <p:cNvPr id="98" name="Google Shape;98;g2f3c5d7ced_0_12:notes"/>
+          <p:cNvSpPr txBox="1">
+            <a:spLocks noGrp="1"/>
+          </p:cNvSpPr>
+          <p:nvPr>
+            <p:ph type="body" idx="1"/>
+          </p:nvPr>
+        </p:nvSpPr>
+        <p:spPr>
+          <a:xfrm>
+            <a:off x="685800" y="4400550"/>
+            <a:ext cx="5486400" cy="3600600"/>
+          </a:xfrm>
+          <a:prstGeom prst="rect">
+            <a:avLst/>
+          </a:prstGeom>
+        </p:spPr>
+        <p:txBody>
+          <a:bodyPr spcFirstLastPara="1" wrap="square" lIns="91425" tIns="91425" rIns="91425" bIns="91425" anchor="t" anchorCtr="0">
+            <a:noAutofit/>
+          </a:bodyPr>
+          <a:lstStyle/>
+          <a:p>
+            <a:pPr marL="0" lvl="0" indent="0" algn="l" rtl="0">
+              <a:spcBef>
+                <a:spcPts val="0"/>
+              </a:spcBef>
+              <a:spcAft>
+                <a:spcPts val="0"/>
+              </a:spcAft>
+              <a:buNone/>
+            </a:pPr>
+            <a:endParaRPr/>
+          </a:p>
+        </p:txBody>
+      </p:sp>
+      <p:sp>
+        <p:nvSpPr>
+          <p:cNvPr id="99" name="Google Shape;99;g2f3c5d7ced_0_12:notes"/>
+          <p:cNvSpPr txBox="1">
+            <a:spLocks noGrp="1"/>
+          </p:cNvSpPr>
+          <p:nvPr>
+            <p:ph type="sldNum" idx="12"/>
+          </p:nvPr>
+        </p:nvSpPr>
+        <p:spPr>
+          <a:xfrm>
+            <a:off x="3884613" y="8685213"/>
+            <a:ext cx="2971800" cy="458700"/>
+          </a:xfrm>
+          <a:prstGeom prst="rect">
+            <a:avLst/>
+          </a:prstGeom>
+        </p:spPr>
+        <p:txBody>
+          <a:bodyPr spcFirstLastPara="1" wrap="square" lIns="91425" tIns="45700" rIns="91425" bIns="45700" anchor="b" anchorCtr="0">
+            <a:noAutofit/>
+          </a:bodyPr>
+          <a:lstStyle/>
+          <a:p>
+            <a:pPr marL="0" lvl="0" indent="0" algn="r" rtl="0">
+              <a:spcBef>
+                <a:spcPts val="0"/>
+              </a:spcBef>
+              <a:spcAft>
+                <a:spcPts val="0"/>
+              </a:spcAft>
+              <a:buClr>
+                <a:srgbClr val="000000"/>
+              </a:buClr>
+              <a:buFont typeface="Arial"/>
+              <a:buNone/>
+            </a:pPr>
+            <a:fld id="{00000000-1234-1234-1234-123412341234}" type="slidenum">
+              <a:rPr lang="en-US"/>
+              <a:t>3</a:t>
+            </a:fld>
+            <a:endParaRPr/>
+          </a:p>
+        </p:txBody>
+      </p:sp>
+    </p:spTree>
+    <p:extLst>
+      <p:ext uri="{BB962C8B-B14F-4D97-AF65-F5344CB8AC3E}">
+        <p14:creationId xmlns:p14="http://schemas.microsoft.com/office/powerpoint/2010/main" val="3022708699"/>
+      </p:ext>
+    </p:extLst>
+  </p:cSld>
+  <p:clrMapOvr>
+    <a:masterClrMapping/>
+  </p:clrMapOvr>
+</p:notes>
 </file>
 
 <file path=ppt/slideLayouts/slideLayout1.xml><?xml version="1.0" encoding="utf-8"?>
@@ -13174,7 +13330,7 @@
         </p:nvSpPr>
         <p:spPr>
           <a:xfrm>
-            <a:off x="111512" y="142019"/>
+            <a:off x="61249" y="0"/>
             <a:ext cx="5818641" cy="830997"/>
           </a:xfrm>
           <a:prstGeom prst="rect">
@@ -13245,7 +13401,7 @@
           </p:cNvPicPr>
           <p:nvPr/>
         </p:nvPicPr>
-        <p:blipFill>
+        <p:blipFill rotWithShape="1">
           <a:blip r:embed="rId3" cstate="email">
             <a:extLst>
               <a:ext uri="{28A0092B-C50C-407E-A947-70E740481C1C}">
@@ -13253,14 +13409,13 @@
               </a:ext>
             </a:extLst>
           </a:blip>
-          <a:stretch>
-            <a:fillRect/>
-          </a:stretch>
+          <a:srcRect/>
+          <a:stretch/>
         </p:blipFill>
         <p:spPr>
           <a:xfrm>
-            <a:off x="111512" y="1203961"/>
-            <a:ext cx="3597637" cy="1749310"/>
+            <a:off x="241779" y="1392566"/>
+            <a:ext cx="3597637" cy="926708"/>
           </a:xfrm>
           <a:prstGeom prst="rect">
             <a:avLst/>
@@ -13330,12 +13485,19 @@
         </p:blipFill>
         <p:spPr>
           <a:xfrm>
-            <a:off x="161772" y="3866178"/>
+            <a:off x="161771" y="4503730"/>
             <a:ext cx="5718119" cy="2129898"/>
           </a:xfrm>
           <a:prstGeom prst="rect">
             <a:avLst/>
           </a:prstGeom>
+          <a:ln>
+            <a:solidFill>
+              <a:schemeClr val="accent1">
+                <a:shade val="50000"/>
+              </a:schemeClr>
+            </a:solidFill>
+          </a:ln>
         </p:spPr>
       </p:pic>
       <p:sp>
@@ -13352,13 +13514,18 @@
         </p:nvSpPr>
         <p:spPr>
           <a:xfrm>
-            <a:off x="315421" y="3127514"/>
-            <a:ext cx="5383014" cy="738664"/>
+            <a:off x="161771" y="3629511"/>
+            <a:ext cx="5718119" cy="738664"/>
           </a:xfrm>
           <a:prstGeom prst="rect">
             <a:avLst/>
           </a:prstGeom>
-          <a:noFill/>
+          <a:solidFill>
+            <a:schemeClr val="accent4">
+              <a:lumMod val="20000"/>
+              <a:lumOff val="80000"/>
+            </a:schemeClr>
+          </a:solidFill>
         </p:spPr>
         <p:txBody>
           <a:bodyPr wrap="square" rtlCol="0">
@@ -13453,10 +13620,1352 @@
           </a:p>
         </p:txBody>
       </p:sp>
+      <p:sp>
+        <p:nvSpPr>
+          <p:cNvPr id="2" name="TextBox 1">
+            <a:extLst>
+              <a:ext uri="{FF2B5EF4-FFF2-40B4-BE49-F238E27FC236}">
+                <a16:creationId xmlns:a16="http://schemas.microsoft.com/office/drawing/2014/main" id="{5533DD3C-C766-27F7-E743-5B604F3DDFB8}"/>
+              </a:ext>
+            </a:extLst>
+          </p:cNvPr>
+          <p:cNvSpPr txBox="1"/>
+          <p:nvPr/>
+        </p:nvSpPr>
+        <p:spPr>
+          <a:xfrm>
+            <a:off x="435721" y="1079788"/>
+            <a:ext cx="3162692" cy="312778"/>
+          </a:xfrm>
+          <a:prstGeom prst="rect">
+            <a:avLst/>
+          </a:prstGeom>
+          <a:solidFill>
+            <a:schemeClr val="accent4">
+              <a:lumMod val="20000"/>
+              <a:lumOff val="80000"/>
+            </a:schemeClr>
+          </a:solidFill>
+        </p:spPr>
+        <p:txBody>
+          <a:bodyPr wrap="square" rtlCol="0">
+            <a:spAutoFit/>
+          </a:bodyPr>
+          <a:lstStyle/>
+          <a:p>
+            <a:r>
+              <a:rPr lang="en-US" b="1" dirty="0">
+                <a:solidFill>
+                  <a:srgbClr val="FF0000"/>
+                </a:solidFill>
+              </a:rPr>
+              <a:t> log odds</a:t>
+            </a:r>
+            <a:r>
+              <a:rPr lang="en-US" dirty="0"/>
+              <a:t> – fitted with a </a:t>
+            </a:r>
+            <a:r>
+              <a:rPr lang="en-US" b="1" dirty="0">
+                <a:solidFill>
+                  <a:srgbClr val="FF0000"/>
+                </a:solidFill>
+              </a:rPr>
+              <a:t>linear model</a:t>
+            </a:r>
+            <a:endParaRPr lang="en-US" b="1">
+              <a:solidFill>
+                <a:srgbClr val="FF0000"/>
+              </a:solidFill>
+            </a:endParaRPr>
+          </a:p>
+        </p:txBody>
+      </p:sp>
+      <p:pic>
+        <p:nvPicPr>
+          <p:cNvPr id="3" name="Picture 2">
+            <a:extLst>
+              <a:ext uri="{FF2B5EF4-FFF2-40B4-BE49-F238E27FC236}">
+                <a16:creationId xmlns:a16="http://schemas.microsoft.com/office/drawing/2014/main" id="{5E4D0F13-23CD-C259-3881-ED2BFD541B5B}"/>
+              </a:ext>
+            </a:extLst>
+          </p:cNvPr>
+          <p:cNvPicPr>
+            <a:picLocks noChangeAspect="1"/>
+          </p:cNvPicPr>
+          <p:nvPr/>
+        </p:nvPicPr>
+        <p:blipFill>
+          <a:blip r:embed="rId6" cstate="email">
+            <a:extLst>
+              <a:ext uri="{28A0092B-C50C-407E-A947-70E740481C1C}">
+                <a14:useLocalDpi xmlns:a14="http://schemas.microsoft.com/office/drawing/2010/main"/>
+              </a:ext>
+            </a:extLst>
+          </a:blip>
+          <a:stretch>
+            <a:fillRect/>
+          </a:stretch>
+        </p:blipFill>
+        <p:spPr>
+          <a:xfrm>
+            <a:off x="1808901" y="2487969"/>
+            <a:ext cx="2323336" cy="826422"/>
+          </a:xfrm>
+          <a:prstGeom prst="rect">
+            <a:avLst/>
+          </a:prstGeom>
+        </p:spPr>
+      </p:pic>
+      <p:sp>
+        <p:nvSpPr>
+          <p:cNvPr id="11" name="TextBox 10">
+            <a:extLst>
+              <a:ext uri="{FF2B5EF4-FFF2-40B4-BE49-F238E27FC236}">
+                <a16:creationId xmlns:a16="http://schemas.microsoft.com/office/drawing/2014/main" id="{56EDB5A6-B7E6-92DB-4064-0BA0584E43B6}"/>
+              </a:ext>
+            </a:extLst>
+          </p:cNvPr>
+          <p:cNvSpPr txBox="1"/>
+          <p:nvPr/>
+        </p:nvSpPr>
+        <p:spPr>
+          <a:xfrm>
+            <a:off x="1136469" y="2612571"/>
+            <a:ext cx="737747" cy="461665"/>
+          </a:xfrm>
+          <a:prstGeom prst="rect">
+            <a:avLst/>
+          </a:prstGeom>
+          <a:noFill/>
+        </p:spPr>
+        <p:txBody>
+          <a:bodyPr wrap="square" rtlCol="0">
+            <a:spAutoFit/>
+          </a:bodyPr>
+          <a:lstStyle/>
+          <a:p>
+            <a:r>
+              <a:rPr lang="en-US" sz="2400" i="1">
+                <a:latin typeface="Times" pitchFamily="2" charset="0"/>
+              </a:rPr>
+              <a:t>P</a:t>
+            </a:r>
+            <a:r>
+              <a:rPr lang="en-US" sz="2400">
+                <a:latin typeface="Times" pitchFamily="2" charset="0"/>
+              </a:rPr>
+              <a:t> = </a:t>
+            </a:r>
+          </a:p>
+        </p:txBody>
+      </p:sp>
     </p:spTree>
     <p:extLst>
       <p:ext uri="{BB962C8B-B14F-4D97-AF65-F5344CB8AC3E}">
         <p14:creationId xmlns:p14="http://schemas.microsoft.com/office/powerpoint/2010/main" val="1601691013"/>
+      </p:ext>
+    </p:extLst>
+  </p:cSld>
+  <p:clrMapOvr>
+    <a:masterClrMapping/>
+  </p:clrMapOvr>
+</p:sld>
+</file>
+
+<file path=ppt/slides/slide10.xml><?xml version="1.0" encoding="utf-8"?>
+<p:sld xmlns:a="http://schemas.openxmlformats.org/drawingml/2006/main" xmlns:r="http://schemas.openxmlformats.org/officeDocument/2006/relationships" xmlns:p="http://schemas.openxmlformats.org/presentationml/2006/main">
+  <p:cSld>
+    <p:spTree>
+      <p:nvGrpSpPr>
+        <p:cNvPr id="1" name=""/>
+        <p:cNvGrpSpPr/>
+        <p:nvPr/>
+      </p:nvGrpSpPr>
+      <p:grpSpPr>
+        <a:xfrm>
+          <a:off x="0" y="0"/>
+          <a:ext cx="0" cy="0"/>
+          <a:chOff x="0" y="0"/>
+          <a:chExt cx="0" cy="0"/>
+        </a:xfrm>
+      </p:grpSpPr>
+      <p:sp>
+        <p:nvSpPr>
+          <p:cNvPr id="4" name="TextBox 3">
+            <a:extLst>
+              <a:ext uri="{FF2B5EF4-FFF2-40B4-BE49-F238E27FC236}">
+                <a16:creationId xmlns:a16="http://schemas.microsoft.com/office/drawing/2014/main" id="{F3FFBA43-19B0-A04A-A6F0-FA05EE555936}"/>
+              </a:ext>
+            </a:extLst>
+          </p:cNvPr>
+          <p:cNvSpPr txBox="1"/>
+          <p:nvPr/>
+        </p:nvSpPr>
+        <p:spPr>
+          <a:xfrm>
+            <a:off x="231494" y="173620"/>
+            <a:ext cx="8113853" cy="400110"/>
+          </a:xfrm>
+          <a:prstGeom prst="rect">
+            <a:avLst/>
+          </a:prstGeom>
+          <a:noFill/>
+        </p:spPr>
+        <p:txBody>
+          <a:bodyPr wrap="square" rtlCol="0">
+            <a:spAutoFit/>
+          </a:bodyPr>
+          <a:lstStyle/>
+          <a:p>
+            <a:r>
+              <a:rPr lang="en-US" sz="2000" b="1" dirty="0"/>
+              <a:t>Logistic Regression – Covariance Matrix calculation (Python)</a:t>
+            </a:r>
+          </a:p>
+        </p:txBody>
+      </p:sp>
+      <p:sp>
+        <p:nvSpPr>
+          <p:cNvPr id="5" name="TextBox 4">
+            <a:extLst>
+              <a:ext uri="{FF2B5EF4-FFF2-40B4-BE49-F238E27FC236}">
+                <a16:creationId xmlns:a16="http://schemas.microsoft.com/office/drawing/2014/main" id="{AC00C63F-DCE9-A445-8FEE-F7AC66486FCD}"/>
+              </a:ext>
+            </a:extLst>
+          </p:cNvPr>
+          <p:cNvSpPr txBox="1"/>
+          <p:nvPr/>
+        </p:nvSpPr>
+        <p:spPr>
+          <a:xfrm>
+            <a:off x="335666" y="613458"/>
+            <a:ext cx="6817488" cy="523220"/>
+          </a:xfrm>
+          <a:prstGeom prst="rect">
+            <a:avLst/>
+          </a:prstGeom>
+          <a:noFill/>
+        </p:spPr>
+        <p:txBody>
+          <a:bodyPr wrap="square" rtlCol="0">
+            <a:spAutoFit/>
+          </a:bodyPr>
+          <a:lstStyle/>
+          <a:p>
+            <a:r>
+              <a:rPr lang="en-US" dirty="0">
+                <a:hlinkClick r:id="rId2"/>
+              </a:rPr>
+              <a:t>https://</a:t>
+            </a:r>
+            <a:r>
+              <a:rPr lang="en-US" dirty="0" err="1">
+                <a:hlinkClick r:id="rId2"/>
+              </a:rPr>
+              <a:t>stats.stackexchange.com</a:t>
+            </a:r>
+            <a:r>
+              <a:rPr lang="en-US" dirty="0">
+                <a:hlinkClick r:id="rId2"/>
+              </a:rPr>
+              <a:t>/questions/89484/how-to-compute-the-standard-errors-of-a-logistic-regressions-coefficients</a:t>
+            </a:r>
+            <a:endParaRPr lang="en-US" dirty="0"/>
+          </a:p>
+        </p:txBody>
+      </p:sp>
+      <p:sp>
+        <p:nvSpPr>
+          <p:cNvPr id="6" name="TextBox 5">
+            <a:extLst>
+              <a:ext uri="{FF2B5EF4-FFF2-40B4-BE49-F238E27FC236}">
+                <a16:creationId xmlns:a16="http://schemas.microsoft.com/office/drawing/2014/main" id="{048C989A-2C74-E14A-B50F-A8EE0D7FC7AB}"/>
+              </a:ext>
+            </a:extLst>
+          </p:cNvPr>
+          <p:cNvSpPr txBox="1"/>
+          <p:nvPr/>
+        </p:nvSpPr>
+        <p:spPr>
+          <a:xfrm>
+            <a:off x="335667" y="1493134"/>
+            <a:ext cx="7176304" cy="4339650"/>
+          </a:xfrm>
+          <a:prstGeom prst="rect">
+            <a:avLst/>
+          </a:prstGeom>
+          <a:noFill/>
+        </p:spPr>
+        <p:txBody>
+          <a:bodyPr wrap="square" rtlCol="0">
+            <a:spAutoFit/>
+          </a:bodyPr>
+          <a:lstStyle/>
+          <a:p>
+            <a:r>
+              <a:rPr lang="en-US" sz="1200" dirty="0">
+                <a:solidFill>
+                  <a:srgbClr val="0070C0"/>
+                </a:solidFill>
+                <a:latin typeface="Consolas" panose="020B0609020204030204" pitchFamily="49" charset="0"/>
+                <a:cs typeface="Consolas" panose="020B0609020204030204" pitchFamily="49" charset="0"/>
+              </a:rPr>
+              <a:t>import </a:t>
+            </a:r>
+            <a:r>
+              <a:rPr lang="en-US" sz="1200" dirty="0" err="1">
+                <a:solidFill>
+                  <a:srgbClr val="0070C0"/>
+                </a:solidFill>
+                <a:latin typeface="Consolas" panose="020B0609020204030204" pitchFamily="49" charset="0"/>
+                <a:cs typeface="Consolas" panose="020B0609020204030204" pitchFamily="49" charset="0"/>
+              </a:rPr>
+              <a:t>numpy</a:t>
+            </a:r>
+            <a:r>
+              <a:rPr lang="en-US" sz="1200" dirty="0">
+                <a:solidFill>
+                  <a:srgbClr val="0070C0"/>
+                </a:solidFill>
+                <a:latin typeface="Consolas" panose="020B0609020204030204" pitchFamily="49" charset="0"/>
+                <a:cs typeface="Consolas" panose="020B0609020204030204" pitchFamily="49" charset="0"/>
+              </a:rPr>
+              <a:t> as np</a:t>
+            </a:r>
+          </a:p>
+          <a:p>
+            <a:r>
+              <a:rPr lang="en-US" sz="1200" dirty="0">
+                <a:solidFill>
+                  <a:srgbClr val="0070C0"/>
+                </a:solidFill>
+                <a:latin typeface="Consolas" panose="020B0609020204030204" pitchFamily="49" charset="0"/>
+                <a:cs typeface="Consolas" panose="020B0609020204030204" pitchFamily="49" charset="0"/>
+              </a:rPr>
+              <a:t>from </a:t>
+            </a:r>
+            <a:r>
+              <a:rPr lang="en-US" sz="1200" dirty="0" err="1">
+                <a:solidFill>
+                  <a:srgbClr val="0070C0"/>
+                </a:solidFill>
+                <a:latin typeface="Consolas" panose="020B0609020204030204" pitchFamily="49" charset="0"/>
+                <a:cs typeface="Consolas" panose="020B0609020204030204" pitchFamily="49" charset="0"/>
+              </a:rPr>
+              <a:t>sklearn</a:t>
+            </a:r>
+            <a:r>
+              <a:rPr lang="en-US" sz="1200" dirty="0">
+                <a:solidFill>
+                  <a:srgbClr val="0070C0"/>
+                </a:solidFill>
+                <a:latin typeface="Consolas" panose="020B0609020204030204" pitchFamily="49" charset="0"/>
+                <a:cs typeface="Consolas" panose="020B0609020204030204" pitchFamily="49" charset="0"/>
+              </a:rPr>
+              <a:t> import </a:t>
+            </a:r>
+            <a:r>
+              <a:rPr lang="en-US" sz="1200" dirty="0" err="1">
+                <a:solidFill>
+                  <a:srgbClr val="0070C0"/>
+                </a:solidFill>
+                <a:latin typeface="Consolas" panose="020B0609020204030204" pitchFamily="49" charset="0"/>
+                <a:cs typeface="Consolas" panose="020B0609020204030204" pitchFamily="49" charset="0"/>
+              </a:rPr>
+              <a:t>linear_model</a:t>
+            </a:r>
+            <a:endParaRPr lang="en-US" sz="1200" dirty="0">
+              <a:solidFill>
+                <a:srgbClr val="0070C0"/>
+              </a:solidFill>
+              <a:latin typeface="Consolas" panose="020B0609020204030204" pitchFamily="49" charset="0"/>
+              <a:cs typeface="Consolas" panose="020B0609020204030204" pitchFamily="49" charset="0"/>
+            </a:endParaRPr>
+          </a:p>
+          <a:p>
+            <a:endParaRPr lang="en-US" sz="1200" dirty="0">
+              <a:solidFill>
+                <a:srgbClr val="0070C0"/>
+              </a:solidFill>
+              <a:latin typeface="Consolas" panose="020B0609020204030204" pitchFamily="49" charset="0"/>
+              <a:cs typeface="Consolas" panose="020B0609020204030204" pitchFamily="49" charset="0"/>
+            </a:endParaRPr>
+          </a:p>
+          <a:p>
+            <a:r>
+              <a:rPr lang="en-US" sz="1200" dirty="0">
+                <a:solidFill>
+                  <a:srgbClr val="0070C0"/>
+                </a:solidFill>
+                <a:latin typeface="Consolas" panose="020B0609020204030204" pitchFamily="49" charset="0"/>
+                <a:cs typeface="Consolas" panose="020B0609020204030204" pitchFamily="49" charset="0"/>
+              </a:rPr>
+              <a:t>logit = </a:t>
+            </a:r>
+            <a:r>
+              <a:rPr lang="en-US" sz="1200" dirty="0" err="1">
+                <a:solidFill>
+                  <a:srgbClr val="0070C0"/>
+                </a:solidFill>
+                <a:latin typeface="Consolas" panose="020B0609020204030204" pitchFamily="49" charset="0"/>
+                <a:cs typeface="Consolas" panose="020B0609020204030204" pitchFamily="49" charset="0"/>
+              </a:rPr>
+              <a:t>linear_model.LogisticRegression</a:t>
+            </a:r>
+            <a:r>
+              <a:rPr lang="en-US" sz="1200" dirty="0">
+                <a:solidFill>
+                  <a:srgbClr val="0070C0"/>
+                </a:solidFill>
+                <a:latin typeface="Consolas" panose="020B0609020204030204" pitchFamily="49" charset="0"/>
+                <a:cs typeface="Consolas" panose="020B0609020204030204" pitchFamily="49" charset="0"/>
+              </a:rPr>
+              <a:t>()</a:t>
+            </a:r>
+          </a:p>
+          <a:p>
+            <a:r>
+              <a:rPr lang="en-US" sz="1200" dirty="0" err="1">
+                <a:solidFill>
+                  <a:srgbClr val="0070C0"/>
+                </a:solidFill>
+                <a:latin typeface="Consolas" panose="020B0609020204030204" pitchFamily="49" charset="0"/>
+                <a:cs typeface="Consolas" panose="020B0609020204030204" pitchFamily="49" charset="0"/>
+              </a:rPr>
+              <a:t>resLogit</a:t>
+            </a:r>
+            <a:r>
+              <a:rPr lang="en-US" sz="1200" dirty="0">
+                <a:solidFill>
+                  <a:srgbClr val="0070C0"/>
+                </a:solidFill>
+                <a:latin typeface="Consolas" panose="020B0609020204030204" pitchFamily="49" charset="0"/>
+                <a:cs typeface="Consolas" panose="020B0609020204030204" pitchFamily="49" charset="0"/>
+              </a:rPr>
+              <a:t> = </a:t>
+            </a:r>
+            <a:r>
+              <a:rPr lang="en-US" sz="1200" dirty="0" err="1">
+                <a:solidFill>
+                  <a:srgbClr val="0070C0"/>
+                </a:solidFill>
+                <a:latin typeface="Consolas" panose="020B0609020204030204" pitchFamily="49" charset="0"/>
+                <a:cs typeface="Consolas" panose="020B0609020204030204" pitchFamily="49" charset="0"/>
+              </a:rPr>
+              <a:t>logit.fit</a:t>
+            </a:r>
+            <a:r>
+              <a:rPr lang="en-US" sz="1200" dirty="0">
+                <a:solidFill>
+                  <a:srgbClr val="0070C0"/>
+                </a:solidFill>
+                <a:latin typeface="Consolas" panose="020B0609020204030204" pitchFamily="49" charset="0"/>
+                <a:cs typeface="Consolas" panose="020B0609020204030204" pitchFamily="49" charset="0"/>
+              </a:rPr>
+              <a:t>(</a:t>
+            </a:r>
+            <a:r>
+              <a:rPr lang="en-US" sz="1200" dirty="0" err="1">
+                <a:solidFill>
+                  <a:srgbClr val="0070C0"/>
+                </a:solidFill>
+                <a:latin typeface="Consolas" panose="020B0609020204030204" pitchFamily="49" charset="0"/>
+                <a:cs typeface="Consolas" panose="020B0609020204030204" pitchFamily="49" charset="0"/>
+              </a:rPr>
+              <a:t>X_train</a:t>
+            </a:r>
+            <a:r>
+              <a:rPr lang="en-US" sz="1200" dirty="0">
+                <a:solidFill>
+                  <a:srgbClr val="0070C0"/>
+                </a:solidFill>
+                <a:latin typeface="Consolas" panose="020B0609020204030204" pitchFamily="49" charset="0"/>
+                <a:cs typeface="Consolas" panose="020B0609020204030204" pitchFamily="49" charset="0"/>
+              </a:rPr>
+              <a:t>, </a:t>
+            </a:r>
+            <a:r>
+              <a:rPr lang="en-US" sz="1200" dirty="0" err="1">
+                <a:solidFill>
+                  <a:srgbClr val="0070C0"/>
+                </a:solidFill>
+                <a:latin typeface="Consolas" panose="020B0609020204030204" pitchFamily="49" charset="0"/>
+                <a:cs typeface="Consolas" panose="020B0609020204030204" pitchFamily="49" charset="0"/>
+              </a:rPr>
+              <a:t>y_train</a:t>
+            </a:r>
+            <a:r>
+              <a:rPr lang="en-US" sz="1200" dirty="0">
+                <a:solidFill>
+                  <a:srgbClr val="0070C0"/>
+                </a:solidFill>
+                <a:latin typeface="Consolas" panose="020B0609020204030204" pitchFamily="49" charset="0"/>
+                <a:cs typeface="Consolas" panose="020B0609020204030204" pitchFamily="49" charset="0"/>
+              </a:rPr>
+              <a:t>)</a:t>
+            </a:r>
+          </a:p>
+          <a:p>
+            <a:r>
+              <a:rPr lang="en-US" sz="1200" dirty="0" err="1">
+                <a:solidFill>
+                  <a:srgbClr val="0070C0"/>
+                </a:solidFill>
+                <a:latin typeface="Consolas" panose="020B0609020204030204" pitchFamily="49" charset="0"/>
+                <a:cs typeface="Consolas" panose="020B0609020204030204" pitchFamily="49" charset="0"/>
+              </a:rPr>
+              <a:t>predProbs</a:t>
+            </a:r>
+            <a:r>
+              <a:rPr lang="en-US" sz="1200" dirty="0">
+                <a:solidFill>
+                  <a:srgbClr val="0070C0"/>
+                </a:solidFill>
+                <a:latin typeface="Consolas" panose="020B0609020204030204" pitchFamily="49" charset="0"/>
+                <a:cs typeface="Consolas" panose="020B0609020204030204" pitchFamily="49" charset="0"/>
+              </a:rPr>
+              <a:t> = </a:t>
+            </a:r>
+            <a:r>
+              <a:rPr lang="en-US" sz="1200" dirty="0" err="1">
+                <a:solidFill>
+                  <a:srgbClr val="0070C0"/>
+                </a:solidFill>
+                <a:latin typeface="Consolas" panose="020B0609020204030204" pitchFamily="49" charset="0"/>
+                <a:cs typeface="Consolas" panose="020B0609020204030204" pitchFamily="49" charset="0"/>
+              </a:rPr>
+              <a:t>resLogit.predict_proba</a:t>
+            </a:r>
+            <a:r>
+              <a:rPr lang="en-US" sz="1200" dirty="0">
+                <a:solidFill>
+                  <a:srgbClr val="0070C0"/>
+                </a:solidFill>
+                <a:latin typeface="Consolas" panose="020B0609020204030204" pitchFamily="49" charset="0"/>
+                <a:cs typeface="Consolas" panose="020B0609020204030204" pitchFamily="49" charset="0"/>
+              </a:rPr>
+              <a:t>(</a:t>
+            </a:r>
+            <a:r>
+              <a:rPr lang="en-US" sz="1200" dirty="0" err="1">
+                <a:solidFill>
+                  <a:srgbClr val="0070C0"/>
+                </a:solidFill>
+                <a:latin typeface="Consolas" panose="020B0609020204030204" pitchFamily="49" charset="0"/>
+                <a:cs typeface="Consolas" panose="020B0609020204030204" pitchFamily="49" charset="0"/>
+              </a:rPr>
+              <a:t>X_train</a:t>
+            </a:r>
+            <a:r>
+              <a:rPr lang="en-US" sz="1200" dirty="0">
+                <a:solidFill>
+                  <a:srgbClr val="0070C0"/>
+                </a:solidFill>
+                <a:latin typeface="Consolas" panose="020B0609020204030204" pitchFamily="49" charset="0"/>
+                <a:cs typeface="Consolas" panose="020B0609020204030204" pitchFamily="49" charset="0"/>
+              </a:rPr>
+              <a:t>)</a:t>
+            </a:r>
+          </a:p>
+          <a:p>
+            <a:endParaRPr lang="en-US" sz="1200" dirty="0">
+              <a:solidFill>
+                <a:srgbClr val="0070C0"/>
+              </a:solidFill>
+              <a:latin typeface="Consolas" panose="020B0609020204030204" pitchFamily="49" charset="0"/>
+              <a:cs typeface="Consolas" panose="020B0609020204030204" pitchFamily="49" charset="0"/>
+            </a:endParaRPr>
+          </a:p>
+          <a:p>
+            <a:r>
+              <a:rPr lang="en-US" sz="1200" dirty="0">
+                <a:solidFill>
+                  <a:srgbClr val="00B050"/>
+                </a:solidFill>
+                <a:latin typeface="Consolas" panose="020B0609020204030204" pitchFamily="49" charset="0"/>
+                <a:cs typeface="Consolas" panose="020B0609020204030204" pitchFamily="49" charset="0"/>
+              </a:rPr>
+              <a:t># Design matrix -- add column of 1's at the beginning of your </a:t>
+            </a:r>
+            <a:r>
+              <a:rPr lang="en-US" sz="1200" dirty="0" err="1">
+                <a:solidFill>
+                  <a:srgbClr val="00B050"/>
+                </a:solidFill>
+                <a:latin typeface="Consolas" panose="020B0609020204030204" pitchFamily="49" charset="0"/>
+                <a:cs typeface="Consolas" panose="020B0609020204030204" pitchFamily="49" charset="0"/>
+              </a:rPr>
+              <a:t>X_train</a:t>
+            </a:r>
+            <a:r>
+              <a:rPr lang="en-US" sz="1200" dirty="0">
+                <a:solidFill>
+                  <a:srgbClr val="00B050"/>
+                </a:solidFill>
+                <a:latin typeface="Consolas" panose="020B0609020204030204" pitchFamily="49" charset="0"/>
+                <a:cs typeface="Consolas" panose="020B0609020204030204" pitchFamily="49" charset="0"/>
+              </a:rPr>
+              <a:t> matrix</a:t>
+            </a:r>
+          </a:p>
+          <a:p>
+            <a:r>
+              <a:rPr lang="en-US" sz="1200" dirty="0" err="1">
+                <a:solidFill>
+                  <a:srgbClr val="0070C0"/>
+                </a:solidFill>
+                <a:latin typeface="Consolas" panose="020B0609020204030204" pitchFamily="49" charset="0"/>
+                <a:cs typeface="Consolas" panose="020B0609020204030204" pitchFamily="49" charset="0"/>
+              </a:rPr>
+              <a:t>X_design</a:t>
+            </a:r>
+            <a:r>
+              <a:rPr lang="en-US" sz="1200" dirty="0">
+                <a:solidFill>
+                  <a:srgbClr val="0070C0"/>
+                </a:solidFill>
+                <a:latin typeface="Consolas" panose="020B0609020204030204" pitchFamily="49" charset="0"/>
+                <a:cs typeface="Consolas" panose="020B0609020204030204" pitchFamily="49" charset="0"/>
+              </a:rPr>
+              <a:t> = </a:t>
+            </a:r>
+            <a:r>
+              <a:rPr lang="en-US" sz="1200" dirty="0" err="1">
+                <a:solidFill>
+                  <a:srgbClr val="0070C0"/>
+                </a:solidFill>
+                <a:latin typeface="Consolas" panose="020B0609020204030204" pitchFamily="49" charset="0"/>
+                <a:cs typeface="Consolas" panose="020B0609020204030204" pitchFamily="49" charset="0"/>
+              </a:rPr>
+              <a:t>np.hstack</a:t>
+            </a:r>
+            <a:r>
+              <a:rPr lang="en-US" sz="1200" dirty="0">
+                <a:solidFill>
+                  <a:srgbClr val="0070C0"/>
+                </a:solidFill>
+                <a:latin typeface="Consolas" panose="020B0609020204030204" pitchFamily="49" charset="0"/>
+                <a:cs typeface="Consolas" panose="020B0609020204030204" pitchFamily="49" charset="0"/>
+              </a:rPr>
+              <a:t>([</a:t>
+            </a:r>
+            <a:r>
+              <a:rPr lang="en-US" sz="1200" dirty="0" err="1">
+                <a:solidFill>
+                  <a:srgbClr val="0070C0"/>
+                </a:solidFill>
+                <a:latin typeface="Consolas" panose="020B0609020204030204" pitchFamily="49" charset="0"/>
+                <a:cs typeface="Consolas" panose="020B0609020204030204" pitchFamily="49" charset="0"/>
+              </a:rPr>
+              <a:t>np.ones</a:t>
+            </a:r>
+            <a:r>
+              <a:rPr lang="en-US" sz="1200" dirty="0">
+                <a:solidFill>
+                  <a:srgbClr val="0070C0"/>
+                </a:solidFill>
+                <a:latin typeface="Consolas" panose="020B0609020204030204" pitchFamily="49" charset="0"/>
+                <a:cs typeface="Consolas" panose="020B0609020204030204" pitchFamily="49" charset="0"/>
+              </a:rPr>
+              <a:t>((</a:t>
+            </a:r>
+            <a:r>
+              <a:rPr lang="en-US" sz="1200" dirty="0" err="1">
+                <a:solidFill>
+                  <a:srgbClr val="0070C0"/>
+                </a:solidFill>
+                <a:latin typeface="Consolas" panose="020B0609020204030204" pitchFamily="49" charset="0"/>
+                <a:cs typeface="Consolas" panose="020B0609020204030204" pitchFamily="49" charset="0"/>
+              </a:rPr>
+              <a:t>X_train.shape</a:t>
+            </a:r>
+            <a:r>
+              <a:rPr lang="en-US" sz="1200" dirty="0">
+                <a:solidFill>
+                  <a:srgbClr val="0070C0"/>
+                </a:solidFill>
+                <a:latin typeface="Consolas" panose="020B0609020204030204" pitchFamily="49" charset="0"/>
+                <a:cs typeface="Consolas" panose="020B0609020204030204" pitchFamily="49" charset="0"/>
+              </a:rPr>
+              <a:t>[0], 1)), </a:t>
+            </a:r>
+            <a:r>
+              <a:rPr lang="en-US" sz="1200" dirty="0" err="1">
+                <a:solidFill>
+                  <a:srgbClr val="0070C0"/>
+                </a:solidFill>
+                <a:latin typeface="Consolas" panose="020B0609020204030204" pitchFamily="49" charset="0"/>
+                <a:cs typeface="Consolas" panose="020B0609020204030204" pitchFamily="49" charset="0"/>
+              </a:rPr>
+              <a:t>X_train</a:t>
+            </a:r>
+            <a:r>
+              <a:rPr lang="en-US" sz="1200" dirty="0">
+                <a:solidFill>
+                  <a:srgbClr val="0070C0"/>
+                </a:solidFill>
+                <a:latin typeface="Consolas" panose="020B0609020204030204" pitchFamily="49" charset="0"/>
+                <a:cs typeface="Consolas" panose="020B0609020204030204" pitchFamily="49" charset="0"/>
+              </a:rPr>
+              <a:t>])</a:t>
+            </a:r>
+          </a:p>
+          <a:p>
+            <a:endParaRPr lang="en-US" sz="1200" dirty="0">
+              <a:solidFill>
+                <a:srgbClr val="0070C0"/>
+              </a:solidFill>
+              <a:latin typeface="Consolas" panose="020B0609020204030204" pitchFamily="49" charset="0"/>
+              <a:cs typeface="Consolas" panose="020B0609020204030204" pitchFamily="49" charset="0"/>
+            </a:endParaRPr>
+          </a:p>
+          <a:p>
+            <a:r>
+              <a:rPr lang="en-US" sz="1200" dirty="0">
+                <a:solidFill>
+                  <a:srgbClr val="00B050"/>
+                </a:solidFill>
+                <a:latin typeface="Consolas" panose="020B0609020204030204" pitchFamily="49" charset="0"/>
+                <a:cs typeface="Consolas" panose="020B0609020204030204" pitchFamily="49" charset="0"/>
+              </a:rPr>
+              <a:t># Initiate matrix of 0's, fill diagonal with each predicted observation's variance</a:t>
+            </a:r>
+          </a:p>
+          <a:p>
+            <a:r>
+              <a:rPr lang="en-US" sz="1200" dirty="0">
+                <a:solidFill>
+                  <a:srgbClr val="0070C0"/>
+                </a:solidFill>
+                <a:latin typeface="Consolas" panose="020B0609020204030204" pitchFamily="49" charset="0"/>
+                <a:cs typeface="Consolas" panose="020B0609020204030204" pitchFamily="49" charset="0"/>
+              </a:rPr>
+              <a:t>V = </a:t>
+            </a:r>
+            <a:r>
+              <a:rPr lang="en-US" sz="1200" dirty="0" err="1">
+                <a:solidFill>
+                  <a:srgbClr val="0070C0"/>
+                </a:solidFill>
+                <a:latin typeface="Consolas" panose="020B0609020204030204" pitchFamily="49" charset="0"/>
+                <a:cs typeface="Consolas" panose="020B0609020204030204" pitchFamily="49" charset="0"/>
+              </a:rPr>
+              <a:t>np.diagflat</a:t>
+            </a:r>
+            <a:r>
+              <a:rPr lang="en-US" sz="1200" dirty="0">
+                <a:solidFill>
+                  <a:srgbClr val="0070C0"/>
+                </a:solidFill>
+                <a:latin typeface="Consolas" panose="020B0609020204030204" pitchFamily="49" charset="0"/>
+                <a:cs typeface="Consolas" panose="020B0609020204030204" pitchFamily="49" charset="0"/>
+              </a:rPr>
+              <a:t>(</a:t>
+            </a:r>
+            <a:r>
+              <a:rPr lang="en-US" sz="1200" dirty="0" err="1">
+                <a:solidFill>
+                  <a:srgbClr val="0070C0"/>
+                </a:solidFill>
+                <a:latin typeface="Consolas" panose="020B0609020204030204" pitchFamily="49" charset="0"/>
+                <a:cs typeface="Consolas" panose="020B0609020204030204" pitchFamily="49" charset="0"/>
+              </a:rPr>
+              <a:t>np.product</a:t>
+            </a:r>
+            <a:r>
+              <a:rPr lang="en-US" sz="1200" dirty="0">
+                <a:solidFill>
+                  <a:srgbClr val="0070C0"/>
+                </a:solidFill>
+                <a:latin typeface="Consolas" panose="020B0609020204030204" pitchFamily="49" charset="0"/>
+                <a:cs typeface="Consolas" panose="020B0609020204030204" pitchFamily="49" charset="0"/>
+              </a:rPr>
+              <a:t>(</a:t>
+            </a:r>
+            <a:r>
+              <a:rPr lang="en-US" sz="1200" dirty="0" err="1">
+                <a:solidFill>
+                  <a:srgbClr val="0070C0"/>
+                </a:solidFill>
+                <a:latin typeface="Consolas" panose="020B0609020204030204" pitchFamily="49" charset="0"/>
+                <a:cs typeface="Consolas" panose="020B0609020204030204" pitchFamily="49" charset="0"/>
+              </a:rPr>
+              <a:t>predProbs</a:t>
+            </a:r>
+            <a:r>
+              <a:rPr lang="en-US" sz="1200" dirty="0">
+                <a:solidFill>
+                  <a:srgbClr val="0070C0"/>
+                </a:solidFill>
+                <a:latin typeface="Consolas" panose="020B0609020204030204" pitchFamily="49" charset="0"/>
+                <a:cs typeface="Consolas" panose="020B0609020204030204" pitchFamily="49" charset="0"/>
+              </a:rPr>
+              <a:t>, axis=1))</a:t>
+            </a:r>
+          </a:p>
+          <a:p>
+            <a:endParaRPr lang="en-US" sz="1200" dirty="0">
+              <a:solidFill>
+                <a:srgbClr val="0070C0"/>
+              </a:solidFill>
+              <a:latin typeface="Consolas" panose="020B0609020204030204" pitchFamily="49" charset="0"/>
+              <a:cs typeface="Consolas" panose="020B0609020204030204" pitchFamily="49" charset="0"/>
+            </a:endParaRPr>
+          </a:p>
+          <a:p>
+            <a:r>
+              <a:rPr lang="en-US" sz="1200" dirty="0">
+                <a:solidFill>
+                  <a:srgbClr val="00B050"/>
+                </a:solidFill>
+                <a:latin typeface="Consolas" panose="020B0609020204030204" pitchFamily="49" charset="0"/>
+                <a:cs typeface="Consolas" panose="020B0609020204030204" pitchFamily="49" charset="0"/>
+              </a:rPr>
+              <a:t># Covariance matrix (uses @-</a:t>
+            </a:r>
+            <a:r>
+              <a:rPr lang="en-US" sz="1200" dirty="0" err="1">
+                <a:solidFill>
+                  <a:srgbClr val="00B050"/>
+                </a:solidFill>
+                <a:latin typeface="Consolas" panose="020B0609020204030204" pitchFamily="49" charset="0"/>
+                <a:cs typeface="Consolas" panose="020B0609020204030204" pitchFamily="49" charset="0"/>
+              </a:rPr>
+              <a:t>operater</a:t>
+            </a:r>
+            <a:r>
+              <a:rPr lang="en-US" sz="1200" dirty="0">
+                <a:solidFill>
+                  <a:srgbClr val="00B050"/>
+                </a:solidFill>
+                <a:latin typeface="Consolas" panose="020B0609020204030204" pitchFamily="49" charset="0"/>
+                <a:cs typeface="Consolas" panose="020B0609020204030204" pitchFamily="49" charset="0"/>
+              </a:rPr>
+              <a:t> for matrix multiplication in Python 3.5+)</a:t>
+            </a:r>
+          </a:p>
+          <a:p>
+            <a:r>
+              <a:rPr lang="en-US" sz="1200" dirty="0" err="1">
+                <a:solidFill>
+                  <a:srgbClr val="0070C0"/>
+                </a:solidFill>
+                <a:latin typeface="Consolas" panose="020B0609020204030204" pitchFamily="49" charset="0"/>
+                <a:cs typeface="Consolas" panose="020B0609020204030204" pitchFamily="49" charset="0"/>
+              </a:rPr>
+              <a:t>covLogit</a:t>
+            </a:r>
+            <a:r>
+              <a:rPr lang="en-US" sz="1200" dirty="0">
+                <a:solidFill>
+                  <a:srgbClr val="0070C0"/>
+                </a:solidFill>
+                <a:latin typeface="Consolas" panose="020B0609020204030204" pitchFamily="49" charset="0"/>
+                <a:cs typeface="Consolas" panose="020B0609020204030204" pitchFamily="49" charset="0"/>
+              </a:rPr>
+              <a:t> = </a:t>
+            </a:r>
+            <a:r>
+              <a:rPr lang="en-US" sz="1200" dirty="0" err="1">
+                <a:solidFill>
+                  <a:srgbClr val="0070C0"/>
+                </a:solidFill>
+                <a:latin typeface="Consolas" panose="020B0609020204030204" pitchFamily="49" charset="0"/>
+                <a:cs typeface="Consolas" panose="020B0609020204030204" pitchFamily="49" charset="0"/>
+              </a:rPr>
+              <a:t>np.linalg.inv</a:t>
+            </a:r>
+            <a:r>
+              <a:rPr lang="en-US" sz="1200" dirty="0">
+                <a:solidFill>
+                  <a:srgbClr val="0070C0"/>
+                </a:solidFill>
+                <a:latin typeface="Consolas" panose="020B0609020204030204" pitchFamily="49" charset="0"/>
+                <a:cs typeface="Consolas" panose="020B0609020204030204" pitchFamily="49" charset="0"/>
+              </a:rPr>
+              <a:t>(</a:t>
+            </a:r>
+            <a:r>
+              <a:rPr lang="en-US" sz="1200" dirty="0" err="1">
+                <a:solidFill>
+                  <a:srgbClr val="0070C0"/>
+                </a:solidFill>
+                <a:latin typeface="Consolas" panose="020B0609020204030204" pitchFamily="49" charset="0"/>
+                <a:cs typeface="Consolas" panose="020B0609020204030204" pitchFamily="49" charset="0"/>
+              </a:rPr>
+              <a:t>X_design.T</a:t>
+            </a:r>
+            <a:r>
+              <a:rPr lang="en-US" sz="1200" dirty="0">
+                <a:solidFill>
+                  <a:srgbClr val="0070C0"/>
+                </a:solidFill>
+                <a:latin typeface="Consolas" panose="020B0609020204030204" pitchFamily="49" charset="0"/>
+                <a:cs typeface="Consolas" panose="020B0609020204030204" pitchFamily="49" charset="0"/>
+              </a:rPr>
+              <a:t> @ V @ </a:t>
+            </a:r>
+            <a:r>
+              <a:rPr lang="en-US" sz="1200" dirty="0" err="1">
+                <a:solidFill>
+                  <a:srgbClr val="0070C0"/>
+                </a:solidFill>
+                <a:latin typeface="Consolas" panose="020B0609020204030204" pitchFamily="49" charset="0"/>
+                <a:cs typeface="Consolas" panose="020B0609020204030204" pitchFamily="49" charset="0"/>
+              </a:rPr>
+              <a:t>X_design</a:t>
+            </a:r>
+            <a:r>
+              <a:rPr lang="en-US" sz="1200" dirty="0">
+                <a:solidFill>
+                  <a:srgbClr val="0070C0"/>
+                </a:solidFill>
+                <a:latin typeface="Consolas" panose="020B0609020204030204" pitchFamily="49" charset="0"/>
+                <a:cs typeface="Consolas" panose="020B0609020204030204" pitchFamily="49" charset="0"/>
+              </a:rPr>
+              <a:t>)</a:t>
+            </a:r>
+          </a:p>
+          <a:p>
+            <a:r>
+              <a:rPr lang="en-US" sz="1200" dirty="0">
+                <a:solidFill>
+                  <a:srgbClr val="0070C0"/>
+                </a:solidFill>
+                <a:latin typeface="Consolas" panose="020B0609020204030204" pitchFamily="49" charset="0"/>
+                <a:cs typeface="Consolas" panose="020B0609020204030204" pitchFamily="49" charset="0"/>
+              </a:rPr>
+              <a:t>print("Covariance matrix: ", </a:t>
+            </a:r>
+            <a:r>
+              <a:rPr lang="en-US" sz="1200" dirty="0" err="1">
+                <a:solidFill>
+                  <a:srgbClr val="0070C0"/>
+                </a:solidFill>
+                <a:latin typeface="Consolas" panose="020B0609020204030204" pitchFamily="49" charset="0"/>
+                <a:cs typeface="Consolas" panose="020B0609020204030204" pitchFamily="49" charset="0"/>
+              </a:rPr>
+              <a:t>covLogit</a:t>
+            </a:r>
+            <a:r>
+              <a:rPr lang="en-US" sz="1200" dirty="0">
+                <a:solidFill>
+                  <a:srgbClr val="0070C0"/>
+                </a:solidFill>
+                <a:latin typeface="Consolas" panose="020B0609020204030204" pitchFamily="49" charset="0"/>
+                <a:cs typeface="Consolas" panose="020B0609020204030204" pitchFamily="49" charset="0"/>
+              </a:rPr>
+              <a:t>)</a:t>
+            </a:r>
+          </a:p>
+          <a:p>
+            <a:endParaRPr lang="en-US" sz="1200" dirty="0">
+              <a:solidFill>
+                <a:srgbClr val="0070C0"/>
+              </a:solidFill>
+              <a:latin typeface="Consolas" panose="020B0609020204030204" pitchFamily="49" charset="0"/>
+              <a:cs typeface="Consolas" panose="020B0609020204030204" pitchFamily="49" charset="0"/>
+            </a:endParaRPr>
+          </a:p>
+          <a:p>
+            <a:r>
+              <a:rPr lang="en-US" sz="1200" dirty="0">
+                <a:solidFill>
+                  <a:srgbClr val="00B050"/>
+                </a:solidFill>
+                <a:latin typeface="Consolas" panose="020B0609020204030204" pitchFamily="49" charset="0"/>
+                <a:cs typeface="Consolas" panose="020B0609020204030204" pitchFamily="49" charset="0"/>
+              </a:rPr>
+              <a:t># Standard errors</a:t>
+            </a:r>
+          </a:p>
+          <a:p>
+            <a:r>
+              <a:rPr lang="en-US" sz="1200" dirty="0">
+                <a:solidFill>
+                  <a:srgbClr val="0070C0"/>
+                </a:solidFill>
+                <a:latin typeface="Consolas" panose="020B0609020204030204" pitchFamily="49" charset="0"/>
+                <a:cs typeface="Consolas" panose="020B0609020204030204" pitchFamily="49" charset="0"/>
+              </a:rPr>
+              <a:t>print("Standard errors: ", </a:t>
+            </a:r>
+            <a:r>
+              <a:rPr lang="en-US" sz="1200" dirty="0" err="1">
+                <a:solidFill>
+                  <a:srgbClr val="0070C0"/>
+                </a:solidFill>
+                <a:latin typeface="Consolas" panose="020B0609020204030204" pitchFamily="49" charset="0"/>
+                <a:cs typeface="Consolas" panose="020B0609020204030204" pitchFamily="49" charset="0"/>
+              </a:rPr>
+              <a:t>np.sqrt</a:t>
+            </a:r>
+            <a:r>
+              <a:rPr lang="en-US" sz="1200" dirty="0">
+                <a:solidFill>
+                  <a:srgbClr val="0070C0"/>
+                </a:solidFill>
+                <a:latin typeface="Consolas" panose="020B0609020204030204" pitchFamily="49" charset="0"/>
+                <a:cs typeface="Consolas" panose="020B0609020204030204" pitchFamily="49" charset="0"/>
+              </a:rPr>
+              <a:t>(</a:t>
+            </a:r>
+            <a:r>
+              <a:rPr lang="en-US" sz="1200" dirty="0" err="1">
+                <a:solidFill>
+                  <a:srgbClr val="0070C0"/>
+                </a:solidFill>
+                <a:latin typeface="Consolas" panose="020B0609020204030204" pitchFamily="49" charset="0"/>
+                <a:cs typeface="Consolas" panose="020B0609020204030204" pitchFamily="49" charset="0"/>
+              </a:rPr>
+              <a:t>np.diag</a:t>
+            </a:r>
+            <a:r>
+              <a:rPr lang="en-US" sz="1200" dirty="0">
+                <a:solidFill>
+                  <a:srgbClr val="0070C0"/>
+                </a:solidFill>
+                <a:latin typeface="Consolas" panose="020B0609020204030204" pitchFamily="49" charset="0"/>
+                <a:cs typeface="Consolas" panose="020B0609020204030204" pitchFamily="49" charset="0"/>
+              </a:rPr>
+              <a:t>(</a:t>
+            </a:r>
+            <a:r>
+              <a:rPr lang="en-US" sz="1200" dirty="0" err="1">
+                <a:solidFill>
+                  <a:srgbClr val="0070C0"/>
+                </a:solidFill>
+                <a:latin typeface="Consolas" panose="020B0609020204030204" pitchFamily="49" charset="0"/>
+                <a:cs typeface="Consolas" panose="020B0609020204030204" pitchFamily="49" charset="0"/>
+              </a:rPr>
+              <a:t>covLogit</a:t>
+            </a:r>
+            <a:r>
+              <a:rPr lang="en-US" sz="1200" dirty="0">
+                <a:solidFill>
+                  <a:srgbClr val="0070C0"/>
+                </a:solidFill>
+                <a:latin typeface="Consolas" panose="020B0609020204030204" pitchFamily="49" charset="0"/>
+                <a:cs typeface="Consolas" panose="020B0609020204030204" pitchFamily="49" charset="0"/>
+              </a:rPr>
+              <a:t>)))</a:t>
+            </a:r>
+          </a:p>
+          <a:p>
+            <a:endParaRPr lang="en-US" sz="1200" dirty="0">
+              <a:solidFill>
+                <a:srgbClr val="0070C0"/>
+              </a:solidFill>
+              <a:latin typeface="Consolas" panose="020B0609020204030204" pitchFamily="49" charset="0"/>
+              <a:cs typeface="Consolas" panose="020B0609020204030204" pitchFamily="49" charset="0"/>
+            </a:endParaRPr>
+          </a:p>
+          <a:p>
+            <a:r>
+              <a:rPr lang="en-US" sz="1200" dirty="0">
+                <a:solidFill>
+                  <a:srgbClr val="00B050"/>
+                </a:solidFill>
+                <a:latin typeface="Consolas" panose="020B0609020204030204" pitchFamily="49" charset="0"/>
+                <a:cs typeface="Consolas" panose="020B0609020204030204" pitchFamily="49" charset="0"/>
+              </a:rPr>
+              <a:t># Wald statistic (coefficient / </a:t>
+            </a:r>
+            <a:r>
+              <a:rPr lang="en-US" sz="1200" dirty="0" err="1">
+                <a:solidFill>
+                  <a:srgbClr val="00B050"/>
+                </a:solidFill>
+                <a:latin typeface="Consolas" panose="020B0609020204030204" pitchFamily="49" charset="0"/>
+                <a:cs typeface="Consolas" panose="020B0609020204030204" pitchFamily="49" charset="0"/>
+              </a:rPr>
+              <a:t>s.e.</a:t>
+            </a:r>
+            <a:r>
+              <a:rPr lang="en-US" sz="1200" dirty="0">
+                <a:solidFill>
+                  <a:srgbClr val="00B050"/>
+                </a:solidFill>
+                <a:latin typeface="Consolas" panose="020B0609020204030204" pitchFamily="49" charset="0"/>
+                <a:cs typeface="Consolas" panose="020B0609020204030204" pitchFamily="49" charset="0"/>
+              </a:rPr>
+              <a:t>) ^ 2</a:t>
+            </a:r>
+          </a:p>
+          <a:p>
+            <a:r>
+              <a:rPr lang="en-US" sz="1200" dirty="0" err="1">
+                <a:solidFill>
+                  <a:srgbClr val="0070C0"/>
+                </a:solidFill>
+                <a:latin typeface="Consolas" panose="020B0609020204030204" pitchFamily="49" charset="0"/>
+                <a:cs typeface="Consolas" panose="020B0609020204030204" pitchFamily="49" charset="0"/>
+              </a:rPr>
+              <a:t>logitParams</a:t>
+            </a:r>
+            <a:r>
+              <a:rPr lang="en-US" sz="1200" dirty="0">
+                <a:solidFill>
+                  <a:srgbClr val="0070C0"/>
+                </a:solidFill>
+                <a:latin typeface="Consolas" panose="020B0609020204030204" pitchFamily="49" charset="0"/>
+                <a:cs typeface="Consolas" panose="020B0609020204030204" pitchFamily="49" charset="0"/>
+              </a:rPr>
+              <a:t> = </a:t>
+            </a:r>
+            <a:r>
+              <a:rPr lang="en-US" sz="1200" dirty="0" err="1">
+                <a:solidFill>
+                  <a:srgbClr val="0070C0"/>
+                </a:solidFill>
+                <a:latin typeface="Consolas" panose="020B0609020204030204" pitchFamily="49" charset="0"/>
+                <a:cs typeface="Consolas" panose="020B0609020204030204" pitchFamily="49" charset="0"/>
+              </a:rPr>
+              <a:t>np.insert</a:t>
+            </a:r>
+            <a:r>
+              <a:rPr lang="en-US" sz="1200" dirty="0">
+                <a:solidFill>
+                  <a:srgbClr val="0070C0"/>
+                </a:solidFill>
+                <a:latin typeface="Consolas" panose="020B0609020204030204" pitchFamily="49" charset="0"/>
+                <a:cs typeface="Consolas" panose="020B0609020204030204" pitchFamily="49" charset="0"/>
+              </a:rPr>
+              <a:t>(</a:t>
+            </a:r>
+            <a:r>
+              <a:rPr lang="en-US" sz="1200" dirty="0" err="1">
+                <a:solidFill>
+                  <a:srgbClr val="0070C0"/>
+                </a:solidFill>
+                <a:latin typeface="Consolas" panose="020B0609020204030204" pitchFamily="49" charset="0"/>
+                <a:cs typeface="Consolas" panose="020B0609020204030204" pitchFamily="49" charset="0"/>
+              </a:rPr>
+              <a:t>resLogit.coef</a:t>
+            </a:r>
+            <a:r>
+              <a:rPr lang="en-US" sz="1200" dirty="0">
+                <a:solidFill>
+                  <a:srgbClr val="0070C0"/>
+                </a:solidFill>
+                <a:latin typeface="Consolas" panose="020B0609020204030204" pitchFamily="49" charset="0"/>
+                <a:cs typeface="Consolas" panose="020B0609020204030204" pitchFamily="49" charset="0"/>
+              </a:rPr>
+              <a:t>_, 0, </a:t>
+            </a:r>
+            <a:r>
+              <a:rPr lang="en-US" sz="1200" dirty="0" err="1">
+                <a:solidFill>
+                  <a:srgbClr val="0070C0"/>
+                </a:solidFill>
+                <a:latin typeface="Consolas" panose="020B0609020204030204" pitchFamily="49" charset="0"/>
+                <a:cs typeface="Consolas" panose="020B0609020204030204" pitchFamily="49" charset="0"/>
+              </a:rPr>
+              <a:t>resLogit.intercept</a:t>
+            </a:r>
+            <a:r>
+              <a:rPr lang="en-US" sz="1200" dirty="0">
+                <a:solidFill>
+                  <a:srgbClr val="0070C0"/>
+                </a:solidFill>
+                <a:latin typeface="Consolas" panose="020B0609020204030204" pitchFamily="49" charset="0"/>
+                <a:cs typeface="Consolas" panose="020B0609020204030204" pitchFamily="49" charset="0"/>
+              </a:rPr>
+              <a:t>_)</a:t>
+            </a:r>
+          </a:p>
+          <a:p>
+            <a:r>
+              <a:rPr lang="en-US" sz="1200" dirty="0">
+                <a:solidFill>
+                  <a:srgbClr val="0070C0"/>
+                </a:solidFill>
+                <a:latin typeface="Consolas" panose="020B0609020204030204" pitchFamily="49" charset="0"/>
+                <a:cs typeface="Consolas" panose="020B0609020204030204" pitchFamily="49" charset="0"/>
+              </a:rPr>
+              <a:t>print("Wald statistics: ", (</a:t>
+            </a:r>
+            <a:r>
+              <a:rPr lang="en-US" sz="1200" dirty="0" err="1">
+                <a:solidFill>
+                  <a:srgbClr val="0070C0"/>
+                </a:solidFill>
+                <a:latin typeface="Consolas" panose="020B0609020204030204" pitchFamily="49" charset="0"/>
+                <a:cs typeface="Consolas" panose="020B0609020204030204" pitchFamily="49" charset="0"/>
+              </a:rPr>
+              <a:t>logitParams</a:t>
+            </a:r>
+            <a:r>
+              <a:rPr lang="en-US" sz="1200" dirty="0">
+                <a:solidFill>
+                  <a:srgbClr val="0070C0"/>
+                </a:solidFill>
+                <a:latin typeface="Consolas" panose="020B0609020204030204" pitchFamily="49" charset="0"/>
+                <a:cs typeface="Consolas" panose="020B0609020204030204" pitchFamily="49" charset="0"/>
+              </a:rPr>
+              <a:t> / </a:t>
+            </a:r>
+            <a:r>
+              <a:rPr lang="en-US" sz="1200" dirty="0" err="1">
+                <a:solidFill>
+                  <a:srgbClr val="0070C0"/>
+                </a:solidFill>
+                <a:latin typeface="Consolas" panose="020B0609020204030204" pitchFamily="49" charset="0"/>
+                <a:cs typeface="Consolas" panose="020B0609020204030204" pitchFamily="49" charset="0"/>
+              </a:rPr>
+              <a:t>np.sqrt</a:t>
+            </a:r>
+            <a:r>
+              <a:rPr lang="en-US" sz="1200" dirty="0">
+                <a:solidFill>
+                  <a:srgbClr val="0070C0"/>
+                </a:solidFill>
+                <a:latin typeface="Consolas" panose="020B0609020204030204" pitchFamily="49" charset="0"/>
+                <a:cs typeface="Consolas" panose="020B0609020204030204" pitchFamily="49" charset="0"/>
+              </a:rPr>
+              <a:t>(</a:t>
+            </a:r>
+            <a:r>
+              <a:rPr lang="en-US" sz="1200" dirty="0" err="1">
+                <a:solidFill>
+                  <a:srgbClr val="0070C0"/>
+                </a:solidFill>
+                <a:latin typeface="Consolas" panose="020B0609020204030204" pitchFamily="49" charset="0"/>
+                <a:cs typeface="Consolas" panose="020B0609020204030204" pitchFamily="49" charset="0"/>
+              </a:rPr>
+              <a:t>np.diag</a:t>
+            </a:r>
+            <a:r>
+              <a:rPr lang="en-US" sz="1200" dirty="0">
+                <a:solidFill>
+                  <a:srgbClr val="0070C0"/>
+                </a:solidFill>
+                <a:latin typeface="Consolas" panose="020B0609020204030204" pitchFamily="49" charset="0"/>
+                <a:cs typeface="Consolas" panose="020B0609020204030204" pitchFamily="49" charset="0"/>
+              </a:rPr>
+              <a:t>(</a:t>
+            </a:r>
+            <a:r>
+              <a:rPr lang="en-US" sz="1200" dirty="0" err="1">
+                <a:solidFill>
+                  <a:srgbClr val="0070C0"/>
+                </a:solidFill>
+                <a:latin typeface="Consolas" panose="020B0609020204030204" pitchFamily="49" charset="0"/>
+                <a:cs typeface="Consolas" panose="020B0609020204030204" pitchFamily="49" charset="0"/>
+              </a:rPr>
+              <a:t>covLogit</a:t>
+            </a:r>
+            <a:r>
+              <a:rPr lang="en-US" sz="1200" dirty="0">
+                <a:solidFill>
+                  <a:srgbClr val="0070C0"/>
+                </a:solidFill>
+                <a:latin typeface="Consolas" panose="020B0609020204030204" pitchFamily="49" charset="0"/>
+                <a:cs typeface="Consolas" panose="020B0609020204030204" pitchFamily="49" charset="0"/>
+              </a:rPr>
+              <a:t>))) ** 2)</a:t>
+            </a:r>
+          </a:p>
+        </p:txBody>
+      </p:sp>
+      <p:sp>
+        <p:nvSpPr>
+          <p:cNvPr id="8" name="TextBox 7">
+            <a:extLst>
+              <a:ext uri="{FF2B5EF4-FFF2-40B4-BE49-F238E27FC236}">
+                <a16:creationId xmlns:a16="http://schemas.microsoft.com/office/drawing/2014/main" id="{91E4CEC1-D586-204A-AEDD-B4DC1F159168}"/>
+              </a:ext>
+            </a:extLst>
+          </p:cNvPr>
+          <p:cNvSpPr txBox="1"/>
+          <p:nvPr/>
+        </p:nvSpPr>
+        <p:spPr>
+          <a:xfrm>
+            <a:off x="8738886" y="3912243"/>
+            <a:ext cx="1331088" cy="461665"/>
+          </a:xfrm>
+          <a:prstGeom prst="rect">
+            <a:avLst/>
+          </a:prstGeom>
+          <a:noFill/>
+        </p:spPr>
+        <p:txBody>
+          <a:bodyPr wrap="square" rtlCol="0">
+            <a:spAutoFit/>
+          </a:bodyPr>
+          <a:lstStyle/>
+          <a:p>
+            <a:r>
+              <a:rPr lang="en-US" sz="2400" dirty="0"/>
+              <a:t>(X</a:t>
+            </a:r>
+            <a:r>
+              <a:rPr lang="en-US" sz="2400" baseline="30000" dirty="0"/>
+              <a:t>T</a:t>
+            </a:r>
+            <a:r>
+              <a:rPr lang="en-US" sz="2400" dirty="0"/>
+              <a:t>VX)</a:t>
+            </a:r>
+            <a:r>
+              <a:rPr lang="en-US" sz="2400" baseline="30000" dirty="0"/>
+              <a:t>-1</a:t>
+            </a:r>
+          </a:p>
+        </p:txBody>
+      </p:sp>
+      <p:sp>
+        <p:nvSpPr>
+          <p:cNvPr id="9" name="Right Arrow 8">
+            <a:extLst>
+              <a:ext uri="{FF2B5EF4-FFF2-40B4-BE49-F238E27FC236}">
+                <a16:creationId xmlns:a16="http://schemas.microsoft.com/office/drawing/2014/main" id="{A5334153-9C64-5A4F-A993-FA239B8B8FEB}"/>
+              </a:ext>
+            </a:extLst>
+          </p:cNvPr>
+          <p:cNvSpPr/>
+          <p:nvPr/>
+        </p:nvSpPr>
+        <p:spPr>
+          <a:xfrm rot="10800000">
+            <a:off x="7708739" y="4062050"/>
+            <a:ext cx="810228" cy="230833"/>
+          </a:xfrm>
+          <a:prstGeom prst="rightArrow">
+            <a:avLst/>
+          </a:prstGeom>
+        </p:spPr>
+        <p:style>
+          <a:lnRef idx="2">
+            <a:schemeClr val="accent1">
+              <a:shade val="50000"/>
+            </a:schemeClr>
+          </a:lnRef>
+          <a:fillRef idx="1">
+            <a:schemeClr val="accent1"/>
+          </a:fillRef>
+          <a:effectRef idx="0">
+            <a:schemeClr val="accent1"/>
+          </a:effectRef>
+          <a:fontRef idx="minor">
+            <a:schemeClr val="lt1"/>
+          </a:fontRef>
+        </p:style>
+        <p:txBody>
+          <a:bodyPr rtlCol="0" anchor="ctr"/>
+          <a:lstStyle/>
+          <a:p>
+            <a:pPr algn="ctr"/>
+            <a:endParaRPr lang="en-US"/>
+          </a:p>
+        </p:txBody>
+      </p:sp>
+    </p:spTree>
+    <p:extLst>
+      <p:ext uri="{BB962C8B-B14F-4D97-AF65-F5344CB8AC3E}">
+        <p14:creationId xmlns:p14="http://schemas.microsoft.com/office/powerpoint/2010/main" val="1943376539"/>
       </p:ext>
     </p:extLst>
   </p:cSld>
@@ -13488,6 +14997,2029 @@
           <p:cNvPr id="4" name="TextBox 3">
             <a:extLst>
               <a:ext uri="{FF2B5EF4-FFF2-40B4-BE49-F238E27FC236}">
+                <a16:creationId xmlns:a16="http://schemas.microsoft.com/office/drawing/2014/main" id="{F7D56CB7-225A-7B48-AE96-EDFEF4DDB46E}"/>
+              </a:ext>
+            </a:extLst>
+          </p:cNvPr>
+          <p:cNvSpPr txBox="1"/>
+          <p:nvPr/>
+        </p:nvSpPr>
+        <p:spPr>
+          <a:xfrm>
+            <a:off x="139700" y="88900"/>
+            <a:ext cx="7442200" cy="523220"/>
+          </a:xfrm>
+          <a:prstGeom prst="rect">
+            <a:avLst/>
+          </a:prstGeom>
+          <a:noFill/>
+        </p:spPr>
+        <p:txBody>
+          <a:bodyPr wrap="square" rtlCol="0">
+            <a:spAutoFit/>
+          </a:bodyPr>
+          <a:lstStyle/>
+          <a:p>
+            <a:r>
+              <a:rPr lang="en-US" sz="2800" b="1" dirty="0"/>
+              <a:t>Logistic Regression – finding coefficients</a:t>
+            </a:r>
+          </a:p>
+        </p:txBody>
+      </p:sp>
+      <p:sp>
+        <p:nvSpPr>
+          <p:cNvPr id="5" name="TextBox 4">
+            <a:extLst>
+              <a:ext uri="{FF2B5EF4-FFF2-40B4-BE49-F238E27FC236}">
+                <a16:creationId xmlns:a16="http://schemas.microsoft.com/office/drawing/2014/main" id="{BC8BB3CD-315F-B649-B921-3077838AE8E5}"/>
+              </a:ext>
+            </a:extLst>
+          </p:cNvPr>
+          <p:cNvSpPr txBox="1"/>
+          <p:nvPr/>
+        </p:nvSpPr>
+        <p:spPr>
+          <a:xfrm>
+            <a:off x="50800" y="723900"/>
+            <a:ext cx="6731000" cy="4185761"/>
+          </a:xfrm>
+          <a:prstGeom prst="rect">
+            <a:avLst/>
+          </a:prstGeom>
+          <a:noFill/>
+        </p:spPr>
+        <p:txBody>
+          <a:bodyPr wrap="square" rtlCol="0">
+            <a:spAutoFit/>
+          </a:bodyPr>
+          <a:lstStyle/>
+          <a:p>
+            <a:r>
+              <a:rPr lang="en-US" dirty="0"/>
+              <a:t>There is no analytical solution.</a:t>
+            </a:r>
+          </a:p>
+          <a:p>
+            <a:endParaRPr lang="en-US" dirty="0"/>
+          </a:p>
+          <a:p>
+            <a:r>
+              <a:rPr lang="en-US" dirty="0"/>
+              <a:t>The regression coefficients are usually estimated </a:t>
+            </a:r>
+          </a:p>
+          <a:p>
+            <a:r>
+              <a:rPr lang="en-US" dirty="0"/>
+              <a:t>using </a:t>
+            </a:r>
+            <a:r>
+              <a:rPr lang="en-US" b="1" dirty="0">
+                <a:solidFill>
+                  <a:srgbClr val="FF0000"/>
+                </a:solidFill>
+              </a:rPr>
+              <a:t>Maximum Likelihood Estimation (MLE)</a:t>
+            </a:r>
+            <a:r>
+              <a:rPr lang="en-US" dirty="0"/>
+              <a:t>.</a:t>
+            </a:r>
+          </a:p>
+          <a:p>
+            <a:endParaRPr lang="en-US" dirty="0"/>
+          </a:p>
+          <a:p>
+            <a:r>
+              <a:rPr lang="en-US" dirty="0"/>
+              <a:t>Unlike </a:t>
+            </a:r>
+            <a:r>
+              <a:rPr lang="en-US" b="1" dirty="0">
+                <a:solidFill>
+                  <a:srgbClr val="0070C0"/>
+                </a:solidFill>
+              </a:rPr>
+              <a:t>linear regression </a:t>
+            </a:r>
+            <a:r>
+              <a:rPr lang="en-US" dirty="0"/>
+              <a:t>with normally distributed residuals, </a:t>
+            </a:r>
+          </a:p>
+          <a:p>
+            <a:r>
+              <a:rPr lang="en-US" dirty="0"/>
+              <a:t>it is not possible to find a closed-form expression for the coefficient values </a:t>
+            </a:r>
+          </a:p>
+          <a:p>
+            <a:r>
+              <a:rPr lang="en-US" dirty="0"/>
+              <a:t>that maximize the likelihood function, </a:t>
+            </a:r>
+          </a:p>
+          <a:p>
+            <a:r>
+              <a:rPr lang="en-US" dirty="0"/>
+              <a:t>so that an </a:t>
+            </a:r>
+            <a:r>
+              <a:rPr lang="en-US" b="1" dirty="0">
+                <a:solidFill>
+                  <a:srgbClr val="0070C0"/>
+                </a:solidFill>
+              </a:rPr>
+              <a:t>iterative process must be used </a:t>
+            </a:r>
+            <a:r>
+              <a:rPr lang="en-US" dirty="0"/>
+              <a:t>instead; for example Newton's method. </a:t>
+            </a:r>
+          </a:p>
+          <a:p>
+            <a:endParaRPr lang="en-US" dirty="0"/>
+          </a:p>
+          <a:p>
+            <a:r>
+              <a:rPr lang="en-US" dirty="0"/>
+              <a:t>The model may not converge in some cases:</a:t>
+            </a:r>
+          </a:p>
+          <a:p>
+            <a:pPr marL="285750" indent="-285750">
+              <a:buFont typeface="Arial" panose="020B0604020202020204" pitchFamily="34" charset="0"/>
+              <a:buChar char="•"/>
+            </a:pPr>
+            <a:r>
+              <a:rPr lang="en-US" dirty="0"/>
+              <a:t>not enough data (small number of rows for given number of predictor variables)</a:t>
+            </a:r>
+          </a:p>
+          <a:p>
+            <a:pPr marL="285750" indent="-285750">
+              <a:buFont typeface="Arial" panose="020B0604020202020204" pitchFamily="34" charset="0"/>
+              <a:buChar char="•"/>
+            </a:pPr>
+            <a:r>
+              <a:rPr lang="en-US" dirty="0"/>
+              <a:t>multicollinearity (some variables are strongly correlated with each other)</a:t>
+            </a:r>
+          </a:p>
+          <a:p>
+            <a:pPr marL="285750" indent="-285750">
+              <a:buFont typeface="Arial" panose="020B0604020202020204" pitchFamily="34" charset="0"/>
+              <a:buChar char="•"/>
+            </a:pPr>
+            <a:r>
+              <a:rPr lang="en-US" dirty="0"/>
+              <a:t>sparseness (missing data)</a:t>
+            </a:r>
+          </a:p>
+          <a:p>
+            <a:pPr marL="285750" indent="-285750">
+              <a:buFont typeface="Arial" panose="020B0604020202020204" pitchFamily="34" charset="0"/>
+              <a:buChar char="•"/>
+            </a:pPr>
+            <a:r>
+              <a:rPr lang="en-US" dirty="0"/>
+              <a:t>complete separation (predictors perfectly predict the criterion)</a:t>
+            </a:r>
+          </a:p>
+          <a:p>
+            <a:endParaRPr lang="en-US" dirty="0"/>
+          </a:p>
+          <a:p>
+            <a:r>
+              <a:rPr lang="en-US" dirty="0"/>
+              <a:t>In machine learning applications where logistic regression </a:t>
+            </a:r>
+          </a:p>
+          <a:p>
+            <a:r>
+              <a:rPr lang="en-US" dirty="0"/>
+              <a:t>is used for binary classification,</a:t>
+            </a:r>
+          </a:p>
+          <a:p>
+            <a:r>
+              <a:rPr lang="en-US" dirty="0"/>
+              <a:t>the </a:t>
+            </a:r>
+            <a:r>
+              <a:rPr lang="en-US" b="1" dirty="0">
+                <a:solidFill>
+                  <a:srgbClr val="FF0000"/>
+                </a:solidFill>
+              </a:rPr>
+              <a:t>MLE</a:t>
+            </a:r>
+            <a:r>
+              <a:rPr lang="en-US" dirty="0"/>
+              <a:t> minimizes the </a:t>
+            </a:r>
+            <a:r>
+              <a:rPr lang="en-US" b="1" dirty="0">
+                <a:solidFill>
+                  <a:srgbClr val="FF0000"/>
+                </a:solidFill>
+              </a:rPr>
+              <a:t>Cross Entropy Loss</a:t>
+            </a:r>
+            <a:r>
+              <a:rPr lang="en-US" b="1" dirty="0">
+                <a:solidFill>
+                  <a:srgbClr val="0070C0"/>
+                </a:solidFill>
+              </a:rPr>
+              <a:t> </a:t>
+            </a:r>
+            <a:r>
+              <a:rPr lang="en-US" dirty="0"/>
+              <a:t>function.</a:t>
+            </a:r>
+          </a:p>
+        </p:txBody>
+      </p:sp>
+      <p:pic>
+        <p:nvPicPr>
+          <p:cNvPr id="7" name="Google Shape;124;p17">
+            <a:extLst>
+              <a:ext uri="{FF2B5EF4-FFF2-40B4-BE49-F238E27FC236}">
+                <a16:creationId xmlns:a16="http://schemas.microsoft.com/office/drawing/2014/main" id="{0B861E9D-FA46-8542-A57B-6815984C7297}"/>
+              </a:ext>
+            </a:extLst>
+          </p:cNvPr>
+          <p:cNvPicPr preferRelativeResize="0"/>
+          <p:nvPr/>
+        </p:nvPicPr>
+        <p:blipFill rotWithShape="1">
+          <a:blip r:embed="rId2">
+            <a:alphaModFix/>
+          </a:blip>
+          <a:srcRect/>
+          <a:stretch/>
+        </p:blipFill>
+        <p:spPr>
+          <a:xfrm>
+            <a:off x="7522124" y="4613354"/>
+            <a:ext cx="4513817" cy="447315"/>
+          </a:xfrm>
+          <a:prstGeom prst="rect">
+            <a:avLst/>
+          </a:prstGeom>
+          <a:noFill/>
+          <a:ln>
+            <a:noFill/>
+          </a:ln>
+        </p:spPr>
+      </p:pic>
+      <p:sp>
+        <p:nvSpPr>
+          <p:cNvPr id="8" name="Google Shape;125;p17">
+            <a:extLst>
+              <a:ext uri="{FF2B5EF4-FFF2-40B4-BE49-F238E27FC236}">
+                <a16:creationId xmlns:a16="http://schemas.microsoft.com/office/drawing/2014/main" id="{5CB19F72-F166-5C40-BCE8-43C093A28A23}"/>
+              </a:ext>
+            </a:extLst>
+          </p:cNvPr>
+          <p:cNvSpPr txBox="1"/>
+          <p:nvPr/>
+        </p:nvSpPr>
+        <p:spPr>
+          <a:xfrm>
+            <a:off x="7509044" y="3644081"/>
+            <a:ext cx="4682956" cy="923330"/>
+          </a:xfrm>
+          <a:prstGeom prst="rect">
+            <a:avLst/>
+          </a:prstGeom>
+          <a:noFill/>
+          <a:ln>
+            <a:noFill/>
+          </a:ln>
+        </p:spPr>
+        <p:txBody>
+          <a:bodyPr spcFirstLastPara="1" wrap="square" lIns="91425" tIns="45700" rIns="91425" bIns="45700" anchor="t" anchorCtr="0">
+            <a:noAutofit/>
+          </a:bodyPr>
+          <a:lstStyle/>
+          <a:p>
+            <a:pPr marL="0" marR="0" lvl="0" indent="0" algn="l" rtl="0">
+              <a:spcBef>
+                <a:spcPts val="0"/>
+              </a:spcBef>
+              <a:spcAft>
+                <a:spcPts val="0"/>
+              </a:spcAft>
+              <a:buNone/>
+            </a:pPr>
+            <a:r>
+              <a:rPr lang="en-US" sz="1800" dirty="0">
+                <a:solidFill>
+                  <a:schemeClr val="dk1"/>
+                </a:solidFill>
+                <a:latin typeface="Calibri"/>
+                <a:ea typeface="Calibri"/>
+                <a:cs typeface="Calibri"/>
+                <a:sym typeface="Calibri"/>
+              </a:rPr>
+              <a:t>If “q” is model prediction, and “p” is probability of actual label, then similarity between q &amp; p can be expressed as </a:t>
+            </a:r>
+            <a:r>
+              <a:rPr lang="en-US" sz="1800" b="1" dirty="0">
+                <a:solidFill>
+                  <a:srgbClr val="0070C0"/>
+                </a:solidFill>
+                <a:latin typeface="Calibri"/>
+                <a:ea typeface="Calibri"/>
+                <a:cs typeface="Calibri"/>
+                <a:sym typeface="Calibri"/>
+              </a:rPr>
+              <a:t>cross-entropy</a:t>
+            </a:r>
+            <a:r>
+              <a:rPr lang="en-US" sz="1800" dirty="0">
+                <a:solidFill>
+                  <a:schemeClr val="dk1"/>
+                </a:solidFill>
+                <a:latin typeface="Calibri"/>
+                <a:ea typeface="Calibri"/>
+                <a:cs typeface="Calibri"/>
+                <a:sym typeface="Calibri"/>
+              </a:rPr>
+              <a:t> H(</a:t>
+            </a:r>
+            <a:r>
+              <a:rPr lang="en-US" sz="1800" dirty="0" err="1">
+                <a:solidFill>
+                  <a:schemeClr val="dk1"/>
+                </a:solidFill>
+                <a:latin typeface="Calibri"/>
+                <a:ea typeface="Calibri"/>
+                <a:cs typeface="Calibri"/>
+                <a:sym typeface="Calibri"/>
+              </a:rPr>
+              <a:t>p,q</a:t>
+            </a:r>
+            <a:r>
+              <a:rPr lang="en-US" sz="1800" dirty="0">
+                <a:solidFill>
+                  <a:schemeClr val="dk1"/>
+                </a:solidFill>
+                <a:latin typeface="Calibri"/>
+                <a:ea typeface="Calibri"/>
+                <a:cs typeface="Calibri"/>
+                <a:sym typeface="Calibri"/>
+              </a:rPr>
+              <a:t>):</a:t>
+            </a:r>
+            <a:endParaRPr sz="1800" dirty="0">
+              <a:solidFill>
+                <a:schemeClr val="dk1"/>
+              </a:solidFill>
+              <a:latin typeface="Calibri"/>
+              <a:ea typeface="Calibri"/>
+              <a:cs typeface="Calibri"/>
+              <a:sym typeface="Calibri"/>
+            </a:endParaRPr>
+          </a:p>
+        </p:txBody>
+      </p:sp>
+      <p:pic>
+        <p:nvPicPr>
+          <p:cNvPr id="10" name="Google Shape;127;p17">
+            <a:extLst>
+              <a:ext uri="{FF2B5EF4-FFF2-40B4-BE49-F238E27FC236}">
+                <a16:creationId xmlns:a16="http://schemas.microsoft.com/office/drawing/2014/main" id="{F6E61A89-381A-7B47-8915-EF66A475F9D2}"/>
+              </a:ext>
+            </a:extLst>
+          </p:cNvPr>
+          <p:cNvPicPr preferRelativeResize="0"/>
+          <p:nvPr/>
+        </p:nvPicPr>
+        <p:blipFill rotWithShape="1">
+          <a:blip r:embed="rId3">
+            <a:alphaModFix/>
+          </a:blip>
+          <a:srcRect/>
+          <a:stretch/>
+        </p:blipFill>
+        <p:spPr>
+          <a:xfrm>
+            <a:off x="430298" y="5060669"/>
+            <a:ext cx="5571108" cy="630308"/>
+          </a:xfrm>
+          <a:prstGeom prst="rect">
+            <a:avLst/>
+          </a:prstGeom>
+          <a:noFill/>
+          <a:ln>
+            <a:noFill/>
+          </a:ln>
+        </p:spPr>
+      </p:pic>
+      <p:pic>
+        <p:nvPicPr>
+          <p:cNvPr id="11" name="Picture 10">
+            <a:extLst>
+              <a:ext uri="{FF2B5EF4-FFF2-40B4-BE49-F238E27FC236}">
+                <a16:creationId xmlns:a16="http://schemas.microsoft.com/office/drawing/2014/main" id="{29276624-B9BD-3644-8F93-7B56378A1A72}"/>
+              </a:ext>
+            </a:extLst>
+          </p:cNvPr>
+          <p:cNvPicPr>
+            <a:picLocks noChangeAspect="1"/>
+          </p:cNvPicPr>
+          <p:nvPr/>
+        </p:nvPicPr>
+        <p:blipFill>
+          <a:blip r:embed="rId4" cstate="email">
+            <a:extLst>
+              <a:ext uri="{28A0092B-C50C-407E-A947-70E740481C1C}">
+                <a14:useLocalDpi xmlns:a14="http://schemas.microsoft.com/office/drawing/2010/main"/>
+              </a:ext>
+            </a:extLst>
+          </a:blip>
+          <a:stretch>
+            <a:fillRect/>
+          </a:stretch>
+        </p:blipFill>
+        <p:spPr>
+          <a:xfrm>
+            <a:off x="8096317" y="652363"/>
+            <a:ext cx="3822632" cy="2739212"/>
+          </a:xfrm>
+          <a:prstGeom prst="rect">
+            <a:avLst/>
+          </a:prstGeom>
+        </p:spPr>
+      </p:pic>
+      <p:sp>
+        <p:nvSpPr>
+          <p:cNvPr id="12" name="TextBox 11">
+            <a:extLst>
+              <a:ext uri="{FF2B5EF4-FFF2-40B4-BE49-F238E27FC236}">
+                <a16:creationId xmlns:a16="http://schemas.microsoft.com/office/drawing/2014/main" id="{E94A8149-9751-464E-B394-3B1CFB385E4E}"/>
+              </a:ext>
+            </a:extLst>
+          </p:cNvPr>
+          <p:cNvSpPr txBox="1"/>
+          <p:nvPr/>
+        </p:nvSpPr>
+        <p:spPr>
+          <a:xfrm>
+            <a:off x="8182936" y="247599"/>
+            <a:ext cx="3678864" cy="307777"/>
+          </a:xfrm>
+          <a:prstGeom prst="rect">
+            <a:avLst/>
+          </a:prstGeom>
+          <a:noFill/>
+        </p:spPr>
+        <p:txBody>
+          <a:bodyPr wrap="square" rtlCol="0">
+            <a:spAutoFit/>
+          </a:bodyPr>
+          <a:lstStyle/>
+          <a:p>
+            <a:r>
+              <a:rPr lang="en-US" dirty="0"/>
+              <a:t>Log-Loss error function is better than MSE:</a:t>
+            </a:r>
+          </a:p>
+        </p:txBody>
+      </p:sp>
+    </p:spTree>
+    <p:extLst>
+      <p:ext uri="{BB962C8B-B14F-4D97-AF65-F5344CB8AC3E}">
+        <p14:creationId xmlns:p14="http://schemas.microsoft.com/office/powerpoint/2010/main" val="2066613169"/>
+      </p:ext>
+    </p:extLst>
+  </p:cSld>
+  <p:clrMapOvr>
+    <a:masterClrMapping/>
+  </p:clrMapOvr>
+</p:sld>
+</file>
+
+<file path=ppt/slides/slide3.xml><?xml version="1.0" encoding="utf-8"?>
+<p:sld xmlns:a="http://schemas.openxmlformats.org/drawingml/2006/main" xmlns:r="http://schemas.openxmlformats.org/officeDocument/2006/relationships" xmlns:p="http://schemas.openxmlformats.org/presentationml/2006/main">
+  <p:cSld>
+    <p:spTree>
+      <p:nvGrpSpPr>
+        <p:cNvPr id="1" name="Shape 100"/>
+        <p:cNvGrpSpPr/>
+        <p:nvPr/>
+      </p:nvGrpSpPr>
+      <p:grpSpPr>
+        <a:xfrm>
+          <a:off x="0" y="0"/>
+          <a:ext cx="0" cy="0"/>
+          <a:chOff x="0" y="0"/>
+          <a:chExt cx="0" cy="0"/>
+        </a:xfrm>
+      </p:grpSpPr>
+      <p:pic>
+        <p:nvPicPr>
+          <p:cNvPr id="103" name="Google Shape;103;p14"/>
+          <p:cNvPicPr preferRelativeResize="0"/>
+          <p:nvPr/>
+        </p:nvPicPr>
+        <p:blipFill>
+          <a:blip r:embed="rId3" cstate="email">
+            <a:alphaModFix/>
+            <a:extLst>
+              <a:ext uri="{28A0092B-C50C-407E-A947-70E740481C1C}">
+                <a14:useLocalDpi xmlns:a14="http://schemas.microsoft.com/office/drawing/2010/main"/>
+              </a:ext>
+            </a:extLst>
+          </a:blip>
+          <a:stretch>
+            <a:fillRect/>
+          </a:stretch>
+        </p:blipFill>
+        <p:spPr>
+          <a:xfrm>
+            <a:off x="6947065" y="3013714"/>
+            <a:ext cx="1909552" cy="1353989"/>
+          </a:xfrm>
+          <a:prstGeom prst="rect">
+            <a:avLst/>
+          </a:prstGeom>
+          <a:noFill/>
+          <a:ln>
+            <a:solidFill>
+              <a:schemeClr val="accent1">
+                <a:shade val="50000"/>
+              </a:schemeClr>
+            </a:solidFill>
+          </a:ln>
+        </p:spPr>
+      </p:pic>
+      <p:sp>
+        <p:nvSpPr>
+          <p:cNvPr id="101" name="Google Shape;101;p14"/>
+          <p:cNvSpPr txBox="1"/>
+          <p:nvPr/>
+        </p:nvSpPr>
+        <p:spPr>
+          <a:xfrm>
+            <a:off x="245846" y="1936299"/>
+            <a:ext cx="5378311" cy="2985402"/>
+          </a:xfrm>
+          <a:prstGeom prst="rect">
+            <a:avLst/>
+          </a:prstGeom>
+          <a:solidFill>
+            <a:schemeClr val="accent4">
+              <a:lumMod val="20000"/>
+              <a:lumOff val="80000"/>
+            </a:schemeClr>
+          </a:solidFill>
+          <a:ln>
+            <a:noFill/>
+          </a:ln>
+        </p:spPr>
+        <p:txBody>
+          <a:bodyPr spcFirstLastPara="1" wrap="square" lIns="91425" tIns="91425" rIns="91425" bIns="91425" anchor="t" anchorCtr="0">
+            <a:spAutoFit/>
+          </a:bodyPr>
+          <a:lstStyle/>
+          <a:p>
+            <a:pPr lvl="0"/>
+            <a:r>
+              <a:rPr lang="en-US" dirty="0"/>
+              <a:t>First, </a:t>
+            </a:r>
+            <a:r>
+              <a:rPr lang="en-US" b="1" dirty="0">
+                <a:solidFill>
+                  <a:srgbClr val="FF0000"/>
+                </a:solidFill>
+              </a:rPr>
+              <a:t>MSE</a:t>
+            </a:r>
+            <a:r>
+              <a:rPr lang="en-US" dirty="0"/>
+              <a:t> can force conversion to a wrong answer. On the picture to the right you can see how adding data points with big tumor sizes will shift the transition point toward larger sizes, thus changing diagnosis for some cases.</a:t>
+            </a:r>
+          </a:p>
+          <a:p>
+            <a:pPr marL="0" lvl="0" indent="0" algn="l" rtl="0">
+              <a:spcBef>
+                <a:spcPts val="0"/>
+              </a:spcBef>
+              <a:spcAft>
+                <a:spcPts val="0"/>
+              </a:spcAft>
+              <a:buNone/>
+            </a:pPr>
+            <a:endParaRPr lang="en-US" dirty="0"/>
+          </a:p>
+          <a:p>
+            <a:pPr marL="0" lvl="0" indent="0" algn="l" rtl="0">
+              <a:spcBef>
+                <a:spcPts val="0"/>
+              </a:spcBef>
+              <a:spcAft>
+                <a:spcPts val="0"/>
+              </a:spcAft>
+              <a:buNone/>
+            </a:pPr>
+            <a:endParaRPr dirty="0"/>
+          </a:p>
+          <a:p>
+            <a:pPr marL="0" lvl="0" indent="0" algn="l" rtl="0">
+              <a:spcBef>
+                <a:spcPts val="0"/>
+              </a:spcBef>
+              <a:spcAft>
+                <a:spcPts val="0"/>
+              </a:spcAft>
+              <a:buNone/>
+            </a:pPr>
+            <a:r>
+              <a:rPr lang="en-US" dirty="0"/>
+              <a:t>Second reason against </a:t>
+            </a:r>
+            <a:r>
+              <a:rPr lang="en-US" b="1" dirty="0">
+                <a:solidFill>
+                  <a:srgbClr val="FF0000"/>
+                </a:solidFill>
+              </a:rPr>
+              <a:t>MSE</a:t>
+            </a:r>
+            <a:r>
+              <a:rPr lang="en-US" dirty="0"/>
+              <a:t> is that </a:t>
+            </a:r>
+            <a:r>
+              <a:rPr lang="en-US" b="1" dirty="0">
+                <a:solidFill>
+                  <a:srgbClr val="FF0000"/>
+                </a:solidFill>
+              </a:rPr>
+              <a:t>MSE</a:t>
+            </a:r>
+            <a:r>
+              <a:rPr lang="en-US" dirty="0"/>
+              <a:t> loss function tend to be </a:t>
+            </a:r>
+            <a:endParaRPr dirty="0"/>
+          </a:p>
+          <a:p>
+            <a:pPr marL="0" lvl="0" indent="0" algn="l" rtl="0">
+              <a:spcBef>
+                <a:spcPts val="0"/>
+              </a:spcBef>
+              <a:spcAft>
+                <a:spcPts val="0"/>
+              </a:spcAft>
+              <a:buNone/>
+            </a:pPr>
+            <a:r>
+              <a:rPr lang="en-US" b="1" dirty="0">
+                <a:solidFill>
+                  <a:srgbClr val="FF0000"/>
+                </a:solidFill>
+              </a:rPr>
+              <a:t>non-convex - have multiple local minima</a:t>
+            </a:r>
+            <a:r>
+              <a:rPr lang="en-US" dirty="0"/>
+              <a:t>, thus making it difficult to converge.</a:t>
+            </a:r>
+            <a:endParaRPr dirty="0"/>
+          </a:p>
+          <a:p>
+            <a:pPr marL="0" lvl="0" indent="0" algn="l" rtl="0">
+              <a:spcBef>
+                <a:spcPts val="0"/>
+              </a:spcBef>
+              <a:spcAft>
+                <a:spcPts val="0"/>
+              </a:spcAft>
+              <a:buNone/>
+            </a:pPr>
+            <a:endParaRPr lang="en-US" dirty="0"/>
+          </a:p>
+          <a:p>
+            <a:pPr marL="0" lvl="0" indent="0" algn="l" rtl="0">
+              <a:spcBef>
+                <a:spcPts val="0"/>
+              </a:spcBef>
+              <a:spcAft>
+                <a:spcPts val="0"/>
+              </a:spcAft>
+              <a:buNone/>
+            </a:pPr>
+            <a:endParaRPr dirty="0"/>
+          </a:p>
+          <a:p>
+            <a:pPr marL="0" lvl="0" indent="0" algn="l" rtl="0">
+              <a:spcBef>
+                <a:spcPts val="0"/>
+              </a:spcBef>
+              <a:spcAft>
+                <a:spcPts val="0"/>
+              </a:spcAft>
+              <a:buNone/>
+            </a:pPr>
+            <a:r>
+              <a:rPr lang="en-US" dirty="0"/>
+              <a:t>Finally, Cross-Entropy Error function gives bigger gradients and better conversion.</a:t>
+            </a:r>
+            <a:endParaRPr dirty="0"/>
+          </a:p>
+        </p:txBody>
+      </p:sp>
+      <p:pic>
+        <p:nvPicPr>
+          <p:cNvPr id="102" name="Google Shape;102;p14"/>
+          <p:cNvPicPr preferRelativeResize="0"/>
+          <p:nvPr/>
+        </p:nvPicPr>
+        <p:blipFill>
+          <a:blip r:embed="rId4" cstate="email">
+            <a:alphaModFix/>
+            <a:extLst>
+              <a:ext uri="{28A0092B-C50C-407E-A947-70E740481C1C}">
+                <a14:useLocalDpi xmlns:a14="http://schemas.microsoft.com/office/drawing/2010/main"/>
+              </a:ext>
+            </a:extLst>
+          </a:blip>
+          <a:stretch>
+            <a:fillRect/>
+          </a:stretch>
+        </p:blipFill>
+        <p:spPr>
+          <a:xfrm>
+            <a:off x="6947065" y="4756391"/>
+            <a:ext cx="3253191" cy="1953034"/>
+          </a:xfrm>
+          <a:prstGeom prst="rect">
+            <a:avLst/>
+          </a:prstGeom>
+          <a:noFill/>
+          <a:ln>
+            <a:solidFill>
+              <a:schemeClr val="accent1">
+                <a:shade val="50000"/>
+              </a:schemeClr>
+            </a:solidFill>
+          </a:ln>
+        </p:spPr>
+      </p:pic>
+      <p:pic>
+        <p:nvPicPr>
+          <p:cNvPr id="104" name="Google Shape;104;p14"/>
+          <p:cNvPicPr preferRelativeResize="0"/>
+          <p:nvPr/>
+        </p:nvPicPr>
+        <p:blipFill rotWithShape="1">
+          <a:blip r:embed="rId5" cstate="email">
+            <a:alphaModFix/>
+            <a:extLst>
+              <a:ext uri="{28A0092B-C50C-407E-A947-70E740481C1C}">
+                <a14:useLocalDpi xmlns:a14="http://schemas.microsoft.com/office/drawing/2010/main"/>
+              </a:ext>
+            </a:extLst>
+          </a:blip>
+          <a:srcRect/>
+          <a:stretch/>
+        </p:blipFill>
+        <p:spPr>
+          <a:xfrm>
+            <a:off x="6947065" y="143086"/>
+            <a:ext cx="4141465" cy="2481940"/>
+          </a:xfrm>
+          <a:prstGeom prst="rect">
+            <a:avLst/>
+          </a:prstGeom>
+          <a:noFill/>
+          <a:ln>
+            <a:solidFill>
+              <a:schemeClr val="accent1">
+                <a:shade val="50000"/>
+              </a:schemeClr>
+            </a:solidFill>
+          </a:ln>
+        </p:spPr>
+      </p:pic>
+      <p:sp>
+        <p:nvSpPr>
+          <p:cNvPr id="6" name="Google Shape;101;p14">
+            <a:extLst>
+              <a:ext uri="{FF2B5EF4-FFF2-40B4-BE49-F238E27FC236}">
+                <a16:creationId xmlns:a16="http://schemas.microsoft.com/office/drawing/2014/main" id="{4D358088-0E4D-E997-541B-E4BC47BA2F77}"/>
+              </a:ext>
+            </a:extLst>
+          </p:cNvPr>
+          <p:cNvSpPr txBox="1"/>
+          <p:nvPr/>
+        </p:nvSpPr>
+        <p:spPr>
+          <a:xfrm>
+            <a:off x="-50618" y="0"/>
+            <a:ext cx="6146618" cy="800189"/>
+          </a:xfrm>
+          <a:prstGeom prst="rect">
+            <a:avLst/>
+          </a:prstGeom>
+          <a:noFill/>
+          <a:ln>
+            <a:noFill/>
+          </a:ln>
+        </p:spPr>
+        <p:txBody>
+          <a:bodyPr spcFirstLastPara="1" wrap="square" lIns="91425" tIns="91425" rIns="91425" bIns="91425" anchor="t" anchorCtr="0">
+            <a:spAutoFit/>
+          </a:bodyPr>
+          <a:lstStyle/>
+          <a:p>
+            <a:pPr marL="0" lvl="0" indent="0" algn="l" rtl="0">
+              <a:spcBef>
+                <a:spcPts val="0"/>
+              </a:spcBef>
+              <a:spcAft>
+                <a:spcPts val="0"/>
+              </a:spcAft>
+              <a:buNone/>
+            </a:pPr>
+            <a:r>
+              <a:rPr lang="en-US" sz="2000" b="1" dirty="0"/>
+              <a:t>Why Mean Squared Error (MSE) is not good for classification?</a:t>
+            </a:r>
+          </a:p>
+        </p:txBody>
+      </p:sp>
+      <p:sp>
+        <p:nvSpPr>
+          <p:cNvPr id="2" name="Right Arrow 1">
+            <a:extLst>
+              <a:ext uri="{FF2B5EF4-FFF2-40B4-BE49-F238E27FC236}">
+                <a16:creationId xmlns:a16="http://schemas.microsoft.com/office/drawing/2014/main" id="{7198567A-D010-0599-6140-AACDD8CB51FC}"/>
+              </a:ext>
+            </a:extLst>
+          </p:cNvPr>
+          <p:cNvSpPr/>
+          <p:nvPr/>
+        </p:nvSpPr>
+        <p:spPr>
+          <a:xfrm>
+            <a:off x="5949538" y="3429000"/>
+            <a:ext cx="700644" cy="175061"/>
+          </a:xfrm>
+          <a:prstGeom prst="rightArrow">
+            <a:avLst/>
+          </a:prstGeom>
+        </p:spPr>
+        <p:style>
+          <a:lnRef idx="2">
+            <a:schemeClr val="accent1">
+              <a:shade val="50000"/>
+            </a:schemeClr>
+          </a:lnRef>
+          <a:fillRef idx="1">
+            <a:schemeClr val="accent1"/>
+          </a:fillRef>
+          <a:effectRef idx="0">
+            <a:schemeClr val="accent1"/>
+          </a:effectRef>
+          <a:fontRef idx="minor">
+            <a:schemeClr val="lt1"/>
+          </a:fontRef>
+        </p:style>
+        <p:txBody>
+          <a:bodyPr rtlCol="0" anchor="ctr"/>
+          <a:lstStyle/>
+          <a:p>
+            <a:pPr algn="ctr"/>
+            <a:endParaRPr lang="en-US"/>
+          </a:p>
+        </p:txBody>
+      </p:sp>
+      <p:sp>
+        <p:nvSpPr>
+          <p:cNvPr id="8" name="Right Arrow 7">
+            <a:extLst>
+              <a:ext uri="{FF2B5EF4-FFF2-40B4-BE49-F238E27FC236}">
+                <a16:creationId xmlns:a16="http://schemas.microsoft.com/office/drawing/2014/main" id="{BE1B2BC8-B262-C01B-1151-B3B184AA85E4}"/>
+              </a:ext>
+            </a:extLst>
+          </p:cNvPr>
+          <p:cNvSpPr/>
+          <p:nvPr/>
+        </p:nvSpPr>
+        <p:spPr>
+          <a:xfrm rot="1358274">
+            <a:off x="5888577" y="4746640"/>
+            <a:ext cx="700644" cy="175061"/>
+          </a:xfrm>
+          <a:prstGeom prst="rightArrow">
+            <a:avLst/>
+          </a:prstGeom>
+        </p:spPr>
+        <p:style>
+          <a:lnRef idx="2">
+            <a:schemeClr val="accent1">
+              <a:shade val="50000"/>
+            </a:schemeClr>
+          </a:lnRef>
+          <a:fillRef idx="1">
+            <a:schemeClr val="accent1"/>
+          </a:fillRef>
+          <a:effectRef idx="0">
+            <a:schemeClr val="accent1"/>
+          </a:effectRef>
+          <a:fontRef idx="minor">
+            <a:schemeClr val="lt1"/>
+          </a:fontRef>
+        </p:style>
+        <p:txBody>
+          <a:bodyPr rtlCol="0" anchor="ctr"/>
+          <a:lstStyle/>
+          <a:p>
+            <a:pPr algn="ctr"/>
+            <a:endParaRPr lang="en-US"/>
+          </a:p>
+        </p:txBody>
+      </p:sp>
+      <p:sp>
+        <p:nvSpPr>
+          <p:cNvPr id="9" name="Right Arrow 8">
+            <a:extLst>
+              <a:ext uri="{FF2B5EF4-FFF2-40B4-BE49-F238E27FC236}">
+                <a16:creationId xmlns:a16="http://schemas.microsoft.com/office/drawing/2014/main" id="{187ADDC7-AFE4-A322-C6F7-B6AB23F26AEE}"/>
+              </a:ext>
+            </a:extLst>
+          </p:cNvPr>
+          <p:cNvSpPr/>
+          <p:nvPr/>
+        </p:nvSpPr>
+        <p:spPr>
+          <a:xfrm rot="20264078">
+            <a:off x="5902037" y="2175168"/>
+            <a:ext cx="700644" cy="175061"/>
+          </a:xfrm>
+          <a:prstGeom prst="rightArrow">
+            <a:avLst/>
+          </a:prstGeom>
+        </p:spPr>
+        <p:style>
+          <a:lnRef idx="2">
+            <a:schemeClr val="accent1">
+              <a:shade val="50000"/>
+            </a:schemeClr>
+          </a:lnRef>
+          <a:fillRef idx="1">
+            <a:schemeClr val="accent1"/>
+          </a:fillRef>
+          <a:effectRef idx="0">
+            <a:schemeClr val="accent1"/>
+          </a:effectRef>
+          <a:fontRef idx="minor">
+            <a:schemeClr val="lt1"/>
+          </a:fontRef>
+        </p:style>
+        <p:txBody>
+          <a:bodyPr rtlCol="0" anchor="ctr"/>
+          <a:lstStyle/>
+          <a:p>
+            <a:pPr algn="ctr"/>
+            <a:endParaRPr lang="en-US"/>
+          </a:p>
+        </p:txBody>
+      </p:sp>
+      <p:sp>
+        <p:nvSpPr>
+          <p:cNvPr id="10" name="Google Shape;101;p14">
+            <a:extLst>
+              <a:ext uri="{FF2B5EF4-FFF2-40B4-BE49-F238E27FC236}">
+                <a16:creationId xmlns:a16="http://schemas.microsoft.com/office/drawing/2014/main" id="{07C8B44B-C432-DF81-25C3-F2B298F3D228}"/>
+              </a:ext>
+            </a:extLst>
+          </p:cNvPr>
+          <p:cNvSpPr txBox="1"/>
+          <p:nvPr/>
+        </p:nvSpPr>
+        <p:spPr>
+          <a:xfrm>
+            <a:off x="794771" y="1264185"/>
+            <a:ext cx="3989083" cy="615523"/>
+          </a:xfrm>
+          <a:prstGeom prst="rect">
+            <a:avLst/>
+          </a:prstGeom>
+          <a:noFill/>
+          <a:ln>
+            <a:noFill/>
+          </a:ln>
+        </p:spPr>
+        <p:txBody>
+          <a:bodyPr spcFirstLastPara="1" wrap="square" lIns="91425" tIns="91425" rIns="91425" bIns="91425" anchor="t" anchorCtr="0">
+            <a:spAutoFit/>
+          </a:bodyPr>
+          <a:lstStyle/>
+          <a:p>
+            <a:pPr marL="0" lvl="0" indent="0" algn="ctr" rtl="0">
+              <a:spcBef>
+                <a:spcPts val="0"/>
+              </a:spcBef>
+              <a:spcAft>
+                <a:spcPts val="0"/>
+              </a:spcAft>
+              <a:buNone/>
+            </a:pPr>
+            <a:r>
+              <a:rPr lang="en-US" dirty="0"/>
+              <a:t>From </a:t>
+            </a:r>
+            <a:r>
+              <a:rPr lang="en-US" b="1" dirty="0">
+                <a:solidFill>
+                  <a:srgbClr val="FF0000"/>
+                </a:solidFill>
+              </a:rPr>
+              <a:t>Andrew Ng’s Machine Learning course</a:t>
+            </a:r>
+            <a:r>
+              <a:rPr lang="en-US" dirty="0"/>
+              <a:t> </a:t>
+            </a:r>
+            <a:br>
+              <a:rPr lang="en-US" dirty="0"/>
+            </a:br>
+            <a:r>
+              <a:rPr lang="en-US" dirty="0"/>
+              <a:t>(see on YouTube or Coursera)</a:t>
+            </a:r>
+          </a:p>
+        </p:txBody>
+      </p:sp>
+    </p:spTree>
+    <p:extLst>
+      <p:ext uri="{BB962C8B-B14F-4D97-AF65-F5344CB8AC3E}">
+        <p14:creationId xmlns:p14="http://schemas.microsoft.com/office/powerpoint/2010/main" val="391142958"/>
+      </p:ext>
+    </p:extLst>
+  </p:cSld>
+  <p:clrMapOvr>
+    <a:masterClrMapping/>
+  </p:clrMapOvr>
+</p:sld>
+</file>
+
+<file path=ppt/slides/slide4.xml><?xml version="1.0" encoding="utf-8"?>
+<p:sld xmlns:a="http://schemas.openxmlformats.org/drawingml/2006/main" xmlns:r="http://schemas.openxmlformats.org/officeDocument/2006/relationships" xmlns:p="http://schemas.openxmlformats.org/presentationml/2006/main">
+  <p:cSld>
+    <p:spTree>
+      <p:nvGrpSpPr>
+        <p:cNvPr id="1" name=""/>
+        <p:cNvGrpSpPr/>
+        <p:nvPr/>
+      </p:nvGrpSpPr>
+      <p:grpSpPr>
+        <a:xfrm>
+          <a:off x="0" y="0"/>
+          <a:ext cx="0" cy="0"/>
+          <a:chOff x="0" y="0"/>
+          <a:chExt cx="0" cy="0"/>
+        </a:xfrm>
+      </p:grpSpPr>
+      <p:pic>
+        <p:nvPicPr>
+          <p:cNvPr id="12" name="Picture 11">
+            <a:extLst>
+              <a:ext uri="{FF2B5EF4-FFF2-40B4-BE49-F238E27FC236}">
+                <a16:creationId xmlns:a16="http://schemas.microsoft.com/office/drawing/2014/main" id="{8C6B45E0-C217-214D-A445-98D0CDD58813}"/>
+              </a:ext>
+            </a:extLst>
+          </p:cNvPr>
+          <p:cNvPicPr>
+            <a:picLocks noChangeAspect="1"/>
+          </p:cNvPicPr>
+          <p:nvPr/>
+        </p:nvPicPr>
+        <p:blipFill rotWithShape="1">
+          <a:blip r:embed="rId2" cstate="email">
+            <a:extLst>
+              <a:ext uri="{28A0092B-C50C-407E-A947-70E740481C1C}">
+                <a14:useLocalDpi xmlns:a14="http://schemas.microsoft.com/office/drawing/2010/main"/>
+              </a:ext>
+            </a:extLst>
+          </a:blip>
+          <a:srcRect/>
+          <a:stretch/>
+        </p:blipFill>
+        <p:spPr>
+          <a:xfrm>
+            <a:off x="5930537" y="635429"/>
+            <a:ext cx="6131475" cy="3703645"/>
+          </a:xfrm>
+          <a:prstGeom prst="rect">
+            <a:avLst/>
+          </a:prstGeom>
+        </p:spPr>
+      </p:pic>
+      <p:sp>
+        <p:nvSpPr>
+          <p:cNvPr id="4" name="TextBox 3">
+            <a:extLst>
+              <a:ext uri="{FF2B5EF4-FFF2-40B4-BE49-F238E27FC236}">
+                <a16:creationId xmlns:a16="http://schemas.microsoft.com/office/drawing/2014/main" id="{10A39BA7-2EE5-C447-836E-94F5BA413B56}"/>
+              </a:ext>
+            </a:extLst>
+          </p:cNvPr>
+          <p:cNvSpPr txBox="1"/>
+          <p:nvPr/>
+        </p:nvSpPr>
+        <p:spPr>
+          <a:xfrm>
+            <a:off x="-15764" y="34227"/>
+            <a:ext cx="11240812" cy="523220"/>
+          </a:xfrm>
+          <a:prstGeom prst="rect">
+            <a:avLst/>
+          </a:prstGeom>
+          <a:noFill/>
+        </p:spPr>
+        <p:txBody>
+          <a:bodyPr wrap="square" rtlCol="0">
+            <a:spAutoFit/>
+          </a:bodyPr>
+          <a:lstStyle/>
+          <a:p>
+            <a:r>
+              <a:rPr lang="en-US" sz="2800" b="1" dirty="0"/>
+              <a:t>Logistic Regression and MLE (Maximum Likelihood Estimation)</a:t>
+            </a:r>
+          </a:p>
+        </p:txBody>
+      </p:sp>
+      <p:sp>
+        <p:nvSpPr>
+          <p:cNvPr id="5" name="TextBox 4">
+            <a:extLst>
+              <a:ext uri="{FF2B5EF4-FFF2-40B4-BE49-F238E27FC236}">
+                <a16:creationId xmlns:a16="http://schemas.microsoft.com/office/drawing/2014/main" id="{E0FA9489-6006-0F44-92B7-CF4D4E93E2F0}"/>
+              </a:ext>
+            </a:extLst>
+          </p:cNvPr>
+          <p:cNvSpPr txBox="1"/>
+          <p:nvPr/>
+        </p:nvSpPr>
+        <p:spPr>
+          <a:xfrm>
+            <a:off x="23425" y="1591991"/>
+            <a:ext cx="5249918" cy="1969770"/>
+          </a:xfrm>
+          <a:prstGeom prst="rect">
+            <a:avLst/>
+          </a:prstGeom>
+          <a:solidFill>
+            <a:schemeClr val="accent4">
+              <a:lumMod val="20000"/>
+              <a:lumOff val="80000"/>
+            </a:schemeClr>
+          </a:solidFill>
+        </p:spPr>
+        <p:txBody>
+          <a:bodyPr wrap="square" rtlCol="0">
+            <a:spAutoFit/>
+          </a:bodyPr>
+          <a:lstStyle/>
+          <a:p>
+            <a:r>
+              <a:rPr lang="en-US" dirty="0"/>
+              <a:t>In Logistic Regression we fit log-odds with linear function.  </a:t>
+            </a:r>
+            <a:br>
+              <a:rPr lang="en-US" dirty="0"/>
+            </a:br>
+            <a:r>
+              <a:rPr lang="en-US" dirty="0"/>
+              <a:t>How is this done?</a:t>
+            </a:r>
+          </a:p>
+          <a:p>
+            <a:endParaRPr lang="en-US" dirty="0"/>
+          </a:p>
+          <a:p>
+            <a:r>
+              <a:rPr lang="en-US" dirty="0"/>
+              <a:t>For our data points "x" we have values v0=0, v1=1.</a:t>
+            </a:r>
+          </a:p>
+          <a:p>
+            <a:r>
+              <a:rPr lang="en-US" sz="1200" b="1" dirty="0">
+                <a:solidFill>
+                  <a:srgbClr val="0070C0"/>
+                </a:solidFill>
+                <a:latin typeface="Consolas" panose="020B0609020204030204" pitchFamily="49" charset="0"/>
+                <a:cs typeface="Consolas" panose="020B0609020204030204" pitchFamily="49" charset="0"/>
+              </a:rPr>
+              <a:t>    ln(v0/(1-v0)) = ln(0/1) = ln(0) = -</a:t>
+            </a:r>
+            <a:r>
+              <a:rPr lang="en-US" sz="1200" b="1" dirty="0" err="1">
+                <a:solidFill>
+                  <a:srgbClr val="0070C0"/>
+                </a:solidFill>
+                <a:latin typeface="Consolas" panose="020B0609020204030204" pitchFamily="49" charset="0"/>
+                <a:cs typeface="Consolas" panose="020B0609020204030204" pitchFamily="49" charset="0"/>
+              </a:rPr>
+              <a:t>inf</a:t>
+            </a:r>
+            <a:endParaRPr lang="en-US" sz="1200" b="1" dirty="0">
+              <a:solidFill>
+                <a:srgbClr val="0070C0"/>
+              </a:solidFill>
+              <a:latin typeface="Consolas" panose="020B0609020204030204" pitchFamily="49" charset="0"/>
+              <a:cs typeface="Consolas" panose="020B0609020204030204" pitchFamily="49" charset="0"/>
+            </a:endParaRPr>
+          </a:p>
+          <a:p>
+            <a:r>
+              <a:rPr lang="en-US" sz="1200" b="1" dirty="0">
+                <a:solidFill>
+                  <a:srgbClr val="0070C0"/>
+                </a:solidFill>
+                <a:latin typeface="Consolas" panose="020B0609020204030204" pitchFamily="49" charset="0"/>
+                <a:cs typeface="Consolas" panose="020B0609020204030204" pitchFamily="49" charset="0"/>
+              </a:rPr>
+              <a:t>    ln(v1/(1-v1)) = ln(1/(1-1)) = ln(1/0) = ln(+</a:t>
+            </a:r>
+            <a:r>
+              <a:rPr lang="en-US" sz="1200" b="1" dirty="0" err="1">
+                <a:solidFill>
+                  <a:srgbClr val="0070C0"/>
+                </a:solidFill>
+                <a:latin typeface="Consolas" panose="020B0609020204030204" pitchFamily="49" charset="0"/>
+                <a:cs typeface="Consolas" panose="020B0609020204030204" pitchFamily="49" charset="0"/>
+              </a:rPr>
+              <a:t>inf</a:t>
+            </a:r>
+            <a:r>
+              <a:rPr lang="en-US" sz="1200" b="1" dirty="0">
+                <a:solidFill>
+                  <a:srgbClr val="0070C0"/>
+                </a:solidFill>
+                <a:latin typeface="Consolas" panose="020B0609020204030204" pitchFamily="49" charset="0"/>
+                <a:cs typeface="Consolas" panose="020B0609020204030204" pitchFamily="49" charset="0"/>
+              </a:rPr>
+              <a:t>) = +</a:t>
+            </a:r>
+            <a:r>
+              <a:rPr lang="en-US" sz="1200" b="1" dirty="0" err="1">
+                <a:solidFill>
+                  <a:srgbClr val="0070C0"/>
+                </a:solidFill>
+                <a:latin typeface="Consolas" panose="020B0609020204030204" pitchFamily="49" charset="0"/>
+                <a:cs typeface="Consolas" panose="020B0609020204030204" pitchFamily="49" charset="0"/>
+              </a:rPr>
+              <a:t>inf</a:t>
+            </a:r>
+            <a:endParaRPr lang="en-US" sz="1200" b="1" dirty="0">
+              <a:solidFill>
+                <a:srgbClr val="0070C0"/>
+              </a:solidFill>
+              <a:latin typeface="Consolas" panose="020B0609020204030204" pitchFamily="49" charset="0"/>
+              <a:cs typeface="Consolas" panose="020B0609020204030204" pitchFamily="49" charset="0"/>
+            </a:endParaRPr>
+          </a:p>
+          <a:p>
+            <a:endParaRPr lang="en-US" dirty="0"/>
+          </a:p>
+          <a:p>
+            <a:r>
+              <a:rPr lang="en-US" dirty="0">
+                <a:solidFill>
+                  <a:srgbClr val="FF0000"/>
+                </a:solidFill>
+              </a:rPr>
+              <a:t>So we can not use MSE (Mean-Squared Error), because we can not operate on infinite values.</a:t>
+            </a:r>
+          </a:p>
+        </p:txBody>
+      </p:sp>
+      <p:pic>
+        <p:nvPicPr>
+          <p:cNvPr id="6" name="Picture 5">
+            <a:extLst>
+              <a:ext uri="{FF2B5EF4-FFF2-40B4-BE49-F238E27FC236}">
+                <a16:creationId xmlns:a16="http://schemas.microsoft.com/office/drawing/2014/main" id="{7B865D29-C9D3-D64E-B0A6-A2CFD002EF62}"/>
+              </a:ext>
+            </a:extLst>
+          </p:cNvPr>
+          <p:cNvPicPr>
+            <a:picLocks noChangeAspect="1"/>
+          </p:cNvPicPr>
+          <p:nvPr/>
+        </p:nvPicPr>
+        <p:blipFill rotWithShape="1">
+          <a:blip r:embed="rId3" cstate="email">
+            <a:extLst>
+              <a:ext uri="{28A0092B-C50C-407E-A947-70E740481C1C}">
+                <a14:useLocalDpi xmlns:a14="http://schemas.microsoft.com/office/drawing/2010/main"/>
+              </a:ext>
+            </a:extLst>
+          </a:blip>
+          <a:srcRect/>
+          <a:stretch/>
+        </p:blipFill>
+        <p:spPr>
+          <a:xfrm>
+            <a:off x="509588" y="557447"/>
+            <a:ext cx="3597637" cy="877087"/>
+          </a:xfrm>
+          <a:prstGeom prst="rect">
+            <a:avLst/>
+          </a:prstGeom>
+        </p:spPr>
+      </p:pic>
+      <p:sp>
+        <p:nvSpPr>
+          <p:cNvPr id="7" name="TextBox 6">
+            <a:extLst>
+              <a:ext uri="{FF2B5EF4-FFF2-40B4-BE49-F238E27FC236}">
+                <a16:creationId xmlns:a16="http://schemas.microsoft.com/office/drawing/2014/main" id="{E7B62654-72C2-EC41-B2E6-C8E4035B0A50}"/>
+              </a:ext>
+            </a:extLst>
+          </p:cNvPr>
+          <p:cNvSpPr txBox="1"/>
+          <p:nvPr/>
+        </p:nvSpPr>
+        <p:spPr>
+          <a:xfrm>
+            <a:off x="5391806" y="4192667"/>
+            <a:ext cx="650704" cy="523220"/>
+          </a:xfrm>
+          <a:prstGeom prst="rect">
+            <a:avLst/>
+          </a:prstGeom>
+          <a:solidFill>
+            <a:schemeClr val="accent4">
+              <a:lumMod val="20000"/>
+              <a:lumOff val="80000"/>
+            </a:schemeClr>
+          </a:solidFill>
+        </p:spPr>
+        <p:txBody>
+          <a:bodyPr wrap="square" rtlCol="0">
+            <a:spAutoFit/>
+          </a:bodyPr>
+          <a:lstStyle/>
+          <a:p>
+            <a:r>
+              <a:rPr lang="en-US" sz="2800" b="1" dirty="0"/>
+              <a:t>R</a:t>
+            </a:r>
+            <a:r>
+              <a:rPr lang="en-US" sz="2800" b="1" baseline="30000" dirty="0"/>
+              <a:t>2</a:t>
+            </a:r>
+          </a:p>
+        </p:txBody>
+      </p:sp>
+      <p:sp>
+        <p:nvSpPr>
+          <p:cNvPr id="9" name="TextBox 8">
+            <a:extLst>
+              <a:ext uri="{FF2B5EF4-FFF2-40B4-BE49-F238E27FC236}">
+                <a16:creationId xmlns:a16="http://schemas.microsoft.com/office/drawing/2014/main" id="{91C210FA-6380-FB43-A8F2-968EB87B8BB5}"/>
+              </a:ext>
+            </a:extLst>
+          </p:cNvPr>
+          <p:cNvSpPr txBox="1"/>
+          <p:nvPr/>
+        </p:nvSpPr>
+        <p:spPr>
+          <a:xfrm>
+            <a:off x="5391806" y="4684842"/>
+            <a:ext cx="6670206" cy="1461939"/>
+          </a:xfrm>
+          <a:prstGeom prst="rect">
+            <a:avLst/>
+          </a:prstGeom>
+          <a:solidFill>
+            <a:schemeClr val="accent4">
+              <a:lumMod val="20000"/>
+              <a:lumOff val="80000"/>
+            </a:schemeClr>
+          </a:solidFill>
+        </p:spPr>
+        <p:txBody>
+          <a:bodyPr wrap="square" rtlCol="0">
+            <a:spAutoFit/>
+          </a:bodyPr>
+          <a:lstStyle/>
+          <a:p>
+            <a:r>
+              <a:rPr lang="en-US" dirty="0"/>
+              <a:t>There are many pseudo-</a:t>
+            </a:r>
+            <a:r>
+              <a:rPr lang="en-US" b="1" dirty="0">
+                <a:solidFill>
+                  <a:srgbClr val="0070C0"/>
+                </a:solidFill>
+              </a:rPr>
+              <a:t>R</a:t>
+            </a:r>
+            <a:r>
+              <a:rPr lang="en-US" b="1" baseline="30000" dirty="0">
+                <a:solidFill>
+                  <a:srgbClr val="0070C0"/>
+                </a:solidFill>
+              </a:rPr>
+              <a:t>2</a:t>
+            </a:r>
+            <a:r>
+              <a:rPr lang="en-US" dirty="0"/>
+              <a:t> for Logistic Regression: </a:t>
+            </a:r>
+            <a:r>
+              <a:rPr lang="en-US" sz="1100" dirty="0">
+                <a:hlinkClick r:id="rId4"/>
+              </a:rPr>
+              <a:t>https://www.researchgate.net/publication/268055438_The_Assessment_of_Fit_in_the_Class_of_Logistic_Regression_Models_A_Pathway_out_of_the_Jungle_of_Pseudo-Rs_with_an_Extension_to_Multinomial_Logit_Models</a:t>
+            </a:r>
+            <a:r>
+              <a:rPr lang="en-US" sz="1100" dirty="0"/>
+              <a:t> </a:t>
+            </a:r>
+          </a:p>
+          <a:p>
+            <a:endParaRPr lang="en-US" dirty="0"/>
+          </a:p>
+          <a:p>
+            <a:r>
+              <a:rPr lang="en-US" dirty="0"/>
+              <a:t>The most commonly used is McFadden's Pseudo-</a:t>
+            </a:r>
+            <a:r>
+              <a:rPr lang="en-US" b="1" dirty="0">
+                <a:solidFill>
+                  <a:srgbClr val="0070C0"/>
+                </a:solidFill>
+              </a:rPr>
+              <a:t>R</a:t>
+            </a:r>
+            <a:r>
+              <a:rPr lang="en-US" b="1" baseline="30000" dirty="0">
+                <a:solidFill>
+                  <a:srgbClr val="0070C0"/>
+                </a:solidFill>
+              </a:rPr>
+              <a:t>2</a:t>
+            </a:r>
+            <a:r>
+              <a:rPr lang="en-US" dirty="0"/>
+              <a:t>. The value is in [0,1], tends to be biased downwards, so values 0.2-0.4 are considered good.</a:t>
+            </a:r>
+          </a:p>
+        </p:txBody>
+      </p:sp>
+      <p:pic>
+        <p:nvPicPr>
+          <p:cNvPr id="10" name="Picture 9">
+            <a:extLst>
+              <a:ext uri="{FF2B5EF4-FFF2-40B4-BE49-F238E27FC236}">
+                <a16:creationId xmlns:a16="http://schemas.microsoft.com/office/drawing/2014/main" id="{50A200B1-AEF9-3645-B83F-130B037CD7AD}"/>
+              </a:ext>
+            </a:extLst>
+          </p:cNvPr>
+          <p:cNvPicPr>
+            <a:picLocks noChangeAspect="1"/>
+          </p:cNvPicPr>
+          <p:nvPr/>
+        </p:nvPicPr>
+        <p:blipFill rotWithShape="1">
+          <a:blip r:embed="rId5" cstate="email">
+            <a:extLst>
+              <a:ext uri="{28A0092B-C50C-407E-A947-70E740481C1C}">
+                <a14:useLocalDpi xmlns:a14="http://schemas.microsoft.com/office/drawing/2010/main"/>
+              </a:ext>
+            </a:extLst>
+          </a:blip>
+          <a:srcRect/>
+          <a:stretch/>
+        </p:blipFill>
+        <p:spPr>
+          <a:xfrm>
+            <a:off x="6562167" y="6131318"/>
+            <a:ext cx="3734441" cy="712695"/>
+          </a:xfrm>
+          <a:prstGeom prst="rect">
+            <a:avLst/>
+          </a:prstGeom>
+        </p:spPr>
+      </p:pic>
+      <p:sp>
+        <p:nvSpPr>
+          <p:cNvPr id="2" name="Right Arrow 1">
+            <a:extLst>
+              <a:ext uri="{FF2B5EF4-FFF2-40B4-BE49-F238E27FC236}">
+                <a16:creationId xmlns:a16="http://schemas.microsoft.com/office/drawing/2014/main" id="{FA95588F-43B8-EEE1-53CA-30A8BCE9E84C}"/>
+              </a:ext>
+            </a:extLst>
+          </p:cNvPr>
+          <p:cNvSpPr/>
+          <p:nvPr/>
+        </p:nvSpPr>
+        <p:spPr>
+          <a:xfrm rot="10183355">
+            <a:off x="5337528" y="2474736"/>
+            <a:ext cx="538731" cy="143691"/>
+          </a:xfrm>
+          <a:prstGeom prst="rightArrow">
+            <a:avLst/>
+          </a:prstGeom>
+        </p:spPr>
+        <p:style>
+          <a:lnRef idx="2">
+            <a:schemeClr val="accent1">
+              <a:shade val="50000"/>
+            </a:schemeClr>
+          </a:lnRef>
+          <a:fillRef idx="1">
+            <a:schemeClr val="accent1"/>
+          </a:fillRef>
+          <a:effectRef idx="0">
+            <a:schemeClr val="accent1"/>
+          </a:effectRef>
+          <a:fontRef idx="minor">
+            <a:schemeClr val="lt1"/>
+          </a:fontRef>
+        </p:style>
+        <p:txBody>
+          <a:bodyPr rtlCol="0" anchor="ctr"/>
+          <a:lstStyle/>
+          <a:p>
+            <a:pPr algn="ctr"/>
+            <a:endParaRPr lang="en-US"/>
+          </a:p>
+        </p:txBody>
+      </p:sp>
+      <p:sp>
+        <p:nvSpPr>
+          <p:cNvPr id="11" name="TextBox 10">
+            <a:extLst>
+              <a:ext uri="{FF2B5EF4-FFF2-40B4-BE49-F238E27FC236}">
+                <a16:creationId xmlns:a16="http://schemas.microsoft.com/office/drawing/2014/main" id="{5752E51F-98C2-D031-DF28-59940B75D2DB}"/>
+              </a:ext>
+            </a:extLst>
+          </p:cNvPr>
+          <p:cNvSpPr txBox="1"/>
+          <p:nvPr/>
+        </p:nvSpPr>
+        <p:spPr>
+          <a:xfrm>
+            <a:off x="23425" y="3725749"/>
+            <a:ext cx="5249918" cy="3046988"/>
+          </a:xfrm>
+          <a:prstGeom prst="rect">
+            <a:avLst/>
+          </a:prstGeom>
+          <a:solidFill>
+            <a:schemeClr val="accent6">
+              <a:lumMod val="20000"/>
+              <a:lumOff val="80000"/>
+            </a:schemeClr>
+          </a:solidFill>
+        </p:spPr>
+        <p:txBody>
+          <a:bodyPr wrap="square" rtlCol="0">
+            <a:spAutoFit/>
+          </a:bodyPr>
+          <a:lstStyle/>
+          <a:p>
+            <a:r>
+              <a:rPr lang="en-US" dirty="0"/>
+              <a:t>So – what do we do?</a:t>
+            </a:r>
+          </a:p>
+          <a:p>
+            <a:r>
+              <a:rPr lang="en-US" dirty="0"/>
+              <a:t>We use </a:t>
+            </a:r>
+            <a:r>
+              <a:rPr lang="en-US" b="1" dirty="0">
+                <a:solidFill>
+                  <a:srgbClr val="FF0000"/>
+                </a:solidFill>
+              </a:rPr>
+              <a:t>MLE</a:t>
+            </a:r>
+            <a:r>
+              <a:rPr lang="en-US" dirty="0"/>
+              <a:t> approach. </a:t>
+            </a:r>
+          </a:p>
+          <a:p>
+            <a:endParaRPr lang="en-US" dirty="0"/>
+          </a:p>
+          <a:p>
+            <a:r>
+              <a:rPr lang="en-US" dirty="0"/>
+              <a:t>For each data point "x" instead of using values 0 or 1, we use probabilities "p" using sigmoid function 1/1+exp(-b0-b1x).</a:t>
+            </a:r>
+          </a:p>
+          <a:p>
+            <a:r>
+              <a:rPr lang="en-US" dirty="0"/>
+              <a:t>More precisely, we use:</a:t>
+            </a:r>
+          </a:p>
+          <a:p>
+            <a:r>
+              <a:rPr lang="en-US" sz="1200" b="1" dirty="0">
+                <a:solidFill>
+                  <a:srgbClr val="0070C0"/>
+                </a:solidFill>
+                <a:latin typeface="Consolas" panose="020B0609020204030204" pitchFamily="49" charset="0"/>
+                <a:cs typeface="Consolas" panose="020B0609020204030204" pitchFamily="49" charset="0"/>
+              </a:rPr>
+              <a:t>    p for x where value should be 1</a:t>
+            </a:r>
+          </a:p>
+          <a:p>
+            <a:r>
+              <a:rPr lang="en-US" sz="1200" b="1" dirty="0">
+                <a:solidFill>
+                  <a:srgbClr val="0070C0"/>
+                </a:solidFill>
+                <a:latin typeface="Consolas" panose="020B0609020204030204" pitchFamily="49" charset="0"/>
+                <a:cs typeface="Consolas" panose="020B0609020204030204" pitchFamily="49" charset="0"/>
+              </a:rPr>
+              <a:t>   (1-p) for x where value should be 0</a:t>
+            </a:r>
+          </a:p>
+          <a:p>
+            <a:r>
+              <a:rPr lang="en-US" dirty="0"/>
+              <a:t>Then we multiply all these probabilities to get "</a:t>
+            </a:r>
+            <a:r>
+              <a:rPr lang="en-US" b="1" dirty="0">
+                <a:solidFill>
+                  <a:srgbClr val="0070C0"/>
+                </a:solidFill>
+              </a:rPr>
+              <a:t>Likelihood</a:t>
+            </a:r>
+            <a:r>
+              <a:rPr lang="en-US" dirty="0"/>
+              <a:t>".</a:t>
+            </a:r>
+          </a:p>
+          <a:p>
+            <a:r>
+              <a:rPr lang="en-US" dirty="0"/>
+              <a:t>Then we solve the problem of maximizing this </a:t>
+            </a:r>
+            <a:r>
+              <a:rPr lang="en-US" b="1" dirty="0">
+                <a:solidFill>
+                  <a:srgbClr val="0070C0"/>
+                </a:solidFill>
+              </a:rPr>
+              <a:t>Likelihood</a:t>
+            </a:r>
+            <a:r>
+              <a:rPr lang="en-US" dirty="0"/>
+              <a:t>.</a:t>
+            </a:r>
+          </a:p>
+          <a:p>
+            <a:endParaRPr lang="en-US" dirty="0"/>
+          </a:p>
+          <a:p>
+            <a:r>
+              <a:rPr lang="en-US" dirty="0"/>
+              <a:t>It is convenient to use log(</a:t>
+            </a:r>
+            <a:r>
+              <a:rPr lang="en-US" b="1" dirty="0">
+                <a:solidFill>
+                  <a:srgbClr val="0070C0"/>
+                </a:solidFill>
+              </a:rPr>
+              <a:t>Likelihood</a:t>
+            </a:r>
+            <a:r>
+              <a:rPr lang="en-US" dirty="0"/>
+              <a:t>) – called </a:t>
+            </a:r>
+            <a:r>
+              <a:rPr lang="en-US" b="1" dirty="0">
+                <a:solidFill>
+                  <a:srgbClr val="0070C0"/>
+                </a:solidFill>
+              </a:rPr>
+              <a:t>log-likelihood</a:t>
+            </a:r>
+            <a:r>
+              <a:rPr lang="en-US" dirty="0"/>
+              <a:t>.</a:t>
+            </a:r>
+          </a:p>
+          <a:p>
+            <a:r>
+              <a:rPr lang="en-US" dirty="0"/>
+              <a:t>Then instead of multiplication, we calculate sum of individual probabilities.</a:t>
+            </a:r>
+          </a:p>
+        </p:txBody>
+      </p:sp>
+    </p:spTree>
+    <p:extLst>
+      <p:ext uri="{BB962C8B-B14F-4D97-AF65-F5344CB8AC3E}">
+        <p14:creationId xmlns:p14="http://schemas.microsoft.com/office/powerpoint/2010/main" val="653846543"/>
+      </p:ext>
+    </p:extLst>
+  </p:cSld>
+  <p:clrMapOvr>
+    <a:masterClrMapping/>
+  </p:clrMapOvr>
+</p:sld>
+</file>
+
+<file path=ppt/slides/slide5.xml><?xml version="1.0" encoding="utf-8"?>
+<p:sld xmlns:a="http://schemas.openxmlformats.org/drawingml/2006/main" xmlns:r="http://schemas.openxmlformats.org/officeDocument/2006/relationships" xmlns:p="http://schemas.openxmlformats.org/presentationml/2006/main">
+  <p:cSld>
+    <p:spTree>
+      <p:nvGrpSpPr>
+        <p:cNvPr id="1" name=""/>
+        <p:cNvGrpSpPr/>
+        <p:nvPr/>
+      </p:nvGrpSpPr>
+      <p:grpSpPr>
+        <a:xfrm>
+          <a:off x="0" y="0"/>
+          <a:ext cx="0" cy="0"/>
+          <a:chOff x="0" y="0"/>
+          <a:chExt cx="0" cy="0"/>
+        </a:xfrm>
+      </p:grpSpPr>
+      <p:sp>
+        <p:nvSpPr>
+          <p:cNvPr id="4" name="TextBox 3">
+            <a:extLst>
+              <a:ext uri="{FF2B5EF4-FFF2-40B4-BE49-F238E27FC236}">
+                <a16:creationId xmlns:a16="http://schemas.microsoft.com/office/drawing/2014/main" id="{EDF3ACD7-CB38-5D4F-95E0-A498EBEAE2F4}"/>
+              </a:ext>
+            </a:extLst>
+          </p:cNvPr>
+          <p:cNvSpPr txBox="1"/>
+          <p:nvPr/>
+        </p:nvSpPr>
+        <p:spPr>
+          <a:xfrm>
+            <a:off x="6096000" y="1360397"/>
+            <a:ext cx="5788373" cy="3323987"/>
+          </a:xfrm>
+          <a:prstGeom prst="rect">
+            <a:avLst/>
+          </a:prstGeom>
+          <a:solidFill>
+            <a:schemeClr val="accent4">
+              <a:lumMod val="20000"/>
+              <a:lumOff val="80000"/>
+            </a:schemeClr>
+          </a:solidFill>
+        </p:spPr>
+        <p:txBody>
+          <a:bodyPr wrap="square" rtlCol="0">
+            <a:spAutoFit/>
+          </a:bodyPr>
+          <a:lstStyle/>
+          <a:p>
+            <a:r>
+              <a:rPr lang="en-US" dirty="0"/>
+              <a:t>However, some other assumptions still apply.</a:t>
+            </a:r>
+          </a:p>
+          <a:p>
+            <a:endParaRPr lang="en-US" dirty="0"/>
+          </a:p>
+          <a:p>
+            <a:pPr marL="285750" indent="-285750">
+              <a:buFont typeface="Arial" panose="020B0604020202020204" pitchFamily="34" charset="0"/>
+              <a:buChar char="•"/>
+            </a:pPr>
+            <a:r>
+              <a:rPr lang="en-US" dirty="0"/>
+              <a:t>Binary or ordinal dependent variable(s).  </a:t>
+            </a:r>
+          </a:p>
+          <a:p>
+            <a:pPr marL="285750" indent="-285750">
+              <a:buFont typeface="Arial" panose="020B0604020202020204" pitchFamily="34" charset="0"/>
+              <a:buChar char="•"/>
+            </a:pPr>
+            <a:r>
+              <a:rPr lang="en-US" dirty="0"/>
+              <a:t>Observations should be independent (should not come from repeated measurements or matched data).</a:t>
+            </a:r>
+          </a:p>
+          <a:p>
+            <a:pPr marL="285750" indent="-285750">
+              <a:buFont typeface="Arial" panose="020B0604020202020204" pitchFamily="34" charset="0"/>
+              <a:buChar char="•"/>
+            </a:pPr>
+            <a:r>
+              <a:rPr lang="en-US" dirty="0"/>
+              <a:t>Little or no correlation between independent variables (no multicollinearity, same requirement as for linear regression).</a:t>
+            </a:r>
+          </a:p>
+          <a:p>
+            <a:pPr marL="285750" indent="-285750">
+              <a:buFont typeface="Arial" panose="020B0604020202020204" pitchFamily="34" charset="0"/>
+              <a:buChar char="•"/>
+            </a:pPr>
+            <a:r>
+              <a:rPr lang="en-US" dirty="0"/>
+              <a:t>Fourth, logistic regression assumes that log odds can be fit with a linear model</a:t>
+            </a:r>
+          </a:p>
+          <a:p>
+            <a:pPr marL="285750" indent="-285750">
+              <a:buFont typeface="Arial" panose="020B0604020202020204" pitchFamily="34" charset="0"/>
+              <a:buChar char="•"/>
+            </a:pPr>
+            <a:r>
+              <a:rPr lang="en-US" dirty="0"/>
+              <a:t>Finally, logistic regression typically requires a large sample size.  A general guideline is that you need at minimum of 10 cases with the least frequent outcome for each independent variable in your model. For example, if you have 5 independent variables and the expected probability of your least frequent outcome is 0.1, then you would need a minimum sample size of 500 (10*5 / .10).</a:t>
+            </a:r>
+          </a:p>
+        </p:txBody>
+      </p:sp>
+      <p:sp>
+        <p:nvSpPr>
+          <p:cNvPr id="5" name="TextBox 4">
+            <a:extLst>
+              <a:ext uri="{FF2B5EF4-FFF2-40B4-BE49-F238E27FC236}">
+                <a16:creationId xmlns:a16="http://schemas.microsoft.com/office/drawing/2014/main" id="{9400B4B1-8AC1-644F-B7BA-C335FEA45168}"/>
+              </a:ext>
+            </a:extLst>
+          </p:cNvPr>
+          <p:cNvSpPr txBox="1"/>
+          <p:nvPr/>
+        </p:nvSpPr>
+        <p:spPr>
+          <a:xfrm>
+            <a:off x="0" y="0"/>
+            <a:ext cx="7262446" cy="584775"/>
+          </a:xfrm>
+          <a:prstGeom prst="rect">
+            <a:avLst/>
+          </a:prstGeom>
+          <a:noFill/>
+        </p:spPr>
+        <p:txBody>
+          <a:bodyPr wrap="square" rtlCol="0">
+            <a:spAutoFit/>
+          </a:bodyPr>
+          <a:lstStyle/>
+          <a:p>
+            <a:r>
+              <a:rPr lang="en-US" sz="3200" b="1" dirty="0"/>
+              <a:t>Logistic Regression – Assumptions</a:t>
+            </a:r>
+          </a:p>
+        </p:txBody>
+      </p:sp>
+      <p:sp>
+        <p:nvSpPr>
+          <p:cNvPr id="6" name="TextBox 5">
+            <a:extLst>
+              <a:ext uri="{FF2B5EF4-FFF2-40B4-BE49-F238E27FC236}">
+                <a16:creationId xmlns:a16="http://schemas.microsoft.com/office/drawing/2014/main" id="{AFA2D2BD-5099-CB73-D1D2-1DDE09E87E9A}"/>
+              </a:ext>
+            </a:extLst>
+          </p:cNvPr>
+          <p:cNvSpPr txBox="1"/>
+          <p:nvPr/>
+        </p:nvSpPr>
+        <p:spPr>
+          <a:xfrm>
+            <a:off x="307627" y="1360397"/>
+            <a:ext cx="4990850" cy="2677656"/>
+          </a:xfrm>
+          <a:prstGeom prst="rect">
+            <a:avLst/>
+          </a:prstGeom>
+          <a:solidFill>
+            <a:schemeClr val="accent4">
+              <a:lumMod val="20000"/>
+              <a:lumOff val="80000"/>
+            </a:schemeClr>
+          </a:solidFill>
+        </p:spPr>
+        <p:txBody>
+          <a:bodyPr wrap="square" rtlCol="0">
+            <a:spAutoFit/>
+          </a:bodyPr>
+          <a:lstStyle/>
+          <a:p>
+            <a:r>
+              <a:rPr lang="en-US" dirty="0"/>
+              <a:t>Logistic regression does NOT make many of the key assumptions of linear regression and general linear models </a:t>
+            </a:r>
+          </a:p>
+          <a:p>
+            <a:r>
+              <a:rPr lang="en-US" dirty="0"/>
+              <a:t>that are based on ordinary least squares algorithms.</a:t>
+            </a:r>
+          </a:p>
+          <a:p>
+            <a:endParaRPr lang="en-US" dirty="0"/>
+          </a:p>
+          <a:p>
+            <a:pPr marL="285750" indent="-285750">
+              <a:buFont typeface="Arial" panose="020B0604020202020204" pitchFamily="34" charset="0"/>
+              <a:buChar char="•"/>
+            </a:pPr>
+            <a:r>
+              <a:rPr lang="en-US" dirty="0"/>
+              <a:t>First, logistic regression does not require a linear relationship between the dependent and independent variables.  </a:t>
+            </a:r>
+          </a:p>
+          <a:p>
+            <a:pPr marL="285750" indent="-285750">
+              <a:buFont typeface="Arial" panose="020B0604020202020204" pitchFamily="34" charset="0"/>
+              <a:buChar char="•"/>
+            </a:pPr>
+            <a:r>
+              <a:rPr lang="en-US" dirty="0"/>
+              <a:t>Second, the error terms (residuals) do not need to be normally distributed.  </a:t>
+            </a:r>
+          </a:p>
+          <a:p>
+            <a:pPr marL="285750" indent="-285750">
+              <a:buFont typeface="Arial" panose="020B0604020202020204" pitchFamily="34" charset="0"/>
+              <a:buChar char="•"/>
+            </a:pPr>
+            <a:r>
+              <a:rPr lang="en-US" dirty="0"/>
+              <a:t>Third, homoscedasticity is not required.</a:t>
+            </a:r>
+          </a:p>
+          <a:p>
+            <a:pPr marL="285750" indent="-285750">
+              <a:buFont typeface="Arial" panose="020B0604020202020204" pitchFamily="34" charset="0"/>
+              <a:buChar char="•"/>
+            </a:pPr>
+            <a:r>
+              <a:rPr lang="en-US" dirty="0"/>
+              <a:t>Finally, the dependent variable in logistic regression is not measured on an interval or ratio scale.</a:t>
+            </a:r>
+          </a:p>
+        </p:txBody>
+      </p:sp>
+    </p:spTree>
+    <p:extLst>
+      <p:ext uri="{BB962C8B-B14F-4D97-AF65-F5344CB8AC3E}">
+        <p14:creationId xmlns:p14="http://schemas.microsoft.com/office/powerpoint/2010/main" val="4070953486"/>
+      </p:ext>
+    </p:extLst>
+  </p:cSld>
+  <p:clrMapOvr>
+    <a:masterClrMapping/>
+  </p:clrMapOvr>
+</p:sld>
+</file>
+
+<file path=ppt/slides/slide6.xml><?xml version="1.0" encoding="utf-8"?>
+<p:sld xmlns:a="http://schemas.openxmlformats.org/drawingml/2006/main" xmlns:r="http://schemas.openxmlformats.org/officeDocument/2006/relationships" xmlns:p="http://schemas.openxmlformats.org/presentationml/2006/main">
+  <p:cSld>
+    <p:spTree>
+      <p:nvGrpSpPr>
+        <p:cNvPr id="1" name=""/>
+        <p:cNvGrpSpPr/>
+        <p:nvPr/>
+      </p:nvGrpSpPr>
+      <p:grpSpPr>
+        <a:xfrm>
+          <a:off x="0" y="0"/>
+          <a:ext cx="0" cy="0"/>
+          <a:chOff x="0" y="0"/>
+          <a:chExt cx="0" cy="0"/>
+        </a:xfrm>
+      </p:grpSpPr>
+      <p:sp>
+        <p:nvSpPr>
+          <p:cNvPr id="4" name="TextBox 3">
+            <a:extLst>
+              <a:ext uri="{FF2B5EF4-FFF2-40B4-BE49-F238E27FC236}">
                 <a16:creationId xmlns:a16="http://schemas.microsoft.com/office/drawing/2014/main" id="{E66CEABD-2CE4-CE42-AF82-FD229732E10B}"/>
               </a:ext>
             </a:extLst>
@@ -13497,13 +17029,18 @@
         </p:nvSpPr>
         <p:spPr>
           <a:xfrm>
-            <a:off x="254000" y="927100"/>
+            <a:off x="254000" y="891659"/>
             <a:ext cx="5537200" cy="954107"/>
           </a:xfrm>
           <a:prstGeom prst="rect">
             <a:avLst/>
           </a:prstGeom>
-          <a:noFill/>
+          <a:solidFill>
+            <a:schemeClr val="accent4">
+              <a:lumMod val="20000"/>
+              <a:lumOff val="80000"/>
+            </a:schemeClr>
+          </a:solidFill>
         </p:spPr>
         <p:txBody>
           <a:bodyPr wrap="square" rtlCol="0">
@@ -13616,7 +17153,11 @@
           <a:p>
             <a:pPr algn="ctr"/>
             <a:r>
-              <a:rPr lang="en-US" dirty="0"/>
+              <a:rPr lang="en-US" b="1" dirty="0">
+                <a:solidFill>
+                  <a:srgbClr val="FF0000"/>
+                </a:solidFill>
+              </a:rPr>
               <a:t>Pierre François Verhulst</a:t>
             </a:r>
           </a:p>
@@ -13643,8 +17184,8 @@
         </p:nvSpPr>
         <p:spPr>
           <a:xfrm>
-            <a:off x="254000" y="203200"/>
-            <a:ext cx="3949700" cy="584775"/>
+            <a:off x="-1" y="0"/>
+            <a:ext cx="5791201" cy="584775"/>
           </a:xfrm>
           <a:prstGeom prst="rect">
             <a:avLst/>
@@ -13659,7 +17200,7 @@
           <a:p>
             <a:r>
               <a:rPr lang="en-US" sz="3200" b="1" dirty="0"/>
-              <a:t>Logistic Function</a:t>
+              <a:t>Logistic Function - History</a:t>
             </a:r>
           </a:p>
         </p:txBody>
@@ -13729,14 +17270,26 @@
           <a:p>
             <a:pPr algn="ctr"/>
             <a:r>
-              <a:rPr lang="en-US" dirty="0"/>
+              <a:rPr lang="en-US" b="1" dirty="0">
+                <a:solidFill>
+                  <a:srgbClr val="FF0000"/>
+                </a:solidFill>
+              </a:rPr>
               <a:t>Lambert Adolphe Jacques </a:t>
             </a:r>
             <a:r>
-              <a:rPr lang="en-US" dirty="0" err="1"/>
+              <a:rPr lang="en-US" b="1" dirty="0" err="1">
+                <a:solidFill>
+                  <a:srgbClr val="FF0000"/>
+                </a:solidFill>
+              </a:rPr>
               <a:t>Quetelet</a:t>
             </a:r>
-            <a:endParaRPr lang="en-US" dirty="0"/>
+            <a:endParaRPr lang="en-US" b="1" dirty="0">
+              <a:solidFill>
+                <a:srgbClr val="FF0000"/>
+              </a:solidFill>
+            </a:endParaRPr>
           </a:p>
           <a:p>
             <a:pPr algn="ctr"/>
@@ -13912,795 +17465,7 @@
 </p:sld>
 </file>
 
-<file path=ppt/slides/slide3.xml><?xml version="1.0" encoding="utf-8"?>
-<p:sld xmlns:a="http://schemas.openxmlformats.org/drawingml/2006/main" xmlns:r="http://schemas.openxmlformats.org/officeDocument/2006/relationships" xmlns:p="http://schemas.openxmlformats.org/presentationml/2006/main">
-  <p:cSld>
-    <p:spTree>
-      <p:nvGrpSpPr>
-        <p:cNvPr id="1" name=""/>
-        <p:cNvGrpSpPr/>
-        <p:nvPr/>
-      </p:nvGrpSpPr>
-      <p:grpSpPr>
-        <a:xfrm>
-          <a:off x="0" y="0"/>
-          <a:ext cx="0" cy="0"/>
-          <a:chOff x="0" y="0"/>
-          <a:chExt cx="0" cy="0"/>
-        </a:xfrm>
-      </p:grpSpPr>
-      <p:sp>
-        <p:nvSpPr>
-          <p:cNvPr id="4" name="TextBox 3">
-            <a:extLst>
-              <a:ext uri="{FF2B5EF4-FFF2-40B4-BE49-F238E27FC236}">
-                <a16:creationId xmlns:a16="http://schemas.microsoft.com/office/drawing/2014/main" id="{EDF3ACD7-CB38-5D4F-95E0-A498EBEAE2F4}"/>
-              </a:ext>
-            </a:extLst>
-          </p:cNvPr>
-          <p:cNvSpPr txBox="1"/>
-          <p:nvPr/>
-        </p:nvSpPr>
-        <p:spPr>
-          <a:xfrm>
-            <a:off x="0" y="808893"/>
-            <a:ext cx="12063046" cy="5693866"/>
-          </a:xfrm>
-          <a:prstGeom prst="rect">
-            <a:avLst/>
-          </a:prstGeom>
-          <a:noFill/>
-        </p:spPr>
-        <p:txBody>
-          <a:bodyPr wrap="square" rtlCol="0">
-            <a:spAutoFit/>
-          </a:bodyPr>
-          <a:lstStyle/>
-          <a:p>
-            <a:r>
-              <a:rPr lang="en-US" dirty="0"/>
-              <a:t>Logistic regression does NOT make many of the key assumptions </a:t>
-            </a:r>
-          </a:p>
-          <a:p>
-            <a:r>
-              <a:rPr lang="en-US" dirty="0"/>
-              <a:t>of linear regression and general linear models </a:t>
-            </a:r>
-          </a:p>
-          <a:p>
-            <a:r>
-              <a:rPr lang="en-US" dirty="0"/>
-              <a:t>that are based on ordinary least squares algorithms.</a:t>
-            </a:r>
-          </a:p>
-          <a:p>
-            <a:endParaRPr lang="en-US" dirty="0"/>
-          </a:p>
-          <a:p>
-            <a:pPr marL="285750" indent="-285750">
-              <a:buFont typeface="Arial" panose="020B0604020202020204" pitchFamily="34" charset="0"/>
-              <a:buChar char="•"/>
-            </a:pPr>
-            <a:r>
-              <a:rPr lang="en-US" dirty="0"/>
-              <a:t>First, logistic regression does not require a linear relationship between the dependent and independent variables.  </a:t>
-            </a:r>
-          </a:p>
-          <a:p>
-            <a:pPr marL="285750" indent="-285750">
-              <a:buFont typeface="Arial" panose="020B0604020202020204" pitchFamily="34" charset="0"/>
-              <a:buChar char="•"/>
-            </a:pPr>
-            <a:r>
-              <a:rPr lang="en-US" dirty="0"/>
-              <a:t>Second, the error terms (residuals) do not need to be normally distributed.  </a:t>
-            </a:r>
-          </a:p>
-          <a:p>
-            <a:pPr marL="285750" indent="-285750">
-              <a:buFont typeface="Arial" panose="020B0604020202020204" pitchFamily="34" charset="0"/>
-              <a:buChar char="•"/>
-            </a:pPr>
-            <a:r>
-              <a:rPr lang="en-US" dirty="0"/>
-              <a:t>Third, homoscedasticity is not required.  </a:t>
-            </a:r>
-          </a:p>
-          <a:p>
-            <a:pPr marL="285750" indent="-285750">
-              <a:buFont typeface="Arial" panose="020B0604020202020204" pitchFamily="34" charset="0"/>
-              <a:buChar char="•"/>
-            </a:pPr>
-            <a:r>
-              <a:rPr lang="en-US" dirty="0"/>
-              <a:t>Finally, the dependent variable in logistic regression is not measured on an interval or ratio scale.</a:t>
-            </a:r>
-          </a:p>
-          <a:p>
-            <a:endParaRPr lang="en-US" dirty="0"/>
-          </a:p>
-          <a:p>
-            <a:r>
-              <a:rPr lang="en-US" dirty="0"/>
-              <a:t>However, some other assumptions still apply.</a:t>
-            </a:r>
-          </a:p>
-          <a:p>
-            <a:endParaRPr lang="en-US" dirty="0"/>
-          </a:p>
-          <a:p>
-            <a:pPr marL="285750" indent="-285750">
-              <a:buFont typeface="Arial" panose="020B0604020202020204" pitchFamily="34" charset="0"/>
-              <a:buChar char="•"/>
-            </a:pPr>
-            <a:r>
-              <a:rPr lang="en-US" dirty="0"/>
-              <a:t>First, binary logistic regression requires the dependent variable to be binary</a:t>
-            </a:r>
-            <a:br>
-              <a:rPr lang="en-US" dirty="0"/>
-            </a:br>
-            <a:r>
-              <a:rPr lang="en-US" dirty="0"/>
-              <a:t>and ordinal logistic regression requires the dependent variable to be ordinal.</a:t>
-            </a:r>
-          </a:p>
-          <a:p>
-            <a:pPr marL="285750" indent="-285750">
-              <a:buFont typeface="Arial" panose="020B0604020202020204" pitchFamily="34" charset="0"/>
-              <a:buChar char="•"/>
-            </a:pPr>
-            <a:endParaRPr lang="en-US" dirty="0"/>
-          </a:p>
-          <a:p>
-            <a:pPr marL="285750" indent="-285750">
-              <a:buFont typeface="Arial" panose="020B0604020202020204" pitchFamily="34" charset="0"/>
-              <a:buChar char="•"/>
-            </a:pPr>
-            <a:r>
-              <a:rPr lang="en-US" dirty="0"/>
-              <a:t>Second, logistic regression requires the observations to be independent of each other.</a:t>
-            </a:r>
-            <a:br>
-              <a:rPr lang="en-US" dirty="0"/>
-            </a:br>
-            <a:r>
-              <a:rPr lang="en-US" dirty="0"/>
-              <a:t>In other words, the observations should not come from repeated measurements or matched data.</a:t>
-            </a:r>
-          </a:p>
-          <a:p>
-            <a:pPr marL="285750" indent="-285750">
-              <a:buFont typeface="Arial" panose="020B0604020202020204" pitchFamily="34" charset="0"/>
-              <a:buChar char="•"/>
-            </a:pPr>
-            <a:endParaRPr lang="en-US" dirty="0"/>
-          </a:p>
-          <a:p>
-            <a:pPr marL="285750" indent="-285750">
-              <a:buFont typeface="Arial" panose="020B0604020202020204" pitchFamily="34" charset="0"/>
-              <a:buChar char="•"/>
-            </a:pPr>
-            <a:r>
-              <a:rPr lang="en-US" dirty="0"/>
-              <a:t>Third, logistic regression requires there to be little or no </a:t>
-            </a:r>
-            <a:r>
-              <a:rPr lang="en-US" b="1" dirty="0">
-                <a:solidFill>
-                  <a:srgbClr val="0070C0"/>
-                </a:solidFill>
-              </a:rPr>
-              <a:t>multicollinearity</a:t>
-            </a:r>
-            <a:r>
-              <a:rPr lang="en-US" dirty="0"/>
-              <a:t> among the independent variables.  This means that the independent variables </a:t>
-            </a:r>
-            <a:r>
-              <a:rPr lang="en-US" b="1" dirty="0">
-                <a:solidFill>
-                  <a:srgbClr val="0070C0"/>
-                </a:solidFill>
-              </a:rPr>
-              <a:t>should not be too highly correlated with each other</a:t>
-            </a:r>
-            <a:r>
-              <a:rPr lang="en-US" dirty="0"/>
-              <a:t>. If we have two highly variables x1 and x2, then the model may have very high variance with their coefficients (for example b1 &amp; -b2, 10b1, -10b2, 1000b1, -1000b2, etc.).</a:t>
-            </a:r>
-          </a:p>
-          <a:p>
-            <a:pPr marL="285750" indent="-285750">
-              <a:buFont typeface="Arial" panose="020B0604020202020204" pitchFamily="34" charset="0"/>
-              <a:buChar char="•"/>
-            </a:pPr>
-            <a:endParaRPr lang="en-US" dirty="0"/>
-          </a:p>
-          <a:p>
-            <a:pPr marL="285750" indent="-285750">
-              <a:buFont typeface="Arial" panose="020B0604020202020204" pitchFamily="34" charset="0"/>
-              <a:buChar char="•"/>
-            </a:pPr>
-            <a:r>
-              <a:rPr lang="en-US" dirty="0"/>
-              <a:t>Fourth, logistic regression assumes linearity of independent variables and log odds.</a:t>
-            </a:r>
-          </a:p>
-          <a:p>
-            <a:endParaRPr lang="en-US" dirty="0"/>
-          </a:p>
-          <a:p>
-            <a:pPr marL="285750" indent="-285750">
-              <a:buFont typeface="Arial" panose="020B0604020202020204" pitchFamily="34" charset="0"/>
-              <a:buChar char="•"/>
-            </a:pPr>
-            <a:r>
-              <a:rPr lang="en-US" dirty="0"/>
-              <a:t>Finally, logistic regression typically requires a large sample size.  A general guideline is that you need at minimum of 10 cases with the least frequent outcome for each independent variable in your model. For example, if you have 5 independent variables and the expected probability of your least frequent outcome is .10, then you would need a minimum sample size of 500 (10*5 / .10).</a:t>
-            </a:r>
-          </a:p>
-        </p:txBody>
-      </p:sp>
-      <p:sp>
-        <p:nvSpPr>
-          <p:cNvPr id="5" name="TextBox 4">
-            <a:extLst>
-              <a:ext uri="{FF2B5EF4-FFF2-40B4-BE49-F238E27FC236}">
-                <a16:creationId xmlns:a16="http://schemas.microsoft.com/office/drawing/2014/main" id="{9400B4B1-8AC1-644F-B7BA-C335FEA45168}"/>
-              </a:ext>
-            </a:extLst>
-          </p:cNvPr>
-          <p:cNvSpPr txBox="1"/>
-          <p:nvPr/>
-        </p:nvSpPr>
-        <p:spPr>
-          <a:xfrm>
-            <a:off x="0" y="0"/>
-            <a:ext cx="7262446" cy="584775"/>
-          </a:xfrm>
-          <a:prstGeom prst="rect">
-            <a:avLst/>
-          </a:prstGeom>
-          <a:noFill/>
-        </p:spPr>
-        <p:txBody>
-          <a:bodyPr wrap="square" rtlCol="0">
-            <a:spAutoFit/>
-          </a:bodyPr>
-          <a:lstStyle/>
-          <a:p>
-            <a:r>
-              <a:rPr lang="en-US" sz="3200" b="1" dirty="0"/>
-              <a:t>Logistic Regression – Assumptions</a:t>
-            </a:r>
-          </a:p>
-        </p:txBody>
-      </p:sp>
-    </p:spTree>
-    <p:extLst>
-      <p:ext uri="{BB962C8B-B14F-4D97-AF65-F5344CB8AC3E}">
-        <p14:creationId xmlns:p14="http://schemas.microsoft.com/office/powerpoint/2010/main" val="4070953486"/>
-      </p:ext>
-    </p:extLst>
-  </p:cSld>
-  <p:clrMapOvr>
-    <a:masterClrMapping/>
-  </p:clrMapOvr>
-</p:sld>
-</file>
-
-<file path=ppt/slides/slide4.xml><?xml version="1.0" encoding="utf-8"?>
-<p:sld xmlns:a="http://schemas.openxmlformats.org/drawingml/2006/main" xmlns:r="http://schemas.openxmlformats.org/officeDocument/2006/relationships" xmlns:p="http://schemas.openxmlformats.org/presentationml/2006/main">
-  <p:cSld>
-    <p:spTree>
-      <p:nvGrpSpPr>
-        <p:cNvPr id="1" name=""/>
-        <p:cNvGrpSpPr/>
-        <p:nvPr/>
-      </p:nvGrpSpPr>
-      <p:grpSpPr>
-        <a:xfrm>
-          <a:off x="0" y="0"/>
-          <a:ext cx="0" cy="0"/>
-          <a:chOff x="0" y="0"/>
-          <a:chExt cx="0" cy="0"/>
-        </a:xfrm>
-      </p:grpSpPr>
-      <p:sp>
-        <p:nvSpPr>
-          <p:cNvPr id="4" name="TextBox 3">
-            <a:extLst>
-              <a:ext uri="{FF2B5EF4-FFF2-40B4-BE49-F238E27FC236}">
-                <a16:creationId xmlns:a16="http://schemas.microsoft.com/office/drawing/2014/main" id="{F7D56CB7-225A-7B48-AE96-EDFEF4DDB46E}"/>
-              </a:ext>
-            </a:extLst>
-          </p:cNvPr>
-          <p:cNvSpPr txBox="1"/>
-          <p:nvPr/>
-        </p:nvSpPr>
-        <p:spPr>
-          <a:xfrm>
-            <a:off x="139700" y="88900"/>
-            <a:ext cx="7442200" cy="523220"/>
-          </a:xfrm>
-          <a:prstGeom prst="rect">
-            <a:avLst/>
-          </a:prstGeom>
-          <a:noFill/>
-        </p:spPr>
-        <p:txBody>
-          <a:bodyPr wrap="square" rtlCol="0">
-            <a:spAutoFit/>
-          </a:bodyPr>
-          <a:lstStyle/>
-          <a:p>
-            <a:r>
-              <a:rPr lang="en-US" sz="2800" b="1" dirty="0"/>
-              <a:t>Logistic Regression – finding coefficients</a:t>
-            </a:r>
-          </a:p>
-        </p:txBody>
-      </p:sp>
-      <p:sp>
-        <p:nvSpPr>
-          <p:cNvPr id="5" name="TextBox 4">
-            <a:extLst>
-              <a:ext uri="{FF2B5EF4-FFF2-40B4-BE49-F238E27FC236}">
-                <a16:creationId xmlns:a16="http://schemas.microsoft.com/office/drawing/2014/main" id="{BC8BB3CD-315F-B649-B921-3077838AE8E5}"/>
-              </a:ext>
-            </a:extLst>
-          </p:cNvPr>
-          <p:cNvSpPr txBox="1"/>
-          <p:nvPr/>
-        </p:nvSpPr>
-        <p:spPr>
-          <a:xfrm>
-            <a:off x="50800" y="723900"/>
-            <a:ext cx="6731000" cy="4185761"/>
-          </a:xfrm>
-          <a:prstGeom prst="rect">
-            <a:avLst/>
-          </a:prstGeom>
-          <a:noFill/>
-        </p:spPr>
-        <p:txBody>
-          <a:bodyPr wrap="square" rtlCol="0">
-            <a:spAutoFit/>
-          </a:bodyPr>
-          <a:lstStyle/>
-          <a:p>
-            <a:r>
-              <a:rPr lang="en-US" dirty="0"/>
-              <a:t>There is no analytical solution.</a:t>
-            </a:r>
-          </a:p>
-          <a:p>
-            <a:endParaRPr lang="en-US" dirty="0"/>
-          </a:p>
-          <a:p>
-            <a:r>
-              <a:rPr lang="en-US" dirty="0"/>
-              <a:t>The regression coefficients are usually estimated </a:t>
-            </a:r>
-          </a:p>
-          <a:p>
-            <a:r>
-              <a:rPr lang="en-US" dirty="0"/>
-              <a:t>using </a:t>
-            </a:r>
-            <a:r>
-              <a:rPr lang="en-US" b="1" dirty="0">
-                <a:solidFill>
-                  <a:srgbClr val="0070C0"/>
-                </a:solidFill>
-              </a:rPr>
-              <a:t>Maximum Likelihood Estimation (MLE)</a:t>
-            </a:r>
-            <a:r>
-              <a:rPr lang="en-US" dirty="0"/>
-              <a:t>.</a:t>
-            </a:r>
-          </a:p>
-          <a:p>
-            <a:endParaRPr lang="en-US" dirty="0"/>
-          </a:p>
-          <a:p>
-            <a:r>
-              <a:rPr lang="en-US" dirty="0"/>
-              <a:t>Unlike </a:t>
-            </a:r>
-            <a:r>
-              <a:rPr lang="en-US" b="1" dirty="0">
-                <a:solidFill>
-                  <a:srgbClr val="0070C0"/>
-                </a:solidFill>
-              </a:rPr>
-              <a:t>linear regression </a:t>
-            </a:r>
-            <a:r>
-              <a:rPr lang="en-US" dirty="0"/>
-              <a:t>with normally distributed residuals, </a:t>
-            </a:r>
-          </a:p>
-          <a:p>
-            <a:r>
-              <a:rPr lang="en-US" dirty="0"/>
-              <a:t>it is not possible to find a closed-form expression for the coefficient values </a:t>
-            </a:r>
-          </a:p>
-          <a:p>
-            <a:r>
-              <a:rPr lang="en-US" dirty="0"/>
-              <a:t>that maximize the likelihood function, </a:t>
-            </a:r>
-          </a:p>
-          <a:p>
-            <a:r>
-              <a:rPr lang="en-US" dirty="0"/>
-              <a:t>so that an </a:t>
-            </a:r>
-            <a:r>
-              <a:rPr lang="en-US" b="1" dirty="0">
-                <a:solidFill>
-                  <a:srgbClr val="0070C0"/>
-                </a:solidFill>
-              </a:rPr>
-              <a:t>iterative process must be used </a:t>
-            </a:r>
-            <a:r>
-              <a:rPr lang="en-US" dirty="0"/>
-              <a:t>instead; for example Newton's method. </a:t>
-            </a:r>
-          </a:p>
-          <a:p>
-            <a:endParaRPr lang="en-US" dirty="0"/>
-          </a:p>
-          <a:p>
-            <a:r>
-              <a:rPr lang="en-US" dirty="0"/>
-              <a:t>The model may not converge in some cases:</a:t>
-            </a:r>
-          </a:p>
-          <a:p>
-            <a:pPr marL="285750" indent="-285750">
-              <a:buFont typeface="Arial" panose="020B0604020202020204" pitchFamily="34" charset="0"/>
-              <a:buChar char="•"/>
-            </a:pPr>
-            <a:r>
-              <a:rPr lang="en-US" dirty="0"/>
-              <a:t>not enough data (small number of rows for given number of predictor variables)</a:t>
-            </a:r>
-          </a:p>
-          <a:p>
-            <a:pPr marL="285750" indent="-285750">
-              <a:buFont typeface="Arial" panose="020B0604020202020204" pitchFamily="34" charset="0"/>
-              <a:buChar char="•"/>
-            </a:pPr>
-            <a:r>
-              <a:rPr lang="en-US" dirty="0"/>
-              <a:t>multicollinearity (some variables are strongly correlated with each other)</a:t>
-            </a:r>
-          </a:p>
-          <a:p>
-            <a:pPr marL="285750" indent="-285750">
-              <a:buFont typeface="Arial" panose="020B0604020202020204" pitchFamily="34" charset="0"/>
-              <a:buChar char="•"/>
-            </a:pPr>
-            <a:r>
-              <a:rPr lang="en-US" dirty="0"/>
-              <a:t>sparseness (missing data)</a:t>
-            </a:r>
-          </a:p>
-          <a:p>
-            <a:pPr marL="285750" indent="-285750">
-              <a:buFont typeface="Arial" panose="020B0604020202020204" pitchFamily="34" charset="0"/>
-              <a:buChar char="•"/>
-            </a:pPr>
-            <a:r>
-              <a:rPr lang="en-US" dirty="0"/>
-              <a:t>complete separation (predictors perfectly predict the criterion)</a:t>
-            </a:r>
-          </a:p>
-          <a:p>
-            <a:endParaRPr lang="en-US" dirty="0"/>
-          </a:p>
-          <a:p>
-            <a:r>
-              <a:rPr lang="en-US" dirty="0"/>
-              <a:t>In machine learning applications where logistic regression </a:t>
-            </a:r>
-          </a:p>
-          <a:p>
-            <a:r>
-              <a:rPr lang="en-US" dirty="0"/>
-              <a:t>is used for binary classification,</a:t>
-            </a:r>
-          </a:p>
-          <a:p>
-            <a:r>
-              <a:rPr lang="en-US" dirty="0"/>
-              <a:t>the MLE minimizes the </a:t>
-            </a:r>
-            <a:r>
-              <a:rPr lang="en-US" b="1" dirty="0">
-                <a:solidFill>
-                  <a:srgbClr val="0070C0"/>
-                </a:solidFill>
-              </a:rPr>
-              <a:t>Cross Entropy Loss </a:t>
-            </a:r>
-            <a:r>
-              <a:rPr lang="en-US" dirty="0"/>
-              <a:t>function.</a:t>
-            </a:r>
-          </a:p>
-        </p:txBody>
-      </p:sp>
-      <p:pic>
-        <p:nvPicPr>
-          <p:cNvPr id="7" name="Google Shape;124;p17">
-            <a:extLst>
-              <a:ext uri="{FF2B5EF4-FFF2-40B4-BE49-F238E27FC236}">
-                <a16:creationId xmlns:a16="http://schemas.microsoft.com/office/drawing/2014/main" id="{0B861E9D-FA46-8542-A57B-6815984C7297}"/>
-              </a:ext>
-            </a:extLst>
-          </p:cNvPr>
-          <p:cNvPicPr preferRelativeResize="0"/>
-          <p:nvPr/>
-        </p:nvPicPr>
-        <p:blipFill rotWithShape="1">
-          <a:blip r:embed="rId2">
-            <a:alphaModFix/>
-          </a:blip>
-          <a:srcRect/>
-          <a:stretch/>
-        </p:blipFill>
-        <p:spPr>
-          <a:xfrm>
-            <a:off x="7522124" y="4613354"/>
-            <a:ext cx="4513817" cy="447315"/>
-          </a:xfrm>
-          <a:prstGeom prst="rect">
-            <a:avLst/>
-          </a:prstGeom>
-          <a:noFill/>
-          <a:ln>
-            <a:noFill/>
-          </a:ln>
-        </p:spPr>
-      </p:pic>
-      <p:sp>
-        <p:nvSpPr>
-          <p:cNvPr id="8" name="Google Shape;125;p17">
-            <a:extLst>
-              <a:ext uri="{FF2B5EF4-FFF2-40B4-BE49-F238E27FC236}">
-                <a16:creationId xmlns:a16="http://schemas.microsoft.com/office/drawing/2014/main" id="{5CB19F72-F166-5C40-BCE8-43C093A28A23}"/>
-              </a:ext>
-            </a:extLst>
-          </p:cNvPr>
-          <p:cNvSpPr txBox="1"/>
-          <p:nvPr/>
-        </p:nvSpPr>
-        <p:spPr>
-          <a:xfrm>
-            <a:off x="7509044" y="3644081"/>
-            <a:ext cx="4682956" cy="923330"/>
-          </a:xfrm>
-          <a:prstGeom prst="rect">
-            <a:avLst/>
-          </a:prstGeom>
-          <a:noFill/>
-          <a:ln>
-            <a:noFill/>
-          </a:ln>
-        </p:spPr>
-        <p:txBody>
-          <a:bodyPr spcFirstLastPara="1" wrap="square" lIns="91425" tIns="45700" rIns="91425" bIns="45700" anchor="t" anchorCtr="0">
-            <a:noAutofit/>
-          </a:bodyPr>
-          <a:lstStyle/>
-          <a:p>
-            <a:pPr marL="0" marR="0" lvl="0" indent="0" algn="l" rtl="0">
-              <a:spcBef>
-                <a:spcPts val="0"/>
-              </a:spcBef>
-              <a:spcAft>
-                <a:spcPts val="0"/>
-              </a:spcAft>
-              <a:buNone/>
-            </a:pPr>
-            <a:r>
-              <a:rPr lang="en-US" sz="1800" dirty="0">
-                <a:solidFill>
-                  <a:schemeClr val="dk1"/>
-                </a:solidFill>
-                <a:latin typeface="Calibri"/>
-                <a:ea typeface="Calibri"/>
-                <a:cs typeface="Calibri"/>
-                <a:sym typeface="Calibri"/>
-              </a:rPr>
-              <a:t>If “q” is model prediction, and “p” is probability of actual label, then similarity between q &amp; p can be expressed as </a:t>
-            </a:r>
-            <a:r>
-              <a:rPr lang="en-US" sz="1800" b="1" dirty="0">
-                <a:solidFill>
-                  <a:srgbClr val="0070C0"/>
-                </a:solidFill>
-                <a:latin typeface="Calibri"/>
-                <a:ea typeface="Calibri"/>
-                <a:cs typeface="Calibri"/>
-                <a:sym typeface="Calibri"/>
-              </a:rPr>
-              <a:t>cross-entropy</a:t>
-            </a:r>
-            <a:r>
-              <a:rPr lang="en-US" sz="1800" dirty="0">
-                <a:solidFill>
-                  <a:schemeClr val="dk1"/>
-                </a:solidFill>
-                <a:latin typeface="Calibri"/>
-                <a:ea typeface="Calibri"/>
-                <a:cs typeface="Calibri"/>
-                <a:sym typeface="Calibri"/>
-              </a:rPr>
-              <a:t> H(</a:t>
-            </a:r>
-            <a:r>
-              <a:rPr lang="en-US" sz="1800" dirty="0" err="1">
-                <a:solidFill>
-                  <a:schemeClr val="dk1"/>
-                </a:solidFill>
-                <a:latin typeface="Calibri"/>
-                <a:ea typeface="Calibri"/>
-                <a:cs typeface="Calibri"/>
-                <a:sym typeface="Calibri"/>
-              </a:rPr>
-              <a:t>p,q</a:t>
-            </a:r>
-            <a:r>
-              <a:rPr lang="en-US" sz="1800" dirty="0">
-                <a:solidFill>
-                  <a:schemeClr val="dk1"/>
-                </a:solidFill>
-                <a:latin typeface="Calibri"/>
-                <a:ea typeface="Calibri"/>
-                <a:cs typeface="Calibri"/>
-                <a:sym typeface="Calibri"/>
-              </a:rPr>
-              <a:t>):</a:t>
-            </a:r>
-            <a:endParaRPr sz="1800" dirty="0">
-              <a:solidFill>
-                <a:schemeClr val="dk1"/>
-              </a:solidFill>
-              <a:latin typeface="Calibri"/>
-              <a:ea typeface="Calibri"/>
-              <a:cs typeface="Calibri"/>
-              <a:sym typeface="Calibri"/>
-            </a:endParaRPr>
-          </a:p>
-        </p:txBody>
-      </p:sp>
-      <p:pic>
-        <p:nvPicPr>
-          <p:cNvPr id="10" name="Google Shape;127;p17">
-            <a:extLst>
-              <a:ext uri="{FF2B5EF4-FFF2-40B4-BE49-F238E27FC236}">
-                <a16:creationId xmlns:a16="http://schemas.microsoft.com/office/drawing/2014/main" id="{F6E61A89-381A-7B47-8915-EF66A475F9D2}"/>
-              </a:ext>
-            </a:extLst>
-          </p:cNvPr>
-          <p:cNvPicPr preferRelativeResize="0"/>
-          <p:nvPr/>
-        </p:nvPicPr>
-        <p:blipFill rotWithShape="1">
-          <a:blip r:embed="rId3">
-            <a:alphaModFix/>
-          </a:blip>
-          <a:srcRect/>
-          <a:stretch/>
-        </p:blipFill>
-        <p:spPr>
-          <a:xfrm>
-            <a:off x="430298" y="5060669"/>
-            <a:ext cx="5571108" cy="630308"/>
-          </a:xfrm>
-          <a:prstGeom prst="rect">
-            <a:avLst/>
-          </a:prstGeom>
-          <a:noFill/>
-          <a:ln>
-            <a:noFill/>
-          </a:ln>
-        </p:spPr>
-      </p:pic>
-      <p:pic>
-        <p:nvPicPr>
-          <p:cNvPr id="11" name="Picture 10">
-            <a:extLst>
-              <a:ext uri="{FF2B5EF4-FFF2-40B4-BE49-F238E27FC236}">
-                <a16:creationId xmlns:a16="http://schemas.microsoft.com/office/drawing/2014/main" id="{29276624-B9BD-3644-8F93-7B56378A1A72}"/>
-              </a:ext>
-            </a:extLst>
-          </p:cNvPr>
-          <p:cNvPicPr>
-            <a:picLocks noChangeAspect="1"/>
-          </p:cNvPicPr>
-          <p:nvPr/>
-        </p:nvPicPr>
-        <p:blipFill>
-          <a:blip r:embed="rId4" cstate="email">
-            <a:extLst>
-              <a:ext uri="{28A0092B-C50C-407E-A947-70E740481C1C}">
-                <a14:useLocalDpi xmlns:a14="http://schemas.microsoft.com/office/drawing/2010/main"/>
-              </a:ext>
-            </a:extLst>
-          </a:blip>
-          <a:stretch>
-            <a:fillRect/>
-          </a:stretch>
-        </p:blipFill>
-        <p:spPr>
-          <a:xfrm>
-            <a:off x="8096317" y="652363"/>
-            <a:ext cx="3822632" cy="2739212"/>
-          </a:xfrm>
-          <a:prstGeom prst="rect">
-            <a:avLst/>
-          </a:prstGeom>
-        </p:spPr>
-      </p:pic>
-      <p:sp>
-        <p:nvSpPr>
-          <p:cNvPr id="12" name="TextBox 11">
-            <a:extLst>
-              <a:ext uri="{FF2B5EF4-FFF2-40B4-BE49-F238E27FC236}">
-                <a16:creationId xmlns:a16="http://schemas.microsoft.com/office/drawing/2014/main" id="{E94A8149-9751-464E-B394-3B1CFB385E4E}"/>
-              </a:ext>
-            </a:extLst>
-          </p:cNvPr>
-          <p:cNvSpPr txBox="1"/>
-          <p:nvPr/>
-        </p:nvSpPr>
-        <p:spPr>
-          <a:xfrm>
-            <a:off x="8182936" y="247599"/>
-            <a:ext cx="3678864" cy="307777"/>
-          </a:xfrm>
-          <a:prstGeom prst="rect">
-            <a:avLst/>
-          </a:prstGeom>
-          <a:noFill/>
-        </p:spPr>
-        <p:txBody>
-          <a:bodyPr wrap="square" rtlCol="0">
-            <a:spAutoFit/>
-          </a:bodyPr>
-          <a:lstStyle/>
-          <a:p>
-            <a:r>
-              <a:rPr lang="en-US" dirty="0"/>
-              <a:t>Log-Loss error function is better than MSE:</a:t>
-            </a:r>
-          </a:p>
-        </p:txBody>
-      </p:sp>
-    </p:spTree>
-    <p:extLst>
-      <p:ext uri="{BB962C8B-B14F-4D97-AF65-F5344CB8AC3E}">
-        <p14:creationId xmlns:p14="http://schemas.microsoft.com/office/powerpoint/2010/main" val="2066613169"/>
-      </p:ext>
-    </p:extLst>
-  </p:cSld>
-  <p:clrMapOvr>
-    <a:masterClrMapping/>
-  </p:clrMapOvr>
-</p:sld>
-</file>
-
-<file path=ppt/slides/slide5.xml><?xml version="1.0" encoding="utf-8"?>
+<file path=ppt/slides/slide7.xml><?xml version="1.0" encoding="utf-8"?>
 <p:sld xmlns:a="http://schemas.openxmlformats.org/drawingml/2006/main" xmlns:r="http://schemas.openxmlformats.org/officeDocument/2006/relationships" xmlns:p="http://schemas.openxmlformats.org/presentationml/2006/main">
   <p:cSld>
     <p:spTree>
@@ -14731,13 +17496,18 @@
         </p:nvSpPr>
         <p:spPr>
           <a:xfrm>
-            <a:off x="139700" y="861646"/>
-            <a:ext cx="7034823" cy="2246769"/>
+            <a:off x="139699" y="712775"/>
+            <a:ext cx="7136313" cy="1815882"/>
           </a:xfrm>
           <a:prstGeom prst="rect">
             <a:avLst/>
           </a:prstGeom>
-          <a:noFill/>
+          <a:solidFill>
+            <a:schemeClr val="accent4">
+              <a:lumMod val="20000"/>
+              <a:lumOff val="80000"/>
+            </a:schemeClr>
+          </a:solidFill>
         </p:spPr>
         <p:txBody>
           <a:bodyPr wrap="square" rtlCol="0">
@@ -14745,7 +17515,30 @@
           </a:bodyPr>
           <a:lstStyle/>
           <a:p>
-            <a:endParaRPr lang="en-US" dirty="0"/>
+            <a:r>
+              <a:rPr lang="en-US" b="1" dirty="0">
+                <a:solidFill>
+                  <a:srgbClr val="FF0000"/>
+                </a:solidFill>
+              </a:rPr>
+              <a:t>z-value is the regression coefficient divided by its standard error.</a:t>
+            </a:r>
+            <a:r>
+              <a:rPr lang="en-US" dirty="0"/>
+              <a:t> </a:t>
+            </a:r>
+          </a:p>
+          <a:p>
+            <a:r>
+              <a:rPr lang="en-US" dirty="0"/>
+              <a:t>It is also sometimes called the z-statistic. </a:t>
+            </a:r>
+          </a:p>
+          <a:p>
+            <a:r>
+              <a:rPr lang="en-US" dirty="0"/>
+              <a:t>It is usually given in the third column of the logistic regression coefficient table output. </a:t>
+            </a:r>
           </a:p>
           <a:p>
             <a:r>
@@ -14759,30 +17552,6 @@
               <a:t>http://logisticregressionanalysis.com/1577-what-are-z-values-in-logistic-regression/</a:t>
             </a:r>
             <a:endParaRPr lang="en-US" dirty="0"/>
-          </a:p>
-          <a:p>
-            <a:r>
-              <a:rPr lang="en-US" dirty="0"/>
-              <a:t>  </a:t>
-            </a:r>
-          </a:p>
-          <a:p>
-            <a:r>
-              <a:rPr lang="en-US" dirty="0"/>
-              <a:t>z-value is the regression coefficient divided by its standard error. </a:t>
-            </a:r>
-          </a:p>
-          <a:p>
-            <a:r>
-              <a:rPr lang="en-US" dirty="0"/>
-              <a:t>It is also sometimes called the z-statistic. </a:t>
-            </a:r>
-          </a:p>
-          <a:p>
-            <a:r>
-              <a:rPr lang="en-US" dirty="0"/>
-              <a:t>It is usually given in the third column of the logistic regression coefficient table output. </a:t>
-            </a:r>
           </a:p>
           <a:p>
             <a:endParaRPr lang="en-US" dirty="0"/>
@@ -14870,8 +17639,8 @@
         </p:blipFill>
         <p:spPr>
           <a:xfrm>
-            <a:off x="1800962" y="3296550"/>
-            <a:ext cx="2857500" cy="1104900"/>
+            <a:off x="2146513" y="2714221"/>
+            <a:ext cx="2183210" cy="844175"/>
           </a:xfrm>
           <a:prstGeom prst="rect">
             <a:avLst/>
@@ -14892,13 +17661,18 @@
         </p:nvSpPr>
         <p:spPr>
           <a:xfrm>
-            <a:off x="139699" y="4401450"/>
-            <a:ext cx="7442201" cy="2492990"/>
+            <a:off x="139698" y="3667780"/>
+            <a:ext cx="7136314" cy="2893100"/>
           </a:xfrm>
           <a:prstGeom prst="rect">
             <a:avLst/>
           </a:prstGeom>
-          <a:noFill/>
+          <a:solidFill>
+            <a:schemeClr val="accent4">
+              <a:lumMod val="20000"/>
+              <a:lumOff val="80000"/>
+            </a:schemeClr>
+          </a:solidFill>
         </p:spPr>
         <p:txBody>
           <a:bodyPr wrap="square" rtlCol="0">
@@ -14907,42 +17681,36 @@
           <a:lstStyle/>
           <a:p>
             <a:r>
-              <a:rPr lang="en-US" sz="1200" dirty="0"/>
-              <a:t>Here is a very good page to test logistic regression:</a:t>
-            </a:r>
-          </a:p>
-          <a:p>
-            <a:r>
-              <a:rPr lang="en-US" sz="1200" dirty="0"/>
-              <a:t> - </a:t>
-            </a:r>
-            <a:r>
-              <a:rPr lang="en-US" sz="1200" dirty="0">
+              <a:rPr lang="en-US" dirty="0"/>
+              <a:t>Here is a very good page to test logistic regression: </a:t>
+            </a:r>
+            <a:r>
+              <a:rPr lang="en-US" dirty="0">
                 <a:hlinkClick r:id="rId4"/>
               </a:rPr>
               <a:t>https://statpages.info/logistic.html</a:t>
             </a:r>
-            <a:endParaRPr lang="en-US" sz="1200" dirty="0"/>
-          </a:p>
-          <a:p>
-            <a:endParaRPr lang="en-US" sz="1200" dirty="0"/>
-          </a:p>
-          <a:p>
-            <a:r>
-              <a:rPr lang="en-US" sz="1200" dirty="0"/>
-              <a:t>This page contains a straightforward JavaScript implementation of a standard iterative method to maximize the Log Likelihood Function (LLF), defined as the sum of the logarithms of the predicted probabilities of occurrence for those cases where the event occurred and the logarithms of the predicted probabilities of non-occurrence for those cases where the event did not occur.</a:t>
-            </a:r>
-          </a:p>
-          <a:p>
-            <a:endParaRPr lang="en-US" sz="1200" dirty="0"/>
-          </a:p>
-          <a:p>
-            <a:r>
-              <a:rPr lang="en-US" sz="1200" dirty="0"/>
+            <a:endParaRPr lang="en-US" dirty="0"/>
+          </a:p>
+          <a:p>
+            <a:endParaRPr lang="en-US" dirty="0"/>
+          </a:p>
+          <a:p>
+            <a:r>
+              <a:rPr lang="en-US" dirty="0"/>
+              <a:t>This page contains a JavaScript implementation of a standard iterative method to maximize the Log Likelihood Function (LLF), defined as the sum of the logarithms of the predicted probabilities of occurrence for those cases where the event occurred and the logarithms of the predicted probabilities of non-occurrence for those cases where the event did not occur.</a:t>
+            </a:r>
+          </a:p>
+          <a:p>
+            <a:endParaRPr lang="en-US" dirty="0"/>
+          </a:p>
+          <a:p>
+            <a:r>
+              <a:rPr lang="en-US" dirty="0"/>
               <a:t>Maximization is by Newton's method, with a very simple elimination algorithm to invert and solve the simultaneous equations. </a:t>
             </a:r>
             <a:r>
-              <a:rPr lang="en-US" sz="1200" b="1" dirty="0">
+              <a:rPr lang="en-US" b="1" dirty="0">
                 <a:solidFill>
                   <a:srgbClr val="0070C0"/>
                 </a:solidFill>
@@ -14950,11 +17718,11 @@
               <a:t>Central-limit estimates of parameter standard errors </a:t>
             </a:r>
             <a:r>
-              <a:rPr lang="en-US" sz="1200" dirty="0"/>
+              <a:rPr lang="en-US" dirty="0"/>
               <a:t>are obtained </a:t>
             </a:r>
             <a:r>
-              <a:rPr lang="en-US" sz="1200" b="1" dirty="0">
+              <a:rPr lang="en-US" b="1" dirty="0">
                 <a:solidFill>
                   <a:srgbClr val="0070C0"/>
                 </a:solidFill>
@@ -14962,7 +17730,7 @@
               <a:t>from the diagonal terms of the inverse matrix</a:t>
             </a:r>
             <a:r>
-              <a:rPr lang="en-US" sz="1200" dirty="0"/>
+              <a:rPr lang="en-US" dirty="0"/>
               <a:t>. Odds Ratios and their confidence limits are obtained by exponentiating the parameters and their lower and upper confidence limits, approximated by +/- 1.96 standard errors (for 95% limits).</a:t>
             </a:r>
           </a:p>
@@ -15088,13 +17856,13 @@
           <p:nvPr>
             <p:extLst>
               <p:ext uri="{D42A27DB-BD31-4B8C-83A1-F6EECF244321}">
-                <p14:modId xmlns:p14="http://schemas.microsoft.com/office/powerpoint/2010/main" val="3235052369"/>
+                <p14:modId xmlns:p14="http://schemas.microsoft.com/office/powerpoint/2010/main" val="2566771141"/>
               </p:ext>
             </p:extLst>
           </p:nvPr>
         </p:nvGraphicFramePr>
         <p:xfrm>
-          <a:off x="7862278" y="2297100"/>
+          <a:off x="7722088" y="2231786"/>
           <a:ext cx="4165599" cy="3860800"/>
         </p:xfrm>
         <a:graphic>
@@ -17877,7 +20645,7 @@
 </p:sld>
 </file>
 
-<file path=ppt/slides/slide6.xml><?xml version="1.0" encoding="utf-8"?>
+<file path=ppt/slides/slide8.xml><?xml version="1.0" encoding="utf-8"?>
 <p:sld xmlns:a="http://schemas.openxmlformats.org/drawingml/2006/main" xmlns:r="http://schemas.openxmlformats.org/officeDocument/2006/relationships" xmlns:p="http://schemas.openxmlformats.org/presentationml/2006/main">
   <p:cSld>
     <p:spTree>
@@ -17909,12 +20677,17 @@
         <p:spPr>
           <a:xfrm>
             <a:off x="298938" y="140677"/>
-            <a:ext cx="10823152" cy="2123658"/>
+            <a:ext cx="10360353" cy="2123658"/>
           </a:xfrm>
           <a:prstGeom prst="rect">
             <a:avLst/>
           </a:prstGeom>
-          <a:noFill/>
+          <a:solidFill>
+            <a:schemeClr val="accent4">
+              <a:lumMod val="20000"/>
+              <a:lumOff val="80000"/>
+            </a:schemeClr>
+          </a:solidFill>
         </p:spPr>
         <p:txBody>
           <a:bodyPr wrap="square" rtlCol="0">
@@ -18040,13 +20813,18 @@
         </p:nvSpPr>
         <p:spPr>
           <a:xfrm>
-            <a:off x="7530953" y="5814418"/>
-            <a:ext cx="3591137" cy="738664"/>
+            <a:off x="7382116" y="5540098"/>
+            <a:ext cx="3591137" cy="523220"/>
           </a:xfrm>
           <a:prstGeom prst="rect">
             <a:avLst/>
           </a:prstGeom>
-          <a:noFill/>
+          <a:solidFill>
+            <a:schemeClr val="accent4">
+              <a:lumMod val="20000"/>
+              <a:lumOff val="80000"/>
+            </a:schemeClr>
+          </a:solidFill>
         </p:spPr>
         <p:txBody>
           <a:bodyPr wrap="square" rtlCol="0">
@@ -18070,9 +20848,6 @@
               </a:rPr>
               <a:t>https://en.wikipedia.org/wiki/Wald_test</a:t>
             </a:r>
-            <a:endParaRPr lang="en-US" dirty="0"/>
-          </a:p>
-          <a:p>
             <a:endParaRPr lang="en-US" dirty="0"/>
           </a:p>
         </p:txBody>
@@ -18091,13 +20866,18 @@
         </p:nvSpPr>
         <p:spPr>
           <a:xfrm>
-            <a:off x="6664271" y="2386740"/>
+            <a:off x="6468328" y="2438992"/>
             <a:ext cx="5418714" cy="2677656"/>
           </a:xfrm>
           <a:prstGeom prst="rect">
             <a:avLst/>
           </a:prstGeom>
-          <a:noFill/>
+          <a:solidFill>
+            <a:schemeClr val="accent4">
+              <a:lumMod val="20000"/>
+              <a:lumOff val="80000"/>
+            </a:schemeClr>
+          </a:solidFill>
         </p:spPr>
         <p:txBody>
           <a:bodyPr wrap="square" rtlCol="0">
@@ -18185,7 +20965,7 @@
 </p:sld>
 </file>
 
-<file path=ppt/slides/slide7.xml><?xml version="1.0" encoding="utf-8"?>
+<file path=ppt/slides/slide9.xml><?xml version="1.0" encoding="utf-8"?>
 <p:sld xmlns:a="http://schemas.openxmlformats.org/drawingml/2006/main" xmlns:r="http://schemas.openxmlformats.org/officeDocument/2006/relationships" xmlns:p="http://schemas.openxmlformats.org/presentationml/2006/main">
   <p:cSld>
     <p:spTree>
@@ -18222,7 +21002,12 @@
           <a:prstGeom prst="rect">
             <a:avLst/>
           </a:prstGeom>
-          <a:noFill/>
+          <a:solidFill>
+            <a:schemeClr val="accent4">
+              <a:lumMod val="20000"/>
+              <a:lumOff val="80000"/>
+            </a:schemeClr>
+          </a:solidFill>
         </p:spPr>
         <p:txBody>
           <a:bodyPr wrap="square" rtlCol="0">
@@ -18244,7 +21029,19 @@
             </a:r>
             <a:r>
               <a:rPr lang="en-US" dirty="0"/>
-              <a:t> (Maximum Likelihood Estimation) method.</a:t>
+              <a:t> (</a:t>
+            </a:r>
+            <a:r>
+              <a:rPr lang="en-US" b="1" dirty="0">
+                <a:solidFill>
+                  <a:srgbClr val="FF0000"/>
+                </a:solidFill>
+              </a:rPr>
+              <a:t>Maximum Likelihood Estimation</a:t>
+            </a:r>
+            <a:r>
+              <a:rPr lang="en-US" dirty="0"/>
+              <a:t>) method.</a:t>
             </a:r>
           </a:p>
           <a:p>
@@ -18572,13 +21369,18 @@
         </p:nvSpPr>
         <p:spPr>
           <a:xfrm>
-            <a:off x="0" y="2817733"/>
-            <a:ext cx="6296628" cy="3970318"/>
+            <a:off x="-1" y="2817733"/>
+            <a:ext cx="6577701" cy="3970318"/>
           </a:xfrm>
           <a:prstGeom prst="rect">
             <a:avLst/>
           </a:prstGeom>
-          <a:noFill/>
+          <a:solidFill>
+            <a:schemeClr val="accent6">
+              <a:lumMod val="20000"/>
+              <a:lumOff val="80000"/>
+            </a:schemeClr>
+          </a:solidFill>
         </p:spPr>
         <p:txBody>
           <a:bodyPr wrap="square" rtlCol="0">
@@ -18642,8 +21444,28 @@
           </a:p>
           <a:p>
             <a:r>
+              <a:rPr lang="en-US" b="1" dirty="0">
+                <a:solidFill>
+                  <a:srgbClr val="FF0000"/>
+                </a:solidFill>
+              </a:rPr>
+              <a:t>MLE</a:t>
+            </a:r>
+            <a:r>
               <a:rPr lang="en-US" dirty="0"/>
-              <a:t>MLE theory states that the estimated large-sample variance-covariance matrix for MLE is given by the </a:t>
+              <a:t> theory states that the estimated large-sample variance-covariance matrix for </a:t>
+            </a:r>
+            <a:r>
+              <a:rPr lang="en-US" b="1" dirty="0">
+                <a:solidFill>
+                  <a:srgbClr val="FF0000"/>
+                </a:solidFill>
+              </a:rPr>
+              <a:t>MLE</a:t>
+            </a:r>
+            <a:r>
+              <a:rPr lang="en-US" dirty="0"/>
+              <a:t> is given by the </a:t>
             </a:r>
             <a:r>
               <a:rPr lang="en-US" b="1" dirty="0">
@@ -18872,1805 +21694,6 @@
     <p:extLst>
       <p:ext uri="{BB962C8B-B14F-4D97-AF65-F5344CB8AC3E}">
         <p14:creationId xmlns:p14="http://schemas.microsoft.com/office/powerpoint/2010/main" val="276739582"/>
-      </p:ext>
-    </p:extLst>
-  </p:cSld>
-  <p:clrMapOvr>
-    <a:masterClrMapping/>
-  </p:clrMapOvr>
-</p:sld>
-</file>
-
-<file path=ppt/slides/slide8.xml><?xml version="1.0" encoding="utf-8"?>
-<p:sld xmlns:a="http://schemas.openxmlformats.org/drawingml/2006/main" xmlns:r="http://schemas.openxmlformats.org/officeDocument/2006/relationships" xmlns:p="http://schemas.openxmlformats.org/presentationml/2006/main">
-  <p:cSld>
-    <p:spTree>
-      <p:nvGrpSpPr>
-        <p:cNvPr id="1" name=""/>
-        <p:cNvGrpSpPr/>
-        <p:nvPr/>
-      </p:nvGrpSpPr>
-      <p:grpSpPr>
-        <a:xfrm>
-          <a:off x="0" y="0"/>
-          <a:ext cx="0" cy="0"/>
-          <a:chOff x="0" y="0"/>
-          <a:chExt cx="0" cy="0"/>
-        </a:xfrm>
-      </p:grpSpPr>
-      <p:sp>
-        <p:nvSpPr>
-          <p:cNvPr id="4" name="TextBox 3">
-            <a:extLst>
-              <a:ext uri="{FF2B5EF4-FFF2-40B4-BE49-F238E27FC236}">
-                <a16:creationId xmlns:a16="http://schemas.microsoft.com/office/drawing/2014/main" id="{F3FFBA43-19B0-A04A-A6F0-FA05EE555936}"/>
-              </a:ext>
-            </a:extLst>
-          </p:cNvPr>
-          <p:cNvSpPr txBox="1"/>
-          <p:nvPr/>
-        </p:nvSpPr>
-        <p:spPr>
-          <a:xfrm>
-            <a:off x="231494" y="173620"/>
-            <a:ext cx="8113853" cy="400110"/>
-          </a:xfrm>
-          <a:prstGeom prst="rect">
-            <a:avLst/>
-          </a:prstGeom>
-          <a:noFill/>
-        </p:spPr>
-        <p:txBody>
-          <a:bodyPr wrap="square" rtlCol="0">
-            <a:spAutoFit/>
-          </a:bodyPr>
-          <a:lstStyle/>
-          <a:p>
-            <a:r>
-              <a:rPr lang="en-US" sz="2000" b="1" dirty="0"/>
-              <a:t>Logistic Regression – Covariance Matrix calculation (Python)</a:t>
-            </a:r>
-          </a:p>
-        </p:txBody>
-      </p:sp>
-      <p:sp>
-        <p:nvSpPr>
-          <p:cNvPr id="5" name="TextBox 4">
-            <a:extLst>
-              <a:ext uri="{FF2B5EF4-FFF2-40B4-BE49-F238E27FC236}">
-                <a16:creationId xmlns:a16="http://schemas.microsoft.com/office/drawing/2014/main" id="{AC00C63F-DCE9-A445-8FEE-F7AC66486FCD}"/>
-              </a:ext>
-            </a:extLst>
-          </p:cNvPr>
-          <p:cNvSpPr txBox="1"/>
-          <p:nvPr/>
-        </p:nvSpPr>
-        <p:spPr>
-          <a:xfrm>
-            <a:off x="335666" y="613458"/>
-            <a:ext cx="6817488" cy="523220"/>
-          </a:xfrm>
-          <a:prstGeom prst="rect">
-            <a:avLst/>
-          </a:prstGeom>
-          <a:noFill/>
-        </p:spPr>
-        <p:txBody>
-          <a:bodyPr wrap="square" rtlCol="0">
-            <a:spAutoFit/>
-          </a:bodyPr>
-          <a:lstStyle/>
-          <a:p>
-            <a:r>
-              <a:rPr lang="en-US" dirty="0">
-                <a:hlinkClick r:id="rId2"/>
-              </a:rPr>
-              <a:t>https://</a:t>
-            </a:r>
-            <a:r>
-              <a:rPr lang="en-US" dirty="0" err="1">
-                <a:hlinkClick r:id="rId2"/>
-              </a:rPr>
-              <a:t>stats.stackexchange.com</a:t>
-            </a:r>
-            <a:r>
-              <a:rPr lang="en-US" dirty="0">
-                <a:hlinkClick r:id="rId2"/>
-              </a:rPr>
-              <a:t>/questions/89484/how-to-compute-the-standard-errors-of-a-logistic-regressions-coefficients</a:t>
-            </a:r>
-            <a:endParaRPr lang="en-US" dirty="0"/>
-          </a:p>
-        </p:txBody>
-      </p:sp>
-      <p:sp>
-        <p:nvSpPr>
-          <p:cNvPr id="6" name="TextBox 5">
-            <a:extLst>
-              <a:ext uri="{FF2B5EF4-FFF2-40B4-BE49-F238E27FC236}">
-                <a16:creationId xmlns:a16="http://schemas.microsoft.com/office/drawing/2014/main" id="{048C989A-2C74-E14A-B50F-A8EE0D7FC7AB}"/>
-              </a:ext>
-            </a:extLst>
-          </p:cNvPr>
-          <p:cNvSpPr txBox="1"/>
-          <p:nvPr/>
-        </p:nvSpPr>
-        <p:spPr>
-          <a:xfrm>
-            <a:off x="335667" y="1493134"/>
-            <a:ext cx="7176304" cy="4339650"/>
-          </a:xfrm>
-          <a:prstGeom prst="rect">
-            <a:avLst/>
-          </a:prstGeom>
-          <a:noFill/>
-        </p:spPr>
-        <p:txBody>
-          <a:bodyPr wrap="square" rtlCol="0">
-            <a:spAutoFit/>
-          </a:bodyPr>
-          <a:lstStyle/>
-          <a:p>
-            <a:r>
-              <a:rPr lang="en-US" sz="1200" dirty="0">
-                <a:solidFill>
-                  <a:srgbClr val="0070C0"/>
-                </a:solidFill>
-                <a:latin typeface="Consolas" panose="020B0609020204030204" pitchFamily="49" charset="0"/>
-                <a:cs typeface="Consolas" panose="020B0609020204030204" pitchFamily="49" charset="0"/>
-              </a:rPr>
-              <a:t>import </a:t>
-            </a:r>
-            <a:r>
-              <a:rPr lang="en-US" sz="1200" dirty="0" err="1">
-                <a:solidFill>
-                  <a:srgbClr val="0070C0"/>
-                </a:solidFill>
-                <a:latin typeface="Consolas" panose="020B0609020204030204" pitchFamily="49" charset="0"/>
-                <a:cs typeface="Consolas" panose="020B0609020204030204" pitchFamily="49" charset="0"/>
-              </a:rPr>
-              <a:t>numpy</a:t>
-            </a:r>
-            <a:r>
-              <a:rPr lang="en-US" sz="1200" dirty="0">
-                <a:solidFill>
-                  <a:srgbClr val="0070C0"/>
-                </a:solidFill>
-                <a:latin typeface="Consolas" panose="020B0609020204030204" pitchFamily="49" charset="0"/>
-                <a:cs typeface="Consolas" panose="020B0609020204030204" pitchFamily="49" charset="0"/>
-              </a:rPr>
-              <a:t> as np</a:t>
-            </a:r>
-          </a:p>
-          <a:p>
-            <a:r>
-              <a:rPr lang="en-US" sz="1200" dirty="0">
-                <a:solidFill>
-                  <a:srgbClr val="0070C0"/>
-                </a:solidFill>
-                <a:latin typeface="Consolas" panose="020B0609020204030204" pitchFamily="49" charset="0"/>
-                <a:cs typeface="Consolas" panose="020B0609020204030204" pitchFamily="49" charset="0"/>
-              </a:rPr>
-              <a:t>from </a:t>
-            </a:r>
-            <a:r>
-              <a:rPr lang="en-US" sz="1200" dirty="0" err="1">
-                <a:solidFill>
-                  <a:srgbClr val="0070C0"/>
-                </a:solidFill>
-                <a:latin typeface="Consolas" panose="020B0609020204030204" pitchFamily="49" charset="0"/>
-                <a:cs typeface="Consolas" panose="020B0609020204030204" pitchFamily="49" charset="0"/>
-              </a:rPr>
-              <a:t>sklearn</a:t>
-            </a:r>
-            <a:r>
-              <a:rPr lang="en-US" sz="1200" dirty="0">
-                <a:solidFill>
-                  <a:srgbClr val="0070C0"/>
-                </a:solidFill>
-                <a:latin typeface="Consolas" panose="020B0609020204030204" pitchFamily="49" charset="0"/>
-                <a:cs typeface="Consolas" panose="020B0609020204030204" pitchFamily="49" charset="0"/>
-              </a:rPr>
-              <a:t> import </a:t>
-            </a:r>
-            <a:r>
-              <a:rPr lang="en-US" sz="1200" dirty="0" err="1">
-                <a:solidFill>
-                  <a:srgbClr val="0070C0"/>
-                </a:solidFill>
-                <a:latin typeface="Consolas" panose="020B0609020204030204" pitchFamily="49" charset="0"/>
-                <a:cs typeface="Consolas" panose="020B0609020204030204" pitchFamily="49" charset="0"/>
-              </a:rPr>
-              <a:t>linear_model</a:t>
-            </a:r>
-            <a:endParaRPr lang="en-US" sz="1200" dirty="0">
-              <a:solidFill>
-                <a:srgbClr val="0070C0"/>
-              </a:solidFill>
-              <a:latin typeface="Consolas" panose="020B0609020204030204" pitchFamily="49" charset="0"/>
-              <a:cs typeface="Consolas" panose="020B0609020204030204" pitchFamily="49" charset="0"/>
-            </a:endParaRPr>
-          </a:p>
-          <a:p>
-            <a:endParaRPr lang="en-US" sz="1200" dirty="0">
-              <a:solidFill>
-                <a:srgbClr val="0070C0"/>
-              </a:solidFill>
-              <a:latin typeface="Consolas" panose="020B0609020204030204" pitchFamily="49" charset="0"/>
-              <a:cs typeface="Consolas" panose="020B0609020204030204" pitchFamily="49" charset="0"/>
-            </a:endParaRPr>
-          </a:p>
-          <a:p>
-            <a:r>
-              <a:rPr lang="en-US" sz="1200" dirty="0">
-                <a:solidFill>
-                  <a:srgbClr val="0070C0"/>
-                </a:solidFill>
-                <a:latin typeface="Consolas" panose="020B0609020204030204" pitchFamily="49" charset="0"/>
-                <a:cs typeface="Consolas" panose="020B0609020204030204" pitchFamily="49" charset="0"/>
-              </a:rPr>
-              <a:t>logit = </a:t>
-            </a:r>
-            <a:r>
-              <a:rPr lang="en-US" sz="1200" dirty="0" err="1">
-                <a:solidFill>
-                  <a:srgbClr val="0070C0"/>
-                </a:solidFill>
-                <a:latin typeface="Consolas" panose="020B0609020204030204" pitchFamily="49" charset="0"/>
-                <a:cs typeface="Consolas" panose="020B0609020204030204" pitchFamily="49" charset="0"/>
-              </a:rPr>
-              <a:t>linear_model.LogisticRegression</a:t>
-            </a:r>
-            <a:r>
-              <a:rPr lang="en-US" sz="1200" dirty="0">
-                <a:solidFill>
-                  <a:srgbClr val="0070C0"/>
-                </a:solidFill>
-                <a:latin typeface="Consolas" panose="020B0609020204030204" pitchFamily="49" charset="0"/>
-                <a:cs typeface="Consolas" panose="020B0609020204030204" pitchFamily="49" charset="0"/>
-              </a:rPr>
-              <a:t>()</a:t>
-            </a:r>
-          </a:p>
-          <a:p>
-            <a:r>
-              <a:rPr lang="en-US" sz="1200" dirty="0" err="1">
-                <a:solidFill>
-                  <a:srgbClr val="0070C0"/>
-                </a:solidFill>
-                <a:latin typeface="Consolas" panose="020B0609020204030204" pitchFamily="49" charset="0"/>
-                <a:cs typeface="Consolas" panose="020B0609020204030204" pitchFamily="49" charset="0"/>
-              </a:rPr>
-              <a:t>resLogit</a:t>
-            </a:r>
-            <a:r>
-              <a:rPr lang="en-US" sz="1200" dirty="0">
-                <a:solidFill>
-                  <a:srgbClr val="0070C0"/>
-                </a:solidFill>
-                <a:latin typeface="Consolas" panose="020B0609020204030204" pitchFamily="49" charset="0"/>
-                <a:cs typeface="Consolas" panose="020B0609020204030204" pitchFamily="49" charset="0"/>
-              </a:rPr>
-              <a:t> = </a:t>
-            </a:r>
-            <a:r>
-              <a:rPr lang="en-US" sz="1200" dirty="0" err="1">
-                <a:solidFill>
-                  <a:srgbClr val="0070C0"/>
-                </a:solidFill>
-                <a:latin typeface="Consolas" panose="020B0609020204030204" pitchFamily="49" charset="0"/>
-                <a:cs typeface="Consolas" panose="020B0609020204030204" pitchFamily="49" charset="0"/>
-              </a:rPr>
-              <a:t>logit.fit</a:t>
-            </a:r>
-            <a:r>
-              <a:rPr lang="en-US" sz="1200" dirty="0">
-                <a:solidFill>
-                  <a:srgbClr val="0070C0"/>
-                </a:solidFill>
-                <a:latin typeface="Consolas" panose="020B0609020204030204" pitchFamily="49" charset="0"/>
-                <a:cs typeface="Consolas" panose="020B0609020204030204" pitchFamily="49" charset="0"/>
-              </a:rPr>
-              <a:t>(</a:t>
-            </a:r>
-            <a:r>
-              <a:rPr lang="en-US" sz="1200" dirty="0" err="1">
-                <a:solidFill>
-                  <a:srgbClr val="0070C0"/>
-                </a:solidFill>
-                <a:latin typeface="Consolas" panose="020B0609020204030204" pitchFamily="49" charset="0"/>
-                <a:cs typeface="Consolas" panose="020B0609020204030204" pitchFamily="49" charset="0"/>
-              </a:rPr>
-              <a:t>X_train</a:t>
-            </a:r>
-            <a:r>
-              <a:rPr lang="en-US" sz="1200" dirty="0">
-                <a:solidFill>
-                  <a:srgbClr val="0070C0"/>
-                </a:solidFill>
-                <a:latin typeface="Consolas" panose="020B0609020204030204" pitchFamily="49" charset="0"/>
-                <a:cs typeface="Consolas" panose="020B0609020204030204" pitchFamily="49" charset="0"/>
-              </a:rPr>
-              <a:t>, </a:t>
-            </a:r>
-            <a:r>
-              <a:rPr lang="en-US" sz="1200" dirty="0" err="1">
-                <a:solidFill>
-                  <a:srgbClr val="0070C0"/>
-                </a:solidFill>
-                <a:latin typeface="Consolas" panose="020B0609020204030204" pitchFamily="49" charset="0"/>
-                <a:cs typeface="Consolas" panose="020B0609020204030204" pitchFamily="49" charset="0"/>
-              </a:rPr>
-              <a:t>y_train</a:t>
-            </a:r>
-            <a:r>
-              <a:rPr lang="en-US" sz="1200" dirty="0">
-                <a:solidFill>
-                  <a:srgbClr val="0070C0"/>
-                </a:solidFill>
-                <a:latin typeface="Consolas" panose="020B0609020204030204" pitchFamily="49" charset="0"/>
-                <a:cs typeface="Consolas" panose="020B0609020204030204" pitchFamily="49" charset="0"/>
-              </a:rPr>
-              <a:t>)</a:t>
-            </a:r>
-          </a:p>
-          <a:p>
-            <a:r>
-              <a:rPr lang="en-US" sz="1200" dirty="0" err="1">
-                <a:solidFill>
-                  <a:srgbClr val="0070C0"/>
-                </a:solidFill>
-                <a:latin typeface="Consolas" panose="020B0609020204030204" pitchFamily="49" charset="0"/>
-                <a:cs typeface="Consolas" panose="020B0609020204030204" pitchFamily="49" charset="0"/>
-              </a:rPr>
-              <a:t>predProbs</a:t>
-            </a:r>
-            <a:r>
-              <a:rPr lang="en-US" sz="1200" dirty="0">
-                <a:solidFill>
-                  <a:srgbClr val="0070C0"/>
-                </a:solidFill>
-                <a:latin typeface="Consolas" panose="020B0609020204030204" pitchFamily="49" charset="0"/>
-                <a:cs typeface="Consolas" panose="020B0609020204030204" pitchFamily="49" charset="0"/>
-              </a:rPr>
-              <a:t> = </a:t>
-            </a:r>
-            <a:r>
-              <a:rPr lang="en-US" sz="1200" dirty="0" err="1">
-                <a:solidFill>
-                  <a:srgbClr val="0070C0"/>
-                </a:solidFill>
-                <a:latin typeface="Consolas" panose="020B0609020204030204" pitchFamily="49" charset="0"/>
-                <a:cs typeface="Consolas" panose="020B0609020204030204" pitchFamily="49" charset="0"/>
-              </a:rPr>
-              <a:t>resLogit.predict_proba</a:t>
-            </a:r>
-            <a:r>
-              <a:rPr lang="en-US" sz="1200" dirty="0">
-                <a:solidFill>
-                  <a:srgbClr val="0070C0"/>
-                </a:solidFill>
-                <a:latin typeface="Consolas" panose="020B0609020204030204" pitchFamily="49" charset="0"/>
-                <a:cs typeface="Consolas" panose="020B0609020204030204" pitchFamily="49" charset="0"/>
-              </a:rPr>
-              <a:t>(</a:t>
-            </a:r>
-            <a:r>
-              <a:rPr lang="en-US" sz="1200" dirty="0" err="1">
-                <a:solidFill>
-                  <a:srgbClr val="0070C0"/>
-                </a:solidFill>
-                <a:latin typeface="Consolas" panose="020B0609020204030204" pitchFamily="49" charset="0"/>
-                <a:cs typeface="Consolas" panose="020B0609020204030204" pitchFamily="49" charset="0"/>
-              </a:rPr>
-              <a:t>X_train</a:t>
-            </a:r>
-            <a:r>
-              <a:rPr lang="en-US" sz="1200" dirty="0">
-                <a:solidFill>
-                  <a:srgbClr val="0070C0"/>
-                </a:solidFill>
-                <a:latin typeface="Consolas" panose="020B0609020204030204" pitchFamily="49" charset="0"/>
-                <a:cs typeface="Consolas" panose="020B0609020204030204" pitchFamily="49" charset="0"/>
-              </a:rPr>
-              <a:t>)</a:t>
-            </a:r>
-          </a:p>
-          <a:p>
-            <a:endParaRPr lang="en-US" sz="1200" dirty="0">
-              <a:solidFill>
-                <a:srgbClr val="0070C0"/>
-              </a:solidFill>
-              <a:latin typeface="Consolas" panose="020B0609020204030204" pitchFamily="49" charset="0"/>
-              <a:cs typeface="Consolas" panose="020B0609020204030204" pitchFamily="49" charset="0"/>
-            </a:endParaRPr>
-          </a:p>
-          <a:p>
-            <a:r>
-              <a:rPr lang="en-US" sz="1200" dirty="0">
-                <a:solidFill>
-                  <a:srgbClr val="00B050"/>
-                </a:solidFill>
-                <a:latin typeface="Consolas" panose="020B0609020204030204" pitchFamily="49" charset="0"/>
-                <a:cs typeface="Consolas" panose="020B0609020204030204" pitchFamily="49" charset="0"/>
-              </a:rPr>
-              <a:t># Design matrix -- add column of 1's at the beginning of your </a:t>
-            </a:r>
-            <a:r>
-              <a:rPr lang="en-US" sz="1200" dirty="0" err="1">
-                <a:solidFill>
-                  <a:srgbClr val="00B050"/>
-                </a:solidFill>
-                <a:latin typeface="Consolas" panose="020B0609020204030204" pitchFamily="49" charset="0"/>
-                <a:cs typeface="Consolas" panose="020B0609020204030204" pitchFamily="49" charset="0"/>
-              </a:rPr>
-              <a:t>X_train</a:t>
-            </a:r>
-            <a:r>
-              <a:rPr lang="en-US" sz="1200" dirty="0">
-                <a:solidFill>
-                  <a:srgbClr val="00B050"/>
-                </a:solidFill>
-                <a:latin typeface="Consolas" panose="020B0609020204030204" pitchFamily="49" charset="0"/>
-                <a:cs typeface="Consolas" panose="020B0609020204030204" pitchFamily="49" charset="0"/>
-              </a:rPr>
-              <a:t> matrix</a:t>
-            </a:r>
-          </a:p>
-          <a:p>
-            <a:r>
-              <a:rPr lang="en-US" sz="1200" dirty="0" err="1">
-                <a:solidFill>
-                  <a:srgbClr val="0070C0"/>
-                </a:solidFill>
-                <a:latin typeface="Consolas" panose="020B0609020204030204" pitchFamily="49" charset="0"/>
-                <a:cs typeface="Consolas" panose="020B0609020204030204" pitchFamily="49" charset="0"/>
-              </a:rPr>
-              <a:t>X_design</a:t>
-            </a:r>
-            <a:r>
-              <a:rPr lang="en-US" sz="1200" dirty="0">
-                <a:solidFill>
-                  <a:srgbClr val="0070C0"/>
-                </a:solidFill>
-                <a:latin typeface="Consolas" panose="020B0609020204030204" pitchFamily="49" charset="0"/>
-                <a:cs typeface="Consolas" panose="020B0609020204030204" pitchFamily="49" charset="0"/>
-              </a:rPr>
-              <a:t> = </a:t>
-            </a:r>
-            <a:r>
-              <a:rPr lang="en-US" sz="1200" dirty="0" err="1">
-                <a:solidFill>
-                  <a:srgbClr val="0070C0"/>
-                </a:solidFill>
-                <a:latin typeface="Consolas" panose="020B0609020204030204" pitchFamily="49" charset="0"/>
-                <a:cs typeface="Consolas" panose="020B0609020204030204" pitchFamily="49" charset="0"/>
-              </a:rPr>
-              <a:t>np.hstack</a:t>
-            </a:r>
-            <a:r>
-              <a:rPr lang="en-US" sz="1200" dirty="0">
-                <a:solidFill>
-                  <a:srgbClr val="0070C0"/>
-                </a:solidFill>
-                <a:latin typeface="Consolas" panose="020B0609020204030204" pitchFamily="49" charset="0"/>
-                <a:cs typeface="Consolas" panose="020B0609020204030204" pitchFamily="49" charset="0"/>
-              </a:rPr>
-              <a:t>([</a:t>
-            </a:r>
-            <a:r>
-              <a:rPr lang="en-US" sz="1200" dirty="0" err="1">
-                <a:solidFill>
-                  <a:srgbClr val="0070C0"/>
-                </a:solidFill>
-                <a:latin typeface="Consolas" panose="020B0609020204030204" pitchFamily="49" charset="0"/>
-                <a:cs typeface="Consolas" panose="020B0609020204030204" pitchFamily="49" charset="0"/>
-              </a:rPr>
-              <a:t>np.ones</a:t>
-            </a:r>
-            <a:r>
-              <a:rPr lang="en-US" sz="1200" dirty="0">
-                <a:solidFill>
-                  <a:srgbClr val="0070C0"/>
-                </a:solidFill>
-                <a:latin typeface="Consolas" panose="020B0609020204030204" pitchFamily="49" charset="0"/>
-                <a:cs typeface="Consolas" panose="020B0609020204030204" pitchFamily="49" charset="0"/>
-              </a:rPr>
-              <a:t>((</a:t>
-            </a:r>
-            <a:r>
-              <a:rPr lang="en-US" sz="1200" dirty="0" err="1">
-                <a:solidFill>
-                  <a:srgbClr val="0070C0"/>
-                </a:solidFill>
-                <a:latin typeface="Consolas" panose="020B0609020204030204" pitchFamily="49" charset="0"/>
-                <a:cs typeface="Consolas" panose="020B0609020204030204" pitchFamily="49" charset="0"/>
-              </a:rPr>
-              <a:t>X_train.shape</a:t>
-            </a:r>
-            <a:r>
-              <a:rPr lang="en-US" sz="1200" dirty="0">
-                <a:solidFill>
-                  <a:srgbClr val="0070C0"/>
-                </a:solidFill>
-                <a:latin typeface="Consolas" panose="020B0609020204030204" pitchFamily="49" charset="0"/>
-                <a:cs typeface="Consolas" panose="020B0609020204030204" pitchFamily="49" charset="0"/>
-              </a:rPr>
-              <a:t>[0], 1)), </a:t>
-            </a:r>
-            <a:r>
-              <a:rPr lang="en-US" sz="1200" dirty="0" err="1">
-                <a:solidFill>
-                  <a:srgbClr val="0070C0"/>
-                </a:solidFill>
-                <a:latin typeface="Consolas" panose="020B0609020204030204" pitchFamily="49" charset="0"/>
-                <a:cs typeface="Consolas" panose="020B0609020204030204" pitchFamily="49" charset="0"/>
-              </a:rPr>
-              <a:t>X_train</a:t>
-            </a:r>
-            <a:r>
-              <a:rPr lang="en-US" sz="1200" dirty="0">
-                <a:solidFill>
-                  <a:srgbClr val="0070C0"/>
-                </a:solidFill>
-                <a:latin typeface="Consolas" panose="020B0609020204030204" pitchFamily="49" charset="0"/>
-                <a:cs typeface="Consolas" panose="020B0609020204030204" pitchFamily="49" charset="0"/>
-              </a:rPr>
-              <a:t>])</a:t>
-            </a:r>
-          </a:p>
-          <a:p>
-            <a:endParaRPr lang="en-US" sz="1200" dirty="0">
-              <a:solidFill>
-                <a:srgbClr val="0070C0"/>
-              </a:solidFill>
-              <a:latin typeface="Consolas" panose="020B0609020204030204" pitchFamily="49" charset="0"/>
-              <a:cs typeface="Consolas" panose="020B0609020204030204" pitchFamily="49" charset="0"/>
-            </a:endParaRPr>
-          </a:p>
-          <a:p>
-            <a:r>
-              <a:rPr lang="en-US" sz="1200" dirty="0">
-                <a:solidFill>
-                  <a:srgbClr val="00B050"/>
-                </a:solidFill>
-                <a:latin typeface="Consolas" panose="020B0609020204030204" pitchFamily="49" charset="0"/>
-                <a:cs typeface="Consolas" panose="020B0609020204030204" pitchFamily="49" charset="0"/>
-              </a:rPr>
-              <a:t># Initiate matrix of 0's, fill diagonal with each predicted observation's variance</a:t>
-            </a:r>
-          </a:p>
-          <a:p>
-            <a:r>
-              <a:rPr lang="en-US" sz="1200" dirty="0">
-                <a:solidFill>
-                  <a:srgbClr val="0070C0"/>
-                </a:solidFill>
-                <a:latin typeface="Consolas" panose="020B0609020204030204" pitchFamily="49" charset="0"/>
-                <a:cs typeface="Consolas" panose="020B0609020204030204" pitchFamily="49" charset="0"/>
-              </a:rPr>
-              <a:t>V = </a:t>
-            </a:r>
-            <a:r>
-              <a:rPr lang="en-US" sz="1200" dirty="0" err="1">
-                <a:solidFill>
-                  <a:srgbClr val="0070C0"/>
-                </a:solidFill>
-                <a:latin typeface="Consolas" panose="020B0609020204030204" pitchFamily="49" charset="0"/>
-                <a:cs typeface="Consolas" panose="020B0609020204030204" pitchFamily="49" charset="0"/>
-              </a:rPr>
-              <a:t>np.diagflat</a:t>
-            </a:r>
-            <a:r>
-              <a:rPr lang="en-US" sz="1200" dirty="0">
-                <a:solidFill>
-                  <a:srgbClr val="0070C0"/>
-                </a:solidFill>
-                <a:latin typeface="Consolas" panose="020B0609020204030204" pitchFamily="49" charset="0"/>
-                <a:cs typeface="Consolas" panose="020B0609020204030204" pitchFamily="49" charset="0"/>
-              </a:rPr>
-              <a:t>(</a:t>
-            </a:r>
-            <a:r>
-              <a:rPr lang="en-US" sz="1200" dirty="0" err="1">
-                <a:solidFill>
-                  <a:srgbClr val="0070C0"/>
-                </a:solidFill>
-                <a:latin typeface="Consolas" panose="020B0609020204030204" pitchFamily="49" charset="0"/>
-                <a:cs typeface="Consolas" panose="020B0609020204030204" pitchFamily="49" charset="0"/>
-              </a:rPr>
-              <a:t>np.product</a:t>
-            </a:r>
-            <a:r>
-              <a:rPr lang="en-US" sz="1200" dirty="0">
-                <a:solidFill>
-                  <a:srgbClr val="0070C0"/>
-                </a:solidFill>
-                <a:latin typeface="Consolas" panose="020B0609020204030204" pitchFamily="49" charset="0"/>
-                <a:cs typeface="Consolas" panose="020B0609020204030204" pitchFamily="49" charset="0"/>
-              </a:rPr>
-              <a:t>(</a:t>
-            </a:r>
-            <a:r>
-              <a:rPr lang="en-US" sz="1200" dirty="0" err="1">
-                <a:solidFill>
-                  <a:srgbClr val="0070C0"/>
-                </a:solidFill>
-                <a:latin typeface="Consolas" panose="020B0609020204030204" pitchFamily="49" charset="0"/>
-                <a:cs typeface="Consolas" panose="020B0609020204030204" pitchFamily="49" charset="0"/>
-              </a:rPr>
-              <a:t>predProbs</a:t>
-            </a:r>
-            <a:r>
-              <a:rPr lang="en-US" sz="1200" dirty="0">
-                <a:solidFill>
-                  <a:srgbClr val="0070C0"/>
-                </a:solidFill>
-                <a:latin typeface="Consolas" panose="020B0609020204030204" pitchFamily="49" charset="0"/>
-                <a:cs typeface="Consolas" panose="020B0609020204030204" pitchFamily="49" charset="0"/>
-              </a:rPr>
-              <a:t>, axis=1))</a:t>
-            </a:r>
-          </a:p>
-          <a:p>
-            <a:endParaRPr lang="en-US" sz="1200" dirty="0">
-              <a:solidFill>
-                <a:srgbClr val="0070C0"/>
-              </a:solidFill>
-              <a:latin typeface="Consolas" panose="020B0609020204030204" pitchFamily="49" charset="0"/>
-              <a:cs typeface="Consolas" panose="020B0609020204030204" pitchFamily="49" charset="0"/>
-            </a:endParaRPr>
-          </a:p>
-          <a:p>
-            <a:r>
-              <a:rPr lang="en-US" sz="1200" dirty="0">
-                <a:solidFill>
-                  <a:srgbClr val="00B050"/>
-                </a:solidFill>
-                <a:latin typeface="Consolas" panose="020B0609020204030204" pitchFamily="49" charset="0"/>
-                <a:cs typeface="Consolas" panose="020B0609020204030204" pitchFamily="49" charset="0"/>
-              </a:rPr>
-              <a:t># Covariance matrix (uses @-</a:t>
-            </a:r>
-            <a:r>
-              <a:rPr lang="en-US" sz="1200" dirty="0" err="1">
-                <a:solidFill>
-                  <a:srgbClr val="00B050"/>
-                </a:solidFill>
-                <a:latin typeface="Consolas" panose="020B0609020204030204" pitchFamily="49" charset="0"/>
-                <a:cs typeface="Consolas" panose="020B0609020204030204" pitchFamily="49" charset="0"/>
-              </a:rPr>
-              <a:t>operater</a:t>
-            </a:r>
-            <a:r>
-              <a:rPr lang="en-US" sz="1200" dirty="0">
-                <a:solidFill>
-                  <a:srgbClr val="00B050"/>
-                </a:solidFill>
-                <a:latin typeface="Consolas" panose="020B0609020204030204" pitchFamily="49" charset="0"/>
-                <a:cs typeface="Consolas" panose="020B0609020204030204" pitchFamily="49" charset="0"/>
-              </a:rPr>
-              <a:t> for matrix multiplication in Python 3.5+)</a:t>
-            </a:r>
-          </a:p>
-          <a:p>
-            <a:r>
-              <a:rPr lang="en-US" sz="1200" dirty="0" err="1">
-                <a:solidFill>
-                  <a:srgbClr val="0070C0"/>
-                </a:solidFill>
-                <a:latin typeface="Consolas" panose="020B0609020204030204" pitchFamily="49" charset="0"/>
-                <a:cs typeface="Consolas" panose="020B0609020204030204" pitchFamily="49" charset="0"/>
-              </a:rPr>
-              <a:t>covLogit</a:t>
-            </a:r>
-            <a:r>
-              <a:rPr lang="en-US" sz="1200" dirty="0">
-                <a:solidFill>
-                  <a:srgbClr val="0070C0"/>
-                </a:solidFill>
-                <a:latin typeface="Consolas" panose="020B0609020204030204" pitchFamily="49" charset="0"/>
-                <a:cs typeface="Consolas" panose="020B0609020204030204" pitchFamily="49" charset="0"/>
-              </a:rPr>
-              <a:t> = </a:t>
-            </a:r>
-            <a:r>
-              <a:rPr lang="en-US" sz="1200" dirty="0" err="1">
-                <a:solidFill>
-                  <a:srgbClr val="0070C0"/>
-                </a:solidFill>
-                <a:latin typeface="Consolas" panose="020B0609020204030204" pitchFamily="49" charset="0"/>
-                <a:cs typeface="Consolas" panose="020B0609020204030204" pitchFamily="49" charset="0"/>
-              </a:rPr>
-              <a:t>np.linalg.inv</a:t>
-            </a:r>
-            <a:r>
-              <a:rPr lang="en-US" sz="1200" dirty="0">
-                <a:solidFill>
-                  <a:srgbClr val="0070C0"/>
-                </a:solidFill>
-                <a:latin typeface="Consolas" panose="020B0609020204030204" pitchFamily="49" charset="0"/>
-                <a:cs typeface="Consolas" panose="020B0609020204030204" pitchFamily="49" charset="0"/>
-              </a:rPr>
-              <a:t>(</a:t>
-            </a:r>
-            <a:r>
-              <a:rPr lang="en-US" sz="1200" dirty="0" err="1">
-                <a:solidFill>
-                  <a:srgbClr val="0070C0"/>
-                </a:solidFill>
-                <a:latin typeface="Consolas" panose="020B0609020204030204" pitchFamily="49" charset="0"/>
-                <a:cs typeface="Consolas" panose="020B0609020204030204" pitchFamily="49" charset="0"/>
-              </a:rPr>
-              <a:t>X_design.T</a:t>
-            </a:r>
-            <a:r>
-              <a:rPr lang="en-US" sz="1200" dirty="0">
-                <a:solidFill>
-                  <a:srgbClr val="0070C0"/>
-                </a:solidFill>
-                <a:latin typeface="Consolas" panose="020B0609020204030204" pitchFamily="49" charset="0"/>
-                <a:cs typeface="Consolas" panose="020B0609020204030204" pitchFamily="49" charset="0"/>
-              </a:rPr>
-              <a:t> @ V @ </a:t>
-            </a:r>
-            <a:r>
-              <a:rPr lang="en-US" sz="1200" dirty="0" err="1">
-                <a:solidFill>
-                  <a:srgbClr val="0070C0"/>
-                </a:solidFill>
-                <a:latin typeface="Consolas" panose="020B0609020204030204" pitchFamily="49" charset="0"/>
-                <a:cs typeface="Consolas" panose="020B0609020204030204" pitchFamily="49" charset="0"/>
-              </a:rPr>
-              <a:t>X_design</a:t>
-            </a:r>
-            <a:r>
-              <a:rPr lang="en-US" sz="1200" dirty="0">
-                <a:solidFill>
-                  <a:srgbClr val="0070C0"/>
-                </a:solidFill>
-                <a:latin typeface="Consolas" panose="020B0609020204030204" pitchFamily="49" charset="0"/>
-                <a:cs typeface="Consolas" panose="020B0609020204030204" pitchFamily="49" charset="0"/>
-              </a:rPr>
-              <a:t>)</a:t>
-            </a:r>
-          </a:p>
-          <a:p>
-            <a:r>
-              <a:rPr lang="en-US" sz="1200" dirty="0">
-                <a:solidFill>
-                  <a:srgbClr val="0070C0"/>
-                </a:solidFill>
-                <a:latin typeface="Consolas" panose="020B0609020204030204" pitchFamily="49" charset="0"/>
-                <a:cs typeface="Consolas" panose="020B0609020204030204" pitchFamily="49" charset="0"/>
-              </a:rPr>
-              <a:t>print("Covariance matrix: ", </a:t>
-            </a:r>
-            <a:r>
-              <a:rPr lang="en-US" sz="1200" dirty="0" err="1">
-                <a:solidFill>
-                  <a:srgbClr val="0070C0"/>
-                </a:solidFill>
-                <a:latin typeface="Consolas" panose="020B0609020204030204" pitchFamily="49" charset="0"/>
-                <a:cs typeface="Consolas" panose="020B0609020204030204" pitchFamily="49" charset="0"/>
-              </a:rPr>
-              <a:t>covLogit</a:t>
-            </a:r>
-            <a:r>
-              <a:rPr lang="en-US" sz="1200" dirty="0">
-                <a:solidFill>
-                  <a:srgbClr val="0070C0"/>
-                </a:solidFill>
-                <a:latin typeface="Consolas" panose="020B0609020204030204" pitchFamily="49" charset="0"/>
-                <a:cs typeface="Consolas" panose="020B0609020204030204" pitchFamily="49" charset="0"/>
-              </a:rPr>
-              <a:t>)</a:t>
-            </a:r>
-          </a:p>
-          <a:p>
-            <a:endParaRPr lang="en-US" sz="1200" dirty="0">
-              <a:solidFill>
-                <a:srgbClr val="0070C0"/>
-              </a:solidFill>
-              <a:latin typeface="Consolas" panose="020B0609020204030204" pitchFamily="49" charset="0"/>
-              <a:cs typeface="Consolas" panose="020B0609020204030204" pitchFamily="49" charset="0"/>
-            </a:endParaRPr>
-          </a:p>
-          <a:p>
-            <a:r>
-              <a:rPr lang="en-US" sz="1200" dirty="0">
-                <a:solidFill>
-                  <a:srgbClr val="00B050"/>
-                </a:solidFill>
-                <a:latin typeface="Consolas" panose="020B0609020204030204" pitchFamily="49" charset="0"/>
-                <a:cs typeface="Consolas" panose="020B0609020204030204" pitchFamily="49" charset="0"/>
-              </a:rPr>
-              <a:t># Standard errors</a:t>
-            </a:r>
-          </a:p>
-          <a:p>
-            <a:r>
-              <a:rPr lang="en-US" sz="1200" dirty="0">
-                <a:solidFill>
-                  <a:srgbClr val="0070C0"/>
-                </a:solidFill>
-                <a:latin typeface="Consolas" panose="020B0609020204030204" pitchFamily="49" charset="0"/>
-                <a:cs typeface="Consolas" panose="020B0609020204030204" pitchFamily="49" charset="0"/>
-              </a:rPr>
-              <a:t>print("Standard errors: ", </a:t>
-            </a:r>
-            <a:r>
-              <a:rPr lang="en-US" sz="1200" dirty="0" err="1">
-                <a:solidFill>
-                  <a:srgbClr val="0070C0"/>
-                </a:solidFill>
-                <a:latin typeface="Consolas" panose="020B0609020204030204" pitchFamily="49" charset="0"/>
-                <a:cs typeface="Consolas" panose="020B0609020204030204" pitchFamily="49" charset="0"/>
-              </a:rPr>
-              <a:t>np.sqrt</a:t>
-            </a:r>
-            <a:r>
-              <a:rPr lang="en-US" sz="1200" dirty="0">
-                <a:solidFill>
-                  <a:srgbClr val="0070C0"/>
-                </a:solidFill>
-                <a:latin typeface="Consolas" panose="020B0609020204030204" pitchFamily="49" charset="0"/>
-                <a:cs typeface="Consolas" panose="020B0609020204030204" pitchFamily="49" charset="0"/>
-              </a:rPr>
-              <a:t>(</a:t>
-            </a:r>
-            <a:r>
-              <a:rPr lang="en-US" sz="1200" dirty="0" err="1">
-                <a:solidFill>
-                  <a:srgbClr val="0070C0"/>
-                </a:solidFill>
-                <a:latin typeface="Consolas" panose="020B0609020204030204" pitchFamily="49" charset="0"/>
-                <a:cs typeface="Consolas" panose="020B0609020204030204" pitchFamily="49" charset="0"/>
-              </a:rPr>
-              <a:t>np.diag</a:t>
-            </a:r>
-            <a:r>
-              <a:rPr lang="en-US" sz="1200" dirty="0">
-                <a:solidFill>
-                  <a:srgbClr val="0070C0"/>
-                </a:solidFill>
-                <a:latin typeface="Consolas" panose="020B0609020204030204" pitchFamily="49" charset="0"/>
-                <a:cs typeface="Consolas" panose="020B0609020204030204" pitchFamily="49" charset="0"/>
-              </a:rPr>
-              <a:t>(</a:t>
-            </a:r>
-            <a:r>
-              <a:rPr lang="en-US" sz="1200" dirty="0" err="1">
-                <a:solidFill>
-                  <a:srgbClr val="0070C0"/>
-                </a:solidFill>
-                <a:latin typeface="Consolas" panose="020B0609020204030204" pitchFamily="49" charset="0"/>
-                <a:cs typeface="Consolas" panose="020B0609020204030204" pitchFamily="49" charset="0"/>
-              </a:rPr>
-              <a:t>covLogit</a:t>
-            </a:r>
-            <a:r>
-              <a:rPr lang="en-US" sz="1200" dirty="0">
-                <a:solidFill>
-                  <a:srgbClr val="0070C0"/>
-                </a:solidFill>
-                <a:latin typeface="Consolas" panose="020B0609020204030204" pitchFamily="49" charset="0"/>
-                <a:cs typeface="Consolas" panose="020B0609020204030204" pitchFamily="49" charset="0"/>
-              </a:rPr>
-              <a:t>)))</a:t>
-            </a:r>
-          </a:p>
-          <a:p>
-            <a:endParaRPr lang="en-US" sz="1200" dirty="0">
-              <a:solidFill>
-                <a:srgbClr val="0070C0"/>
-              </a:solidFill>
-              <a:latin typeface="Consolas" panose="020B0609020204030204" pitchFamily="49" charset="0"/>
-              <a:cs typeface="Consolas" panose="020B0609020204030204" pitchFamily="49" charset="0"/>
-            </a:endParaRPr>
-          </a:p>
-          <a:p>
-            <a:r>
-              <a:rPr lang="en-US" sz="1200" dirty="0">
-                <a:solidFill>
-                  <a:srgbClr val="00B050"/>
-                </a:solidFill>
-                <a:latin typeface="Consolas" panose="020B0609020204030204" pitchFamily="49" charset="0"/>
-                <a:cs typeface="Consolas" panose="020B0609020204030204" pitchFamily="49" charset="0"/>
-              </a:rPr>
-              <a:t># Wald statistic (coefficient / </a:t>
-            </a:r>
-            <a:r>
-              <a:rPr lang="en-US" sz="1200" dirty="0" err="1">
-                <a:solidFill>
-                  <a:srgbClr val="00B050"/>
-                </a:solidFill>
-                <a:latin typeface="Consolas" panose="020B0609020204030204" pitchFamily="49" charset="0"/>
-                <a:cs typeface="Consolas" panose="020B0609020204030204" pitchFamily="49" charset="0"/>
-              </a:rPr>
-              <a:t>s.e.</a:t>
-            </a:r>
-            <a:r>
-              <a:rPr lang="en-US" sz="1200" dirty="0">
-                <a:solidFill>
-                  <a:srgbClr val="00B050"/>
-                </a:solidFill>
-                <a:latin typeface="Consolas" panose="020B0609020204030204" pitchFamily="49" charset="0"/>
-                <a:cs typeface="Consolas" panose="020B0609020204030204" pitchFamily="49" charset="0"/>
-              </a:rPr>
-              <a:t>) ^ 2</a:t>
-            </a:r>
-          </a:p>
-          <a:p>
-            <a:r>
-              <a:rPr lang="en-US" sz="1200" dirty="0" err="1">
-                <a:solidFill>
-                  <a:srgbClr val="0070C0"/>
-                </a:solidFill>
-                <a:latin typeface="Consolas" panose="020B0609020204030204" pitchFamily="49" charset="0"/>
-                <a:cs typeface="Consolas" panose="020B0609020204030204" pitchFamily="49" charset="0"/>
-              </a:rPr>
-              <a:t>logitParams</a:t>
-            </a:r>
-            <a:r>
-              <a:rPr lang="en-US" sz="1200" dirty="0">
-                <a:solidFill>
-                  <a:srgbClr val="0070C0"/>
-                </a:solidFill>
-                <a:latin typeface="Consolas" panose="020B0609020204030204" pitchFamily="49" charset="0"/>
-                <a:cs typeface="Consolas" panose="020B0609020204030204" pitchFamily="49" charset="0"/>
-              </a:rPr>
-              <a:t> = </a:t>
-            </a:r>
-            <a:r>
-              <a:rPr lang="en-US" sz="1200" dirty="0" err="1">
-                <a:solidFill>
-                  <a:srgbClr val="0070C0"/>
-                </a:solidFill>
-                <a:latin typeface="Consolas" panose="020B0609020204030204" pitchFamily="49" charset="0"/>
-                <a:cs typeface="Consolas" panose="020B0609020204030204" pitchFamily="49" charset="0"/>
-              </a:rPr>
-              <a:t>np.insert</a:t>
-            </a:r>
-            <a:r>
-              <a:rPr lang="en-US" sz="1200" dirty="0">
-                <a:solidFill>
-                  <a:srgbClr val="0070C0"/>
-                </a:solidFill>
-                <a:latin typeface="Consolas" panose="020B0609020204030204" pitchFamily="49" charset="0"/>
-                <a:cs typeface="Consolas" panose="020B0609020204030204" pitchFamily="49" charset="0"/>
-              </a:rPr>
-              <a:t>(</a:t>
-            </a:r>
-            <a:r>
-              <a:rPr lang="en-US" sz="1200" dirty="0" err="1">
-                <a:solidFill>
-                  <a:srgbClr val="0070C0"/>
-                </a:solidFill>
-                <a:latin typeface="Consolas" panose="020B0609020204030204" pitchFamily="49" charset="0"/>
-                <a:cs typeface="Consolas" panose="020B0609020204030204" pitchFamily="49" charset="0"/>
-              </a:rPr>
-              <a:t>resLogit.coef</a:t>
-            </a:r>
-            <a:r>
-              <a:rPr lang="en-US" sz="1200" dirty="0">
-                <a:solidFill>
-                  <a:srgbClr val="0070C0"/>
-                </a:solidFill>
-                <a:latin typeface="Consolas" panose="020B0609020204030204" pitchFamily="49" charset="0"/>
-                <a:cs typeface="Consolas" panose="020B0609020204030204" pitchFamily="49" charset="0"/>
-              </a:rPr>
-              <a:t>_, 0, </a:t>
-            </a:r>
-            <a:r>
-              <a:rPr lang="en-US" sz="1200" dirty="0" err="1">
-                <a:solidFill>
-                  <a:srgbClr val="0070C0"/>
-                </a:solidFill>
-                <a:latin typeface="Consolas" panose="020B0609020204030204" pitchFamily="49" charset="0"/>
-                <a:cs typeface="Consolas" panose="020B0609020204030204" pitchFamily="49" charset="0"/>
-              </a:rPr>
-              <a:t>resLogit.intercept</a:t>
-            </a:r>
-            <a:r>
-              <a:rPr lang="en-US" sz="1200" dirty="0">
-                <a:solidFill>
-                  <a:srgbClr val="0070C0"/>
-                </a:solidFill>
-                <a:latin typeface="Consolas" panose="020B0609020204030204" pitchFamily="49" charset="0"/>
-                <a:cs typeface="Consolas" panose="020B0609020204030204" pitchFamily="49" charset="0"/>
-              </a:rPr>
-              <a:t>_)</a:t>
-            </a:r>
-          </a:p>
-          <a:p>
-            <a:r>
-              <a:rPr lang="en-US" sz="1200" dirty="0">
-                <a:solidFill>
-                  <a:srgbClr val="0070C0"/>
-                </a:solidFill>
-                <a:latin typeface="Consolas" panose="020B0609020204030204" pitchFamily="49" charset="0"/>
-                <a:cs typeface="Consolas" panose="020B0609020204030204" pitchFamily="49" charset="0"/>
-              </a:rPr>
-              <a:t>print("Wald statistics: ", (</a:t>
-            </a:r>
-            <a:r>
-              <a:rPr lang="en-US" sz="1200" dirty="0" err="1">
-                <a:solidFill>
-                  <a:srgbClr val="0070C0"/>
-                </a:solidFill>
-                <a:latin typeface="Consolas" panose="020B0609020204030204" pitchFamily="49" charset="0"/>
-                <a:cs typeface="Consolas" panose="020B0609020204030204" pitchFamily="49" charset="0"/>
-              </a:rPr>
-              <a:t>logitParams</a:t>
-            </a:r>
-            <a:r>
-              <a:rPr lang="en-US" sz="1200" dirty="0">
-                <a:solidFill>
-                  <a:srgbClr val="0070C0"/>
-                </a:solidFill>
-                <a:latin typeface="Consolas" panose="020B0609020204030204" pitchFamily="49" charset="0"/>
-                <a:cs typeface="Consolas" panose="020B0609020204030204" pitchFamily="49" charset="0"/>
-              </a:rPr>
-              <a:t> / </a:t>
-            </a:r>
-            <a:r>
-              <a:rPr lang="en-US" sz="1200" dirty="0" err="1">
-                <a:solidFill>
-                  <a:srgbClr val="0070C0"/>
-                </a:solidFill>
-                <a:latin typeface="Consolas" panose="020B0609020204030204" pitchFamily="49" charset="0"/>
-                <a:cs typeface="Consolas" panose="020B0609020204030204" pitchFamily="49" charset="0"/>
-              </a:rPr>
-              <a:t>np.sqrt</a:t>
-            </a:r>
-            <a:r>
-              <a:rPr lang="en-US" sz="1200" dirty="0">
-                <a:solidFill>
-                  <a:srgbClr val="0070C0"/>
-                </a:solidFill>
-                <a:latin typeface="Consolas" panose="020B0609020204030204" pitchFamily="49" charset="0"/>
-                <a:cs typeface="Consolas" panose="020B0609020204030204" pitchFamily="49" charset="0"/>
-              </a:rPr>
-              <a:t>(</a:t>
-            </a:r>
-            <a:r>
-              <a:rPr lang="en-US" sz="1200" dirty="0" err="1">
-                <a:solidFill>
-                  <a:srgbClr val="0070C0"/>
-                </a:solidFill>
-                <a:latin typeface="Consolas" panose="020B0609020204030204" pitchFamily="49" charset="0"/>
-                <a:cs typeface="Consolas" panose="020B0609020204030204" pitchFamily="49" charset="0"/>
-              </a:rPr>
-              <a:t>np.diag</a:t>
-            </a:r>
-            <a:r>
-              <a:rPr lang="en-US" sz="1200" dirty="0">
-                <a:solidFill>
-                  <a:srgbClr val="0070C0"/>
-                </a:solidFill>
-                <a:latin typeface="Consolas" panose="020B0609020204030204" pitchFamily="49" charset="0"/>
-                <a:cs typeface="Consolas" panose="020B0609020204030204" pitchFamily="49" charset="0"/>
-              </a:rPr>
-              <a:t>(</a:t>
-            </a:r>
-            <a:r>
-              <a:rPr lang="en-US" sz="1200" dirty="0" err="1">
-                <a:solidFill>
-                  <a:srgbClr val="0070C0"/>
-                </a:solidFill>
-                <a:latin typeface="Consolas" panose="020B0609020204030204" pitchFamily="49" charset="0"/>
-                <a:cs typeface="Consolas" panose="020B0609020204030204" pitchFamily="49" charset="0"/>
-              </a:rPr>
-              <a:t>covLogit</a:t>
-            </a:r>
-            <a:r>
-              <a:rPr lang="en-US" sz="1200" dirty="0">
-                <a:solidFill>
-                  <a:srgbClr val="0070C0"/>
-                </a:solidFill>
-                <a:latin typeface="Consolas" panose="020B0609020204030204" pitchFamily="49" charset="0"/>
-                <a:cs typeface="Consolas" panose="020B0609020204030204" pitchFamily="49" charset="0"/>
-              </a:rPr>
-              <a:t>))) ** 2)</a:t>
-            </a:r>
-          </a:p>
-        </p:txBody>
-      </p:sp>
-      <p:sp>
-        <p:nvSpPr>
-          <p:cNvPr id="8" name="TextBox 7">
-            <a:extLst>
-              <a:ext uri="{FF2B5EF4-FFF2-40B4-BE49-F238E27FC236}">
-                <a16:creationId xmlns:a16="http://schemas.microsoft.com/office/drawing/2014/main" id="{91E4CEC1-D586-204A-AEDD-B4DC1F159168}"/>
-              </a:ext>
-            </a:extLst>
-          </p:cNvPr>
-          <p:cNvSpPr txBox="1"/>
-          <p:nvPr/>
-        </p:nvSpPr>
-        <p:spPr>
-          <a:xfrm>
-            <a:off x="8738886" y="3912243"/>
-            <a:ext cx="1331088" cy="461665"/>
-          </a:xfrm>
-          <a:prstGeom prst="rect">
-            <a:avLst/>
-          </a:prstGeom>
-          <a:noFill/>
-        </p:spPr>
-        <p:txBody>
-          <a:bodyPr wrap="square" rtlCol="0">
-            <a:spAutoFit/>
-          </a:bodyPr>
-          <a:lstStyle/>
-          <a:p>
-            <a:r>
-              <a:rPr lang="en-US" sz="2400" dirty="0"/>
-              <a:t>(X</a:t>
-            </a:r>
-            <a:r>
-              <a:rPr lang="en-US" sz="2400" baseline="30000" dirty="0"/>
-              <a:t>T</a:t>
-            </a:r>
-            <a:r>
-              <a:rPr lang="en-US" sz="2400" dirty="0"/>
-              <a:t>VX)</a:t>
-            </a:r>
-            <a:r>
-              <a:rPr lang="en-US" sz="2400" baseline="30000" dirty="0"/>
-              <a:t>-1</a:t>
-            </a:r>
-          </a:p>
-        </p:txBody>
-      </p:sp>
-      <p:sp>
-        <p:nvSpPr>
-          <p:cNvPr id="9" name="Right Arrow 8">
-            <a:extLst>
-              <a:ext uri="{FF2B5EF4-FFF2-40B4-BE49-F238E27FC236}">
-                <a16:creationId xmlns:a16="http://schemas.microsoft.com/office/drawing/2014/main" id="{A5334153-9C64-5A4F-A993-FA239B8B8FEB}"/>
-              </a:ext>
-            </a:extLst>
-          </p:cNvPr>
-          <p:cNvSpPr/>
-          <p:nvPr/>
-        </p:nvSpPr>
-        <p:spPr>
-          <a:xfrm rot="10800000">
-            <a:off x="7708739" y="4062050"/>
-            <a:ext cx="810228" cy="230833"/>
-          </a:xfrm>
-          <a:prstGeom prst="rightArrow">
-            <a:avLst/>
-          </a:prstGeom>
-        </p:spPr>
-        <p:style>
-          <a:lnRef idx="2">
-            <a:schemeClr val="accent1">
-              <a:shade val="50000"/>
-            </a:schemeClr>
-          </a:lnRef>
-          <a:fillRef idx="1">
-            <a:schemeClr val="accent1"/>
-          </a:fillRef>
-          <a:effectRef idx="0">
-            <a:schemeClr val="accent1"/>
-          </a:effectRef>
-          <a:fontRef idx="minor">
-            <a:schemeClr val="lt1"/>
-          </a:fontRef>
-        </p:style>
-        <p:txBody>
-          <a:bodyPr rtlCol="0" anchor="ctr"/>
-          <a:lstStyle/>
-          <a:p>
-            <a:pPr algn="ctr"/>
-            <a:endParaRPr lang="en-US"/>
-          </a:p>
-        </p:txBody>
-      </p:sp>
-    </p:spTree>
-    <p:extLst>
-      <p:ext uri="{BB962C8B-B14F-4D97-AF65-F5344CB8AC3E}">
-        <p14:creationId xmlns:p14="http://schemas.microsoft.com/office/powerpoint/2010/main" val="1943376539"/>
-      </p:ext>
-    </p:extLst>
-  </p:cSld>
-  <p:clrMapOvr>
-    <a:masterClrMapping/>
-  </p:clrMapOvr>
-</p:sld>
-</file>
-
-<file path=ppt/slides/slide9.xml><?xml version="1.0" encoding="utf-8"?>
-<p:sld xmlns:a="http://schemas.openxmlformats.org/drawingml/2006/main" xmlns:r="http://schemas.openxmlformats.org/officeDocument/2006/relationships" xmlns:p="http://schemas.openxmlformats.org/presentationml/2006/main">
-  <p:cSld>
-    <p:spTree>
-      <p:nvGrpSpPr>
-        <p:cNvPr id="1" name=""/>
-        <p:cNvGrpSpPr/>
-        <p:nvPr/>
-      </p:nvGrpSpPr>
-      <p:grpSpPr>
-        <a:xfrm>
-          <a:off x="0" y="0"/>
-          <a:ext cx="0" cy="0"/>
-          <a:chOff x="0" y="0"/>
-          <a:chExt cx="0" cy="0"/>
-        </a:xfrm>
-      </p:grpSpPr>
-      <p:pic>
-        <p:nvPicPr>
-          <p:cNvPr id="12" name="Picture 11">
-            <a:extLst>
-              <a:ext uri="{FF2B5EF4-FFF2-40B4-BE49-F238E27FC236}">
-                <a16:creationId xmlns:a16="http://schemas.microsoft.com/office/drawing/2014/main" id="{8C6B45E0-C217-214D-A445-98D0CDD58813}"/>
-              </a:ext>
-            </a:extLst>
-          </p:cNvPr>
-          <p:cNvPicPr>
-            <a:picLocks noChangeAspect="1"/>
-          </p:cNvPicPr>
-          <p:nvPr/>
-        </p:nvPicPr>
-        <p:blipFill>
-          <a:blip r:embed="rId2" cstate="email">
-            <a:extLst>
-              <a:ext uri="{28A0092B-C50C-407E-A947-70E740481C1C}">
-                <a14:useLocalDpi xmlns:a14="http://schemas.microsoft.com/office/drawing/2010/main"/>
-              </a:ext>
-            </a:extLst>
-          </a:blip>
-          <a:stretch>
-            <a:fillRect/>
-          </a:stretch>
-        </p:blipFill>
-        <p:spPr>
-          <a:xfrm>
-            <a:off x="5465997" y="635429"/>
-            <a:ext cx="6596015" cy="3703645"/>
-          </a:xfrm>
-          <a:prstGeom prst="rect">
-            <a:avLst/>
-          </a:prstGeom>
-        </p:spPr>
-      </p:pic>
-      <p:sp>
-        <p:nvSpPr>
-          <p:cNvPr id="4" name="TextBox 3">
-            <a:extLst>
-              <a:ext uri="{FF2B5EF4-FFF2-40B4-BE49-F238E27FC236}">
-                <a16:creationId xmlns:a16="http://schemas.microsoft.com/office/drawing/2014/main" id="{10A39BA7-2EE5-C447-836E-94F5BA413B56}"/>
-              </a:ext>
-            </a:extLst>
-          </p:cNvPr>
-          <p:cNvSpPr txBox="1"/>
-          <p:nvPr/>
-        </p:nvSpPr>
-        <p:spPr>
-          <a:xfrm>
-            <a:off x="-15764" y="34227"/>
-            <a:ext cx="11240812" cy="523220"/>
-          </a:xfrm>
-          <a:prstGeom prst="rect">
-            <a:avLst/>
-          </a:prstGeom>
-          <a:noFill/>
-        </p:spPr>
-        <p:txBody>
-          <a:bodyPr wrap="square" rtlCol="0">
-            <a:spAutoFit/>
-          </a:bodyPr>
-          <a:lstStyle/>
-          <a:p>
-            <a:r>
-              <a:rPr lang="en-US" sz="2800" b="1" dirty="0"/>
-              <a:t>Logistic Regression and MLE (Maximum Likelihood Estimation)</a:t>
-            </a:r>
-          </a:p>
-        </p:txBody>
-      </p:sp>
-      <p:sp>
-        <p:nvSpPr>
-          <p:cNvPr id="5" name="TextBox 4">
-            <a:extLst>
-              <a:ext uri="{FF2B5EF4-FFF2-40B4-BE49-F238E27FC236}">
-                <a16:creationId xmlns:a16="http://schemas.microsoft.com/office/drawing/2014/main" id="{E0FA9489-6006-0F44-92B7-CF4D4E93E2F0}"/>
-              </a:ext>
-            </a:extLst>
-          </p:cNvPr>
-          <p:cNvSpPr txBox="1"/>
-          <p:nvPr/>
-        </p:nvSpPr>
-        <p:spPr>
-          <a:xfrm>
-            <a:off x="0" y="1526676"/>
-            <a:ext cx="5249918" cy="5109091"/>
-          </a:xfrm>
-          <a:prstGeom prst="rect">
-            <a:avLst/>
-          </a:prstGeom>
-          <a:noFill/>
-        </p:spPr>
-        <p:txBody>
-          <a:bodyPr wrap="square" rtlCol="0">
-            <a:spAutoFit/>
-          </a:bodyPr>
-          <a:lstStyle/>
-          <a:p>
-            <a:r>
-              <a:rPr lang="en-US" dirty="0"/>
-              <a:t>In Logistic Regression we fit log-odds with linear function.  How is this done?</a:t>
-            </a:r>
-          </a:p>
-          <a:p>
-            <a:endParaRPr lang="en-US" dirty="0"/>
-          </a:p>
-          <a:p>
-            <a:r>
-              <a:rPr lang="en-US" dirty="0"/>
-              <a:t>For our data points "x" we have values v0=0, v1=1.</a:t>
-            </a:r>
-          </a:p>
-          <a:p>
-            <a:r>
-              <a:rPr lang="en-US" sz="1200" b="1" dirty="0">
-                <a:solidFill>
-                  <a:srgbClr val="0070C0"/>
-                </a:solidFill>
-                <a:latin typeface="Consolas" panose="020B0609020204030204" pitchFamily="49" charset="0"/>
-                <a:cs typeface="Consolas" panose="020B0609020204030204" pitchFamily="49" charset="0"/>
-              </a:rPr>
-              <a:t>    ln(v0/(1-v0)) = ln(0/1) = ln(0) = -</a:t>
-            </a:r>
-            <a:r>
-              <a:rPr lang="en-US" sz="1200" b="1" dirty="0" err="1">
-                <a:solidFill>
-                  <a:srgbClr val="0070C0"/>
-                </a:solidFill>
-                <a:latin typeface="Consolas" panose="020B0609020204030204" pitchFamily="49" charset="0"/>
-                <a:cs typeface="Consolas" panose="020B0609020204030204" pitchFamily="49" charset="0"/>
-              </a:rPr>
-              <a:t>inf</a:t>
-            </a:r>
-            <a:endParaRPr lang="en-US" sz="1200" b="1" dirty="0">
-              <a:solidFill>
-                <a:srgbClr val="0070C0"/>
-              </a:solidFill>
-              <a:latin typeface="Consolas" panose="020B0609020204030204" pitchFamily="49" charset="0"/>
-              <a:cs typeface="Consolas" panose="020B0609020204030204" pitchFamily="49" charset="0"/>
-            </a:endParaRPr>
-          </a:p>
-          <a:p>
-            <a:r>
-              <a:rPr lang="en-US" sz="1200" b="1" dirty="0">
-                <a:solidFill>
-                  <a:srgbClr val="0070C0"/>
-                </a:solidFill>
-                <a:latin typeface="Consolas" panose="020B0609020204030204" pitchFamily="49" charset="0"/>
-                <a:cs typeface="Consolas" panose="020B0609020204030204" pitchFamily="49" charset="0"/>
-              </a:rPr>
-              <a:t>    ln(v1/(1-v1)) = ln(1/(1-1)) = ln(1/0) = ln(+</a:t>
-            </a:r>
-            <a:r>
-              <a:rPr lang="en-US" sz="1200" b="1" dirty="0" err="1">
-                <a:solidFill>
-                  <a:srgbClr val="0070C0"/>
-                </a:solidFill>
-                <a:latin typeface="Consolas" panose="020B0609020204030204" pitchFamily="49" charset="0"/>
-                <a:cs typeface="Consolas" panose="020B0609020204030204" pitchFamily="49" charset="0"/>
-              </a:rPr>
-              <a:t>inf</a:t>
-            </a:r>
-            <a:r>
-              <a:rPr lang="en-US" sz="1200" b="1" dirty="0">
-                <a:solidFill>
-                  <a:srgbClr val="0070C0"/>
-                </a:solidFill>
-                <a:latin typeface="Consolas" panose="020B0609020204030204" pitchFamily="49" charset="0"/>
-                <a:cs typeface="Consolas" panose="020B0609020204030204" pitchFamily="49" charset="0"/>
-              </a:rPr>
-              <a:t>) = +</a:t>
-            </a:r>
-            <a:r>
-              <a:rPr lang="en-US" sz="1200" b="1" dirty="0" err="1">
-                <a:solidFill>
-                  <a:srgbClr val="0070C0"/>
-                </a:solidFill>
-                <a:latin typeface="Consolas" panose="020B0609020204030204" pitchFamily="49" charset="0"/>
-                <a:cs typeface="Consolas" panose="020B0609020204030204" pitchFamily="49" charset="0"/>
-              </a:rPr>
-              <a:t>inf</a:t>
-            </a:r>
-            <a:endParaRPr lang="en-US" sz="1200" b="1" dirty="0">
-              <a:solidFill>
-                <a:srgbClr val="0070C0"/>
-              </a:solidFill>
-              <a:latin typeface="Consolas" panose="020B0609020204030204" pitchFamily="49" charset="0"/>
-              <a:cs typeface="Consolas" panose="020B0609020204030204" pitchFamily="49" charset="0"/>
-            </a:endParaRPr>
-          </a:p>
-          <a:p>
-            <a:endParaRPr lang="en-US" dirty="0"/>
-          </a:p>
-          <a:p>
-            <a:r>
-              <a:rPr lang="en-US" dirty="0"/>
-              <a:t>So we can not use MSE (Mean-Squared Error), because we can not operate on infinite values.</a:t>
-            </a:r>
-          </a:p>
-          <a:p>
-            <a:endParaRPr lang="en-US" dirty="0"/>
-          </a:p>
-          <a:p>
-            <a:r>
-              <a:rPr lang="en-US" dirty="0"/>
-              <a:t>So – what do we do?</a:t>
-            </a:r>
-          </a:p>
-          <a:p>
-            <a:r>
-              <a:rPr lang="en-US" dirty="0"/>
-              <a:t>We use MLE approach. </a:t>
-            </a:r>
-          </a:p>
-          <a:p>
-            <a:endParaRPr lang="en-US" dirty="0"/>
-          </a:p>
-          <a:p>
-            <a:r>
-              <a:rPr lang="en-US" dirty="0"/>
-              <a:t>For each data point "x" instead of using values 0 or 1, we use probabilities "p" using sigmoid function 1/1+exp(-b0-b1x).</a:t>
-            </a:r>
-          </a:p>
-          <a:p>
-            <a:r>
-              <a:rPr lang="en-US" dirty="0"/>
-              <a:t>More precisely, we use:</a:t>
-            </a:r>
-          </a:p>
-          <a:p>
-            <a:r>
-              <a:rPr lang="en-US" sz="1200" b="1" dirty="0">
-                <a:solidFill>
-                  <a:srgbClr val="0070C0"/>
-                </a:solidFill>
-                <a:latin typeface="Consolas" panose="020B0609020204030204" pitchFamily="49" charset="0"/>
-                <a:cs typeface="Consolas" panose="020B0609020204030204" pitchFamily="49" charset="0"/>
-              </a:rPr>
-              <a:t>    p for x where value should be 1</a:t>
-            </a:r>
-          </a:p>
-          <a:p>
-            <a:r>
-              <a:rPr lang="en-US" sz="1200" b="1" dirty="0">
-                <a:solidFill>
-                  <a:srgbClr val="0070C0"/>
-                </a:solidFill>
-                <a:latin typeface="Consolas" panose="020B0609020204030204" pitchFamily="49" charset="0"/>
-                <a:cs typeface="Consolas" panose="020B0609020204030204" pitchFamily="49" charset="0"/>
-              </a:rPr>
-              <a:t>   (1-p) for x where value should be 0</a:t>
-            </a:r>
-          </a:p>
-          <a:p>
-            <a:r>
-              <a:rPr lang="en-US" dirty="0"/>
-              <a:t>Then we multiply all these probabilities to get "</a:t>
-            </a:r>
-            <a:r>
-              <a:rPr lang="en-US" b="1" dirty="0">
-                <a:solidFill>
-                  <a:srgbClr val="0070C0"/>
-                </a:solidFill>
-              </a:rPr>
-              <a:t>Likelihood</a:t>
-            </a:r>
-            <a:r>
-              <a:rPr lang="en-US" dirty="0"/>
-              <a:t>".</a:t>
-            </a:r>
-          </a:p>
-          <a:p>
-            <a:r>
-              <a:rPr lang="en-US" dirty="0"/>
-              <a:t>Then we solve the problem of maximizing this </a:t>
-            </a:r>
-            <a:r>
-              <a:rPr lang="en-US" b="1" dirty="0">
-                <a:solidFill>
-                  <a:srgbClr val="0070C0"/>
-                </a:solidFill>
-              </a:rPr>
-              <a:t>Likelihood</a:t>
-            </a:r>
-            <a:r>
-              <a:rPr lang="en-US" dirty="0"/>
-              <a:t>.</a:t>
-            </a:r>
-          </a:p>
-          <a:p>
-            <a:r>
-              <a:rPr lang="en-US" dirty="0"/>
-              <a:t>It is convenient to use log(</a:t>
-            </a:r>
-            <a:r>
-              <a:rPr lang="en-US" b="1" dirty="0">
-                <a:solidFill>
-                  <a:srgbClr val="0070C0"/>
-                </a:solidFill>
-              </a:rPr>
-              <a:t>Likelihood</a:t>
-            </a:r>
-            <a:r>
-              <a:rPr lang="en-US" dirty="0"/>
-              <a:t>) – called </a:t>
-            </a:r>
-            <a:r>
-              <a:rPr lang="en-US" b="1" dirty="0">
-                <a:solidFill>
-                  <a:srgbClr val="0070C0"/>
-                </a:solidFill>
-              </a:rPr>
-              <a:t>log-likelihood</a:t>
-            </a:r>
-            <a:r>
-              <a:rPr lang="en-US" dirty="0"/>
-              <a:t>.</a:t>
-            </a:r>
-          </a:p>
-          <a:p>
-            <a:r>
-              <a:rPr lang="en-US" dirty="0"/>
-              <a:t>Then instead of multiplication, we calculate sum of individual probabilities.</a:t>
-            </a:r>
-          </a:p>
-        </p:txBody>
-      </p:sp>
-      <p:pic>
-        <p:nvPicPr>
-          <p:cNvPr id="6" name="Picture 5">
-            <a:extLst>
-              <a:ext uri="{FF2B5EF4-FFF2-40B4-BE49-F238E27FC236}">
-                <a16:creationId xmlns:a16="http://schemas.microsoft.com/office/drawing/2014/main" id="{7B865D29-C9D3-D64E-B0A6-A2CFD002EF62}"/>
-              </a:ext>
-            </a:extLst>
-          </p:cNvPr>
-          <p:cNvPicPr>
-            <a:picLocks noChangeAspect="1"/>
-          </p:cNvPicPr>
-          <p:nvPr/>
-        </p:nvPicPr>
-        <p:blipFill rotWithShape="1">
-          <a:blip r:embed="rId3" cstate="email">
-            <a:extLst>
-              <a:ext uri="{28A0092B-C50C-407E-A947-70E740481C1C}">
-                <a14:useLocalDpi xmlns:a14="http://schemas.microsoft.com/office/drawing/2010/main"/>
-              </a:ext>
-            </a:extLst>
-          </a:blip>
-          <a:srcRect/>
-          <a:stretch/>
-        </p:blipFill>
-        <p:spPr>
-          <a:xfrm>
-            <a:off x="173421" y="554748"/>
-            <a:ext cx="3597637" cy="877087"/>
-          </a:xfrm>
-          <a:prstGeom prst="rect">
-            <a:avLst/>
-          </a:prstGeom>
-        </p:spPr>
-      </p:pic>
-      <p:cxnSp>
-        <p:nvCxnSpPr>
-          <p:cNvPr id="8" name="Straight Connector 7">
-            <a:extLst>
-              <a:ext uri="{FF2B5EF4-FFF2-40B4-BE49-F238E27FC236}">
-                <a16:creationId xmlns:a16="http://schemas.microsoft.com/office/drawing/2014/main" id="{62822AF9-AA36-DE4E-AC3D-697A0E6DF2CB}"/>
-              </a:ext>
-            </a:extLst>
-          </p:cNvPr>
-          <p:cNvCxnSpPr/>
-          <p:nvPr/>
-        </p:nvCxnSpPr>
-        <p:spPr>
-          <a:xfrm>
-            <a:off x="5249918" y="851338"/>
-            <a:ext cx="0" cy="5784429"/>
-          </a:xfrm>
-          <a:prstGeom prst="line">
-            <a:avLst/>
-          </a:prstGeom>
-        </p:spPr>
-        <p:style>
-          <a:lnRef idx="1">
-            <a:schemeClr val="accent1"/>
-          </a:lnRef>
-          <a:fillRef idx="0">
-            <a:schemeClr val="accent1"/>
-          </a:fillRef>
-          <a:effectRef idx="0">
-            <a:schemeClr val="accent1"/>
-          </a:effectRef>
-          <a:fontRef idx="minor">
-            <a:schemeClr val="tx1"/>
-          </a:fontRef>
-        </p:style>
-      </p:cxnSp>
-      <p:sp>
-        <p:nvSpPr>
-          <p:cNvPr id="7" name="TextBox 6">
-            <a:extLst>
-              <a:ext uri="{FF2B5EF4-FFF2-40B4-BE49-F238E27FC236}">
-                <a16:creationId xmlns:a16="http://schemas.microsoft.com/office/drawing/2014/main" id="{E7B62654-72C2-EC41-B2E6-C8E4035B0A50}"/>
-              </a:ext>
-            </a:extLst>
-          </p:cNvPr>
-          <p:cNvSpPr txBox="1"/>
-          <p:nvPr/>
-        </p:nvSpPr>
-        <p:spPr>
-          <a:xfrm>
-            <a:off x="5294830" y="4228857"/>
-            <a:ext cx="650704" cy="523220"/>
-          </a:xfrm>
-          <a:prstGeom prst="rect">
-            <a:avLst/>
-          </a:prstGeom>
-          <a:noFill/>
-        </p:spPr>
-        <p:txBody>
-          <a:bodyPr wrap="square" rtlCol="0">
-            <a:spAutoFit/>
-          </a:bodyPr>
-          <a:lstStyle/>
-          <a:p>
-            <a:r>
-              <a:rPr lang="en-US" sz="2800" b="1" dirty="0"/>
-              <a:t>R</a:t>
-            </a:r>
-            <a:r>
-              <a:rPr lang="en-US" sz="2800" b="1" baseline="30000" dirty="0"/>
-              <a:t>2</a:t>
-            </a:r>
-          </a:p>
-        </p:txBody>
-      </p:sp>
-      <p:sp>
-        <p:nvSpPr>
-          <p:cNvPr id="9" name="TextBox 8">
-            <a:extLst>
-              <a:ext uri="{FF2B5EF4-FFF2-40B4-BE49-F238E27FC236}">
-                <a16:creationId xmlns:a16="http://schemas.microsoft.com/office/drawing/2014/main" id="{91C210FA-6380-FB43-A8F2-968EB87B8BB5}"/>
-              </a:ext>
-            </a:extLst>
-          </p:cNvPr>
-          <p:cNvSpPr txBox="1"/>
-          <p:nvPr/>
-        </p:nvSpPr>
-        <p:spPr>
-          <a:xfrm>
-            <a:off x="5391806" y="4684842"/>
-            <a:ext cx="6670206" cy="1461939"/>
-          </a:xfrm>
-          <a:prstGeom prst="rect">
-            <a:avLst/>
-          </a:prstGeom>
-          <a:noFill/>
-        </p:spPr>
-        <p:txBody>
-          <a:bodyPr wrap="square" rtlCol="0">
-            <a:spAutoFit/>
-          </a:bodyPr>
-          <a:lstStyle/>
-          <a:p>
-            <a:r>
-              <a:rPr lang="en-US" dirty="0"/>
-              <a:t>There are many pseudo-</a:t>
-            </a:r>
-            <a:r>
-              <a:rPr lang="en-US" b="1" dirty="0">
-                <a:solidFill>
-                  <a:srgbClr val="0070C0"/>
-                </a:solidFill>
-              </a:rPr>
-              <a:t>R</a:t>
-            </a:r>
-            <a:r>
-              <a:rPr lang="en-US" b="1" baseline="30000" dirty="0">
-                <a:solidFill>
-                  <a:srgbClr val="0070C0"/>
-                </a:solidFill>
-              </a:rPr>
-              <a:t>2</a:t>
-            </a:r>
-            <a:r>
-              <a:rPr lang="en-US" dirty="0"/>
-              <a:t> for Logistic Regression: </a:t>
-            </a:r>
-            <a:r>
-              <a:rPr lang="en-US" sz="1100" dirty="0">
-                <a:hlinkClick r:id="rId4"/>
-              </a:rPr>
-              <a:t>https://www.researchgate.net/publication/268055438_The_Assessment_of_Fit_in_the_Class_of_Logistic_Regression_Models_A_Pathway_out_of_the_Jungle_of_Pseudo-Rs_with_an_Extension_to_Multinomial_Logit_Models</a:t>
-            </a:r>
-            <a:r>
-              <a:rPr lang="en-US" sz="1100" dirty="0"/>
-              <a:t> </a:t>
-            </a:r>
-          </a:p>
-          <a:p>
-            <a:endParaRPr lang="en-US" dirty="0"/>
-          </a:p>
-          <a:p>
-            <a:r>
-              <a:rPr lang="en-US" dirty="0"/>
-              <a:t>The most commonly used is McFadden's Pseudo-</a:t>
-            </a:r>
-            <a:r>
-              <a:rPr lang="en-US" b="1" dirty="0">
-                <a:solidFill>
-                  <a:srgbClr val="0070C0"/>
-                </a:solidFill>
-              </a:rPr>
-              <a:t>R</a:t>
-            </a:r>
-            <a:r>
-              <a:rPr lang="en-US" b="1" baseline="30000" dirty="0">
-                <a:solidFill>
-                  <a:srgbClr val="0070C0"/>
-                </a:solidFill>
-              </a:rPr>
-              <a:t>2</a:t>
-            </a:r>
-            <a:r>
-              <a:rPr lang="en-US" dirty="0"/>
-              <a:t>. The value is in [0,1], tends to be biased downwards, so values 0.2-0.4 are considered good.</a:t>
-            </a:r>
-          </a:p>
-        </p:txBody>
-      </p:sp>
-      <p:pic>
-        <p:nvPicPr>
-          <p:cNvPr id="10" name="Picture 9">
-            <a:extLst>
-              <a:ext uri="{FF2B5EF4-FFF2-40B4-BE49-F238E27FC236}">
-                <a16:creationId xmlns:a16="http://schemas.microsoft.com/office/drawing/2014/main" id="{50A200B1-AEF9-3645-B83F-130B037CD7AD}"/>
-              </a:ext>
-            </a:extLst>
-          </p:cNvPr>
-          <p:cNvPicPr>
-            <a:picLocks noChangeAspect="1"/>
-          </p:cNvPicPr>
-          <p:nvPr/>
-        </p:nvPicPr>
-        <p:blipFill rotWithShape="1">
-          <a:blip r:embed="rId5" cstate="email">
-            <a:extLst>
-              <a:ext uri="{28A0092B-C50C-407E-A947-70E740481C1C}">
-                <a14:useLocalDpi xmlns:a14="http://schemas.microsoft.com/office/drawing/2010/main"/>
-              </a:ext>
-            </a:extLst>
-          </a:blip>
-          <a:srcRect/>
-          <a:stretch/>
-        </p:blipFill>
-        <p:spPr>
-          <a:xfrm>
-            <a:off x="6562167" y="6131318"/>
-            <a:ext cx="3734441" cy="712695"/>
-          </a:xfrm>
-          <a:prstGeom prst="rect">
-            <a:avLst/>
-          </a:prstGeom>
-        </p:spPr>
-      </p:pic>
-    </p:spTree>
-    <p:extLst>
-      <p:ext uri="{BB962C8B-B14F-4D97-AF65-F5344CB8AC3E}">
-        <p14:creationId xmlns:p14="http://schemas.microsoft.com/office/powerpoint/2010/main" val="653846543"/>
       </p:ext>
     </p:extLst>
   </p:cSld>
